--- a/a7/build/out/u5/A7 5.08 Converting Mass, Area and Volume - Slides.pptx
+++ b/a7/build/out/u5/A7 5.08 Converting Mass, Area and Volume - Slides.pptx
@@ -4350,7 +4350,7 @@
                 </a:solidFill>
                 <a:latin typeface="Lexend"/>
               </a:rPr>
-              <a:t>1 ft = 12 in. A tile is 3 ft</a:t>
+              <a:t>1 ft = 12 in. A tile is 5 ft</a:t>
             </a:r>
             <a:r>
               <a:rPr sz="2280" b="0" i="0" baseline="30000">
@@ -4662,7 +4662,7 @@
       </p:pic>
       <p:pic>
         <p:nvPicPr>
-          <p:cNvPr id="9" name="Picture 8" descr="37ae73f733103166.png"/>
+          <p:cNvPr id="9" name="Picture 8" descr="0454483ebb13af33.png"/>
           <p:cNvPicPr>
             <a:picLocks noChangeAspect="1"/>
           </p:cNvPicPr>
@@ -4714,7 +4714,7 @@
                 </a:solidFill>
                 <a:latin typeface="Lexend"/>
               </a:rPr>
-              <a:t>Answer:   432 in</a:t>
+              <a:t>Answer:   720 in</a:t>
             </a:r>
             <a:r>
               <a:rPr sz="3040" b="1" i="0" baseline="30000">
@@ -4986,7 +4986,7 @@
                 </a:solidFill>
                 <a:latin typeface="Lexend"/>
               </a:rPr>
-              <a:t>1 m = 100 cm. A rug is 2 m</a:t>
+              <a:t>1 yd = 3 ft. A patio is 5 yd</a:t>
             </a:r>
             <a:r>
               <a:rPr sz="2280" b="0" i="0" baseline="30000">
@@ -5039,7 +5039,7 @@
                 </a:solidFill>
                 <a:latin typeface="Lexend"/>
               </a:rPr>
-              <a:t>How many square centimetres is that?</a:t>
+              <a:t>How many square feet is that?</a:t>
             </a:r>
           </a:p>
         </p:txBody>
@@ -5302,7 +5302,7 @@
                 </a:solidFill>
                 <a:latin typeface="Lexend"/>
               </a:rPr>
-              <a:t>1 m = 100 cm. A rug is 2 m</a:t>
+              <a:t>1 yd = 3 ft. A patio is 5 yd</a:t>
             </a:r>
             <a:r>
               <a:rPr sz="2280" b="0" i="0" baseline="30000">
@@ -5355,14 +5355,14 @@
                 </a:solidFill>
                 <a:latin typeface="Lexend"/>
               </a:rPr>
-              <a:t>How many square centimetres is that?</a:t>
+              <a:t>How many square feet is that?</a:t>
             </a:r>
           </a:p>
         </p:txBody>
       </p:sp>
       <p:pic>
         <p:nvPicPr>
-          <p:cNvPr id="10" name="Picture 9" descr="3e1164a4ee768f9e.png"/>
+          <p:cNvPr id="10" name="Picture 9" descr="c9fe1cb570749efd.png"/>
           <p:cNvPicPr>
             <a:picLocks noChangeAspect="1"/>
           </p:cNvPicPr>
@@ -5376,8 +5376,8 @@
         </p:blipFill>
         <p:spPr>
           <a:xfrm>
-            <a:off x="3007004" y="2772884"/>
-            <a:ext cx="2145792" cy="368808"/>
+            <a:off x="3907711" y="2804888"/>
+            <a:ext cx="838200" cy="304800"/>
           </a:xfrm>
           <a:prstGeom prst="rect">
             <a:avLst/>
@@ -5392,8 +5392,8 @@
         </p:nvSpPr>
         <p:spPr>
           <a:xfrm>
-            <a:off x="5152796" y="2728688"/>
-            <a:ext cx="4245559" cy="457200"/>
+            <a:off x="4745911" y="2728688"/>
+            <a:ext cx="3757832" cy="457200"/>
           </a:xfrm>
           <a:prstGeom prst="rect">
             <a:avLst/>
@@ -5414,7 +5414,7 @@
                 </a:solidFill>
                 <a:latin typeface="Lexend"/>
               </a:rPr>
-              <a:t> cm</a:t>
+              <a:t> ft</a:t>
             </a:r>
             <a:r>
               <a:rPr sz="2750" b="0" i="0" baseline="30000">
@@ -5432,14 +5432,14 @@
                 </a:solidFill>
                 <a:latin typeface="Lexend"/>
               </a:rPr>
-              <a:t> in a square metre</a:t>
+              <a:t> in a square yard</a:t>
             </a:r>
           </a:p>
         </p:txBody>
       </p:sp>
       <p:pic>
         <p:nvPicPr>
-          <p:cNvPr id="12" name="Picture 11" descr="b501bf12fda4f046.png"/>
+          <p:cNvPr id="12" name="Picture 11" descr="33061e30c29e67c6.png"/>
           <p:cNvPicPr>
             <a:picLocks noChangeAspect="1"/>
           </p:cNvPicPr>
@@ -5453,8 +5453,8 @@
         </p:blipFill>
         <p:spPr>
           <a:xfrm>
-            <a:off x="3007004" y="3339812"/>
-            <a:ext cx="3035808" cy="313944"/>
+            <a:off x="3907711" y="3370292"/>
+            <a:ext cx="1402080" cy="252984"/>
           </a:xfrm>
           <a:prstGeom prst="rect">
             <a:avLst/>
@@ -5491,7 +5491,7 @@
                 </a:solidFill>
                 <a:latin typeface="Lexend"/>
               </a:rPr>
-              <a:t>Answer:   20,000 cm</a:t>
+              <a:t>Answer:   45 ft</a:t>
             </a:r>
             <a:r>
               <a:rPr sz="3040" b="1" i="0" baseline="30000">
@@ -6488,7 +6488,7 @@
                 </a:solidFill>
                 <a:latin typeface="Lexend"/>
               </a:rPr>
-              <a:t>How many litres is that?</a:t>
+              <a:t>How many liters is that?</a:t>
             </a:r>
           </a:p>
         </p:txBody>
@@ -6821,7 +6821,7 @@
                 </a:solidFill>
                 <a:latin typeface="Lexend"/>
               </a:rPr>
-              <a:t>How many litres is that?</a:t>
+              <a:t>How many liters is that?</a:t>
             </a:r>
           </a:p>
         </p:txBody>
@@ -7122,7 +7122,7 @@
         <p:spPr>
           <a:xfrm>
             <a:off x="1874519" y="1440180"/>
-            <a:ext cx="7193401" cy="457200"/>
+            <a:ext cx="7198446" cy="457200"/>
           </a:xfrm>
           <a:prstGeom prst="rect">
             <a:avLst/>
@@ -7143,7 +7143,7 @@
                 </a:solidFill>
                 <a:latin typeface="Lexend"/>
               </a:rPr>
-              <a:t>1.   1 in = 2.54 cm. How many centimetres is 12 in?</a:t>
+              <a:t>1.   1 in = 2.54 cm. How many centimeters is 12 in?</a:t>
             </a:r>
           </a:p>
         </p:txBody>
@@ -9326,7 +9326,7 @@
                 </a:solidFill>
                 <a:latin typeface="Lexend"/>
               </a:rPr>
-              <a:t>How many litres is that?</a:t>
+              <a:t>How many liters is that?</a:t>
             </a:r>
           </a:p>
         </p:txBody>
@@ -9659,7 +9659,7 @@
                 </a:solidFill>
                 <a:latin typeface="Lexend"/>
               </a:rPr>
-              <a:t>How many litres is that?</a:t>
+              <a:t>How many liters is that?</a:t>
             </a:r>
           </a:p>
         </p:txBody>
@@ -10040,7 +10040,7 @@
                 </a:solidFill>
                 <a:latin typeface="Lexend"/>
               </a:rPr>
-              <a:t>How many square centimetres is 1 m</a:t>
+              <a:t>How many square centimeters is 1 m</a:t>
             </a:r>
             <a:r>
               <a:rPr sz="2280" b="1" i="0" baseline="30000">
@@ -10627,7 +10627,7 @@
                 </a:solidFill>
                 <a:latin typeface="Lexend"/>
               </a:rPr>
-              <a:t>How many square centimetres is 1 m</a:t>
+              <a:t>How many square centimeters is 1 m</a:t>
             </a:r>
             <a:r>
               <a:rPr sz="2280" b="1" i="0" baseline="30000">
@@ -10976,7 +10976,7 @@
                 </a:solidFill>
                 <a:latin typeface="Lexend"/>
               </a:rPr>
-              <a:t>1 kg = 2.204 lb. A 5-lb bag of flour and a 2-kg bag of sugar.</a:t>
+              <a:t>1 kg = 2.204 lb. A 5-lb bag of flour and a 2.5-kg bag of sugar.</a:t>
             </a:r>
           </a:p>
         </p:txBody>
@@ -11309,7 +11309,7 @@
                 </a:solidFill>
                 <a:latin typeface="Lexend"/>
               </a:rPr>
-              <a:t>1 kg = 2.204 lb. A 5-lb bag of flour and a 2-kg bag of sugar.</a:t>
+              <a:t>1 kg = 2.204 lb. A 5-lb bag of flour and a 2.5-kg bag of sugar.</a:t>
             </a:r>
           </a:p>
         </p:txBody>
@@ -11351,7 +11351,7 @@
       </p:sp>
       <p:pic>
         <p:nvPicPr>
-          <p:cNvPr id="10" name="Picture 9" descr="3c7814376f1e1e3f.png"/>
+          <p:cNvPr id="10" name="Picture 9" descr="1da7a0dd2289da73.png"/>
           <p:cNvPicPr>
             <a:picLocks noChangeAspect="1"/>
           </p:cNvPicPr>
@@ -11366,7 +11366,7 @@
         <p:spPr>
           <a:xfrm>
             <a:off x="4628387" y="3144740"/>
-            <a:ext cx="3011424" cy="265176"/>
+            <a:ext cx="3014472" cy="265176"/>
           </a:xfrm>
           <a:prstGeom prst="rect">
             <a:avLst/>
@@ -11375,7 +11375,7 @@
       </p:pic>
       <p:pic>
         <p:nvPicPr>
-          <p:cNvPr id="11" name="Picture 10" descr="0519b0cae5da0167.png"/>
+          <p:cNvPr id="11" name="Picture 10" descr="d2ea0731c01267cd.png"/>
           <p:cNvPicPr>
             <a:picLocks noChangeAspect="1"/>
           </p:cNvPicPr>
@@ -11390,7 +11390,7 @@
         <p:spPr>
           <a:xfrm>
             <a:off x="4628387" y="3690332"/>
-            <a:ext cx="2642616" cy="252984"/>
+            <a:ext cx="2145792" cy="252984"/>
           </a:xfrm>
           <a:prstGeom prst="rect">
             <a:avLst/>
@@ -11427,7 +11427,7 @@
                 </a:solidFill>
                 <a:latin typeface="Lexend"/>
               </a:rPr>
-              <a:t>Answer:   The 5-lb bag, by 0.592 lb (about 0.6 lb)</a:t>
+              <a:t>Answer:   The sugar, by 0.51 lb</a:t>
             </a:r>
           </a:p>
         </p:txBody>
@@ -11669,7 +11669,7 @@
         <p:spPr>
           <a:xfrm>
             <a:off x="1874519" y="1440180"/>
-            <a:ext cx="7193401" cy="457200"/>
+            <a:ext cx="7198446" cy="457200"/>
           </a:xfrm>
           <a:prstGeom prst="rect">
             <a:avLst/>
@@ -11690,7 +11690,7 @@
                 </a:solidFill>
                 <a:latin typeface="Lexend"/>
               </a:rPr>
-              <a:t>1.   1 in = 2.54 cm. How many centimetres is 12 in?</a:t>
+              <a:t>1.   1 in = 2.54 cm. How many centimeters is 12 in?</a:t>
             </a:r>
           </a:p>
         </p:txBody>
@@ -11703,7 +11703,7 @@
         </p:nvSpPr>
         <p:spPr>
           <a:xfrm>
-            <a:off x="9479401" y="1440180"/>
+            <a:off x="9484446" y="1440180"/>
             <a:ext cx="1559241" cy="457200"/>
           </a:xfrm>
           <a:prstGeom prst="rect">
@@ -12293,7 +12293,7 @@
                 </a:solidFill>
                 <a:latin typeface="Lexend"/>
               </a:rPr>
-              <a:t>How many litres does it hold?</a:t>
+              <a:t>How many liters does it hold?</a:t>
             </a:r>
           </a:p>
         </p:txBody>
@@ -12626,7 +12626,7 @@
                 </a:solidFill>
                 <a:latin typeface="Lexend"/>
               </a:rPr>
-              <a:t>How many litres does it hold?</a:t>
+              <a:t>How many liters does it hold?</a:t>
             </a:r>
           </a:p>
         </p:txBody>
@@ -13939,7 +13939,7 @@
                 </a:solidFill>
                 <a:latin typeface="Lexend"/>
               </a:rPr>
-              <a:t>1 gal = 3.785 L. How many litres is 6 gal?</a:t>
+              <a:t>1 gal = 3.785 L. How many liters is 6 gal?</a:t>
             </a:r>
           </a:p>
         </p:txBody>
@@ -14009,7 +14009,7 @@
                 </a:solidFill>
                 <a:latin typeface="Lexend"/>
               </a:rPr>
-              <a:t>1 ft = 12 in. How many square inches is 5 ft</a:t>
+              <a:t>1 ft = 12 in. How many square inches is 9 ft</a:t>
             </a:r>
             <a:r>
               <a:rPr sz="1810" b="0" i="0" baseline="30000">
@@ -14097,7 +14097,7 @@
                 </a:solidFill>
                 <a:latin typeface="Lexend"/>
               </a:rPr>
-              <a:t>1 c = 8 fl oz and 1 c = 0.24 L. How many litres is 24 fl oz?</a:t>
+              <a:t>1 c = 8 fl oz and 1 c = 0.24 L. How many liters is 24 fl oz?</a:t>
             </a:r>
           </a:p>
         </p:txBody>
@@ -14167,7 +14167,7 @@
                 </a:solidFill>
                 <a:latin typeface="Lexend"/>
               </a:rPr>
-              <a:t>1 m = 100 cm. How many square centimetres is 4 m</a:t>
+              <a:t>1 ft = 0.305 m. How many square meters is 30 ft</a:t>
             </a:r>
             <a:r>
               <a:rPr sz="1810" b="0" i="0" baseline="30000">
@@ -14185,7 +14185,7 @@
                 </a:solidFill>
                 <a:latin typeface="Lexend"/>
               </a:rPr>
-              <a:t>?</a:t>
+              <a:t>? (Round to two places.)</a:t>
             </a:r>
           </a:p>
         </p:txBody>
@@ -16058,7 +16058,7 @@
       </p:cxnSp>
       <p:pic>
         <p:nvPicPr>
-          <p:cNvPr id="10" name="Picture 9" descr="g55d2d7b41162eddd.png"/>
+          <p:cNvPr id="10" name="Picture 9" descr="g8b3f50c43905f910.png"/>
           <p:cNvPicPr>
             <a:picLocks noChangeAspect="1"/>
           </p:cNvPicPr>
@@ -16072,8 +16072,8 @@
         </p:blipFill>
         <p:spPr>
           <a:xfrm>
-            <a:off x="4526279" y="1993392"/>
-            <a:ext cx="3108960" cy="3255762"/>
+            <a:off x="4983479" y="1993392"/>
+            <a:ext cx="2194560" cy="2298185"/>
           </a:xfrm>
           <a:prstGeom prst="rect">
             <a:avLst/>
@@ -16096,8 +16096,32 @@
         </p:blipFill>
         <p:spPr>
           <a:xfrm>
-            <a:off x="2602992" y="5430510"/>
+            <a:off x="2602992" y="4472933"/>
             <a:ext cx="6955536" cy="341376"/>
+          </a:xfrm>
+          <a:prstGeom prst="rect">
+            <a:avLst/>
+          </a:prstGeom>
+        </p:spPr>
+      </p:pic>
+      <p:pic>
+        <p:nvPicPr>
+          <p:cNvPr id="12" name="Picture 11" descr="e1f2231684ab9c0e.png"/>
+          <p:cNvPicPr>
+            <a:picLocks noChangeAspect="1"/>
+          </p:cNvPicPr>
+          <p:nvPr/>
+        </p:nvPicPr>
+        <p:blipFill>
+          <a:blip r:embed="rId4"/>
+          <a:stretch>
+            <a:fillRect/>
+          </a:stretch>
+        </p:blipFill>
+        <p:spPr>
+          <a:xfrm>
+            <a:off x="2423160" y="5125205"/>
+            <a:ext cx="7315200" cy="408432"/>
           </a:xfrm>
           <a:prstGeom prst="rect">
             <a:avLst/>
@@ -16719,7 +16743,7 @@
                 </a:solidFill>
                 <a:latin typeface="Lexend"/>
               </a:rPr>
-              <a:t>1 lb = 0.454 kg. A suitcase weighs 50 lb.</a:t>
+              <a:t>1 lb = 0.454 kg. A suitcase weighs 70 lb.</a:t>
             </a:r>
           </a:p>
         </p:txBody>
@@ -16989,7 +17013,7 @@
       </p:sp>
       <p:pic>
         <p:nvPicPr>
-          <p:cNvPr id="8" name="Picture 7" descr="3ccac1a983b7a5a5.png"/>
+          <p:cNvPr id="8" name="Picture 7" descr="3192ce45c55d31b5.png"/>
           <p:cNvPicPr>
             <a:picLocks noChangeAspect="1"/>
           </p:cNvPicPr>
@@ -17004,7 +17028,7 @@
         <p:spPr>
           <a:xfrm>
             <a:off x="1828800" y="1920240"/>
-            <a:ext cx="2859024" cy="277368"/>
+            <a:ext cx="3029712" cy="277368"/>
           </a:xfrm>
           <a:prstGeom prst="rect">
             <a:avLst/>
@@ -17041,7 +17065,7 @@
                 </a:solidFill>
                 <a:latin typeface="Lexend"/>
               </a:rPr>
-              <a:t>Answer:   22.7 kg</a:t>
+              <a:t>Answer:   31.78 kg</a:t>
             </a:r>
           </a:p>
         </p:txBody>

--- a/a7/build/out/u5/A7 5.08 Converting Mass, Area and Volume - Slides.pptx
+++ b/a7/build/out/u5/A7 5.08 Converting Mass, Area and Volume - Slides.pptx
@@ -3665,29 +3665,53 @@
           </a:p>
         </p:txBody>
       </p:sp>
-      <p:sp>
-        <p:nvSpPr>
-          <p:cNvPr id="8" name="TextBox 7"/>
-          <p:cNvSpPr txBox="1"/>
-          <p:nvPr/>
-        </p:nvSpPr>
-        <p:spPr>
-          <a:xfrm>
-            <a:off x="777240" y="1600200"/>
-            <a:ext cx="10607040" cy="429370"/>
-          </a:xfrm>
-          <a:prstGeom prst="rect">
-            <a:avLst/>
-          </a:prstGeom>
-          <a:noFill/>
-        </p:spPr>
-        <p:txBody>
-          <a:bodyPr wrap="square" lIns="45720" rIns="45720" tIns="18288" bIns="18288" anchor="t">
-            <a:spAutoFit/>
-          </a:bodyPr>
-          <a:lstStyle/>
-          <a:p>
-            <a:pPr algn="ctr"/>
+      <p:pic>
+        <p:nvPicPr>
+          <p:cNvPr id="8" name="Picture 7" descr="86539a90126a0911.png"/>
+          <p:cNvPicPr>
+            <a:picLocks noChangeAspect="1"/>
+          </p:cNvPicPr>
+          <p:nvPr/>
+        </p:nvPicPr>
+        <p:blipFill>
+          <a:blip r:embed="rId2"/>
+          <a:stretch>
+            <a:fillRect/>
+          </a:stretch>
+        </p:blipFill>
+        <p:spPr>
+          <a:xfrm>
+            <a:off x="3442131" y="1688592"/>
+            <a:ext cx="1987296" cy="304800"/>
+          </a:xfrm>
+          <a:prstGeom prst="rect">
+            <a:avLst/>
+          </a:prstGeom>
+        </p:spPr>
+      </p:pic>
+      <p:sp>
+        <p:nvSpPr>
+          <p:cNvPr id="9" name="TextBox 8"/>
+          <p:cNvSpPr txBox="1"/>
+          <p:nvPr/>
+        </p:nvSpPr>
+        <p:spPr>
+          <a:xfrm>
+            <a:off x="5429427" y="1577340"/>
+            <a:ext cx="3427120" cy="457200"/>
+          </a:xfrm>
+          <a:prstGeom prst="rect">
+            <a:avLst/>
+          </a:prstGeom>
+          <a:noFill/>
+        </p:spPr>
+        <p:txBody>
+          <a:bodyPr wrap="none" lIns="45720" rIns="45720" tIns="18288" bIns="18288" anchor="ctr">
+            <a:noAutofit/>
+          </a:bodyPr>
+          <a:lstStyle/>
+          <a:p>
+            <a:pPr algn="l"/>
             <a:r>
               <a:rPr sz="2280" b="0" i="0">
                 <a:solidFill>
@@ -3695,20 +3719,20 @@
                 </a:solidFill>
                 <a:latin typeface="Lexend"/>
               </a:rPr>
-              <a:t>1 lb = 0.454 kg. A crate weighs 90 lb.</a:t>
-            </a:r>
-          </a:p>
-        </p:txBody>
-      </p:sp>
-      <p:sp>
-        <p:nvSpPr>
-          <p:cNvPr id="9" name="TextBox 8"/>
-          <p:cNvSpPr txBox="1"/>
-          <p:nvPr/>
-        </p:nvSpPr>
-        <p:spPr>
-          <a:xfrm>
-            <a:off x="777240" y="2139298"/>
+              <a:t>. A crate weighs 90 lb.</a:t>
+            </a:r>
+          </a:p>
+        </p:txBody>
+      </p:sp>
+      <p:sp>
+        <p:nvSpPr>
+          <p:cNvPr id="10" name="TextBox 9"/>
+          <p:cNvSpPr txBox="1"/>
+          <p:nvPr/>
+        </p:nvSpPr>
+        <p:spPr>
+          <a:xfrm>
+            <a:off x="777240" y="2286000"/>
             <a:ext cx="10607040" cy="429370"/>
           </a:xfrm>
           <a:prstGeom prst="rect">
@@ -3963,79 +3987,9 @@
           </a:p>
         </p:txBody>
       </p:sp>
-      <p:sp>
-        <p:nvSpPr>
-          <p:cNvPr id="8" name="TextBox 7"/>
-          <p:cNvSpPr txBox="1"/>
-          <p:nvPr/>
-        </p:nvSpPr>
-        <p:spPr>
-          <a:xfrm>
-            <a:off x="777240" y="1600200"/>
-            <a:ext cx="10607040" cy="429370"/>
-          </a:xfrm>
-          <a:prstGeom prst="rect">
-            <a:avLst/>
-          </a:prstGeom>
-          <a:noFill/>
-        </p:spPr>
-        <p:txBody>
-          <a:bodyPr wrap="square" lIns="45720" rIns="45720" tIns="18288" bIns="18288" anchor="t">
-            <a:spAutoFit/>
-          </a:bodyPr>
-          <a:lstStyle/>
-          <a:p>
-            <a:pPr algn="ctr"/>
-            <a:r>
-              <a:rPr sz="2280" b="0" i="0">
-                <a:solidFill>
-                  <a:srgbClr val="1A1A1A"/>
-                </a:solidFill>
-                <a:latin typeface="Lexend"/>
-              </a:rPr>
-              <a:t>1 lb = 0.454 kg. A crate weighs 90 lb.</a:t>
-            </a:r>
-          </a:p>
-        </p:txBody>
-      </p:sp>
-      <p:sp>
-        <p:nvSpPr>
-          <p:cNvPr id="9" name="TextBox 8"/>
-          <p:cNvSpPr txBox="1"/>
-          <p:nvPr/>
-        </p:nvSpPr>
-        <p:spPr>
-          <a:xfrm>
-            <a:off x="777240" y="2139298"/>
-            <a:ext cx="10607040" cy="429370"/>
-          </a:xfrm>
-          <a:prstGeom prst="rect">
-            <a:avLst/>
-          </a:prstGeom>
-          <a:noFill/>
-        </p:spPr>
-        <p:txBody>
-          <a:bodyPr wrap="square" lIns="45720" rIns="45720" tIns="18288" bIns="18288" anchor="t">
-            <a:spAutoFit/>
-          </a:bodyPr>
-          <a:lstStyle/>
-          <a:p>
-            <a:pPr algn="ctr"/>
-            <a:r>
-              <a:rPr sz="2280" b="0" i="0">
-                <a:solidFill>
-                  <a:srgbClr val="1A1A1A"/>
-                </a:solidFill>
-                <a:latin typeface="Lexend"/>
-              </a:rPr>
-              <a:t>How many kilograms is that?</a:t>
-            </a:r>
-          </a:p>
-        </p:txBody>
-      </p:sp>
       <p:pic>
         <p:nvPicPr>
-          <p:cNvPr id="10" name="Picture 9" descr="ac569d9db4172995.png"/>
+          <p:cNvPr id="8" name="Picture 7" descr="b10388bb53fbdadc.png"/>
           <p:cNvPicPr>
             <a:picLocks noChangeAspect="1"/>
           </p:cNvPicPr>
@@ -4049,7 +4003,101 @@
         </p:blipFill>
         <p:spPr>
           <a:xfrm>
-            <a:off x="4716779" y="2829272"/>
+            <a:off x="3443655" y="1688592"/>
+            <a:ext cx="1984248" cy="304800"/>
+          </a:xfrm>
+          <a:prstGeom prst="rect">
+            <a:avLst/>
+          </a:prstGeom>
+        </p:spPr>
+      </p:pic>
+      <p:sp>
+        <p:nvSpPr>
+          <p:cNvPr id="9" name="TextBox 8"/>
+          <p:cNvSpPr txBox="1"/>
+          <p:nvPr/>
+        </p:nvSpPr>
+        <p:spPr>
+          <a:xfrm>
+            <a:off x="5427903" y="1577340"/>
+            <a:ext cx="3427120" cy="457200"/>
+          </a:xfrm>
+          <a:prstGeom prst="rect">
+            <a:avLst/>
+          </a:prstGeom>
+          <a:noFill/>
+        </p:spPr>
+        <p:txBody>
+          <a:bodyPr wrap="none" lIns="45720" rIns="45720" tIns="18288" bIns="18288" anchor="ctr">
+            <a:noAutofit/>
+          </a:bodyPr>
+          <a:lstStyle/>
+          <a:p>
+            <a:pPr algn="l"/>
+            <a:r>
+              <a:rPr sz="2280" b="0" i="0">
+                <a:solidFill>
+                  <a:srgbClr val="1A1A1A"/>
+                </a:solidFill>
+                <a:latin typeface="Lexend"/>
+              </a:rPr>
+              <a:t>. A crate weighs 90 lb.</a:t>
+            </a:r>
+          </a:p>
+        </p:txBody>
+      </p:sp>
+      <p:sp>
+        <p:nvSpPr>
+          <p:cNvPr id="10" name="TextBox 9"/>
+          <p:cNvSpPr txBox="1"/>
+          <p:nvPr/>
+        </p:nvSpPr>
+        <p:spPr>
+          <a:xfrm>
+            <a:off x="777240" y="2286000"/>
+            <a:ext cx="10607040" cy="429370"/>
+          </a:xfrm>
+          <a:prstGeom prst="rect">
+            <a:avLst/>
+          </a:prstGeom>
+          <a:noFill/>
+        </p:spPr>
+        <p:txBody>
+          <a:bodyPr wrap="square" lIns="45720" rIns="45720" tIns="18288" bIns="18288" anchor="t">
+            <a:spAutoFit/>
+          </a:bodyPr>
+          <a:lstStyle/>
+          <a:p>
+            <a:pPr algn="ctr"/>
+            <a:r>
+              <a:rPr sz="2280" b="0" i="0">
+                <a:solidFill>
+                  <a:srgbClr val="1A1A1A"/>
+                </a:solidFill>
+                <a:latin typeface="Lexend"/>
+              </a:rPr>
+              <a:t>How many kilograms is that?</a:t>
+            </a:r>
+          </a:p>
+        </p:txBody>
+      </p:sp>
+      <p:pic>
+        <p:nvPicPr>
+          <p:cNvPr id="11" name="Picture 10" descr="ac569d9db4172995.png"/>
+          <p:cNvPicPr>
+            <a:picLocks noChangeAspect="1"/>
+          </p:cNvPicPr>
+          <p:nvPr/>
+        </p:nvPicPr>
+        <p:blipFill>
+          <a:blip r:embed="rId3"/>
+          <a:stretch>
+            <a:fillRect/>
+          </a:stretch>
+        </p:blipFill>
+        <p:spPr>
+          <a:xfrm>
+            <a:off x="4716779" y="2992166"/>
             <a:ext cx="2837688" cy="256032"/>
           </a:xfrm>
           <a:prstGeom prst="rect">
@@ -4059,7 +4107,7 @@
       </p:pic>
       <p:sp>
         <p:nvSpPr>
-          <p:cNvPr id="11" name="TextBox 10"/>
+          <p:cNvPr id="12" name="TextBox 11"/>
           <p:cNvSpPr txBox="1"/>
           <p:nvPr/>
         </p:nvSpPr>
@@ -4320,29 +4368,53 @@
           </a:p>
         </p:txBody>
       </p:sp>
-      <p:sp>
-        <p:nvSpPr>
-          <p:cNvPr id="8" name="TextBox 7"/>
-          <p:cNvSpPr txBox="1"/>
-          <p:nvPr/>
-        </p:nvSpPr>
-        <p:spPr>
-          <a:xfrm>
-            <a:off x="777240" y="2103120"/>
-            <a:ext cx="10607040" cy="429370"/>
-          </a:xfrm>
-          <a:prstGeom prst="rect">
-            <a:avLst/>
-          </a:prstGeom>
-          <a:noFill/>
-        </p:spPr>
-        <p:txBody>
-          <a:bodyPr wrap="square" lIns="45720" rIns="45720" tIns="18288" bIns="18288" anchor="t">
-            <a:spAutoFit/>
-          </a:bodyPr>
-          <a:lstStyle/>
-          <a:p>
-            <a:pPr algn="ctr"/>
+      <p:pic>
+        <p:nvPicPr>
+          <p:cNvPr id="8" name="Picture 7" descr="a7e24ba549ecbc3a.png"/>
+          <p:cNvPicPr>
+            <a:picLocks noChangeAspect="1"/>
+          </p:cNvPicPr>
+          <p:nvPr/>
+        </p:nvPicPr>
+        <p:blipFill>
+          <a:blip r:embed="rId2"/>
+          <a:stretch>
+            <a:fillRect/>
+          </a:stretch>
+        </p:blipFill>
+        <p:spPr>
+          <a:xfrm>
+            <a:off x="3789429" y="2182368"/>
+            <a:ext cx="1347216" cy="240791"/>
+          </a:xfrm>
+          <a:prstGeom prst="rect">
+            <a:avLst/>
+          </a:prstGeom>
+        </p:spPr>
+      </p:pic>
+      <p:sp>
+        <p:nvSpPr>
+          <p:cNvPr id="9" name="TextBox 8"/>
+          <p:cNvSpPr txBox="1"/>
+          <p:nvPr/>
+        </p:nvSpPr>
+        <p:spPr>
+          <a:xfrm>
+            <a:off x="5136645" y="2080260"/>
+            <a:ext cx="1528218" cy="457200"/>
+          </a:xfrm>
+          <a:prstGeom prst="rect">
+            <a:avLst/>
+          </a:prstGeom>
+          <a:noFill/>
+        </p:spPr>
+        <p:txBody>
+          <a:bodyPr wrap="none" lIns="45720" rIns="45720" tIns="18288" bIns="18288" anchor="ctr">
+            <a:noAutofit/>
+          </a:bodyPr>
+          <a:lstStyle/>
+          <a:p>
+            <a:pPr algn="l"/>
             <a:r>
               <a:rPr sz="2280" b="0" i="0">
                 <a:solidFill>
@@ -4350,24 +4422,65 @@
                 </a:solidFill>
                 <a:latin typeface="Lexend"/>
               </a:rPr>
-              <a:t>1 ft = 12 in. A tile is 5 ft</a:t>
-            </a:r>
-            <a:r>
-              <a:rPr sz="2280" b="0" i="0" baseline="30000">
+              <a:t>. A tile is </a:t>
+            </a:r>
+          </a:p>
+        </p:txBody>
+      </p:sp>
+      <p:pic>
+        <p:nvPicPr>
+          <p:cNvPr id="10" name="Picture 9" descr="8ba99cdd4ae998bf.png"/>
+          <p:cNvPicPr>
+            <a:picLocks noChangeAspect="1"/>
+          </p:cNvPicPr>
+          <p:nvPr/>
+        </p:nvPicPr>
+        <p:blipFill>
+          <a:blip r:embed="rId3"/>
+          <a:stretch>
+            <a:fillRect/>
+          </a:stretch>
+        </p:blipFill>
+        <p:spPr>
+          <a:xfrm>
+            <a:off x="6527703" y="2148840"/>
+            <a:ext cx="576072" cy="277368"/>
+          </a:xfrm>
+          <a:prstGeom prst="rect">
+            <a:avLst/>
+          </a:prstGeom>
+        </p:spPr>
+      </p:pic>
+      <p:sp>
+        <p:nvSpPr>
+          <p:cNvPr id="11" name="TextBox 10"/>
+          <p:cNvSpPr txBox="1"/>
+          <p:nvPr/>
+        </p:nvSpPr>
+        <p:spPr>
+          <a:xfrm>
+            <a:off x="7103775" y="2080260"/>
+            <a:ext cx="1405474" cy="457200"/>
+          </a:xfrm>
+          <a:prstGeom prst="rect">
+            <a:avLst/>
+          </a:prstGeom>
+          <a:noFill/>
+        </p:spPr>
+        <p:txBody>
+          <a:bodyPr wrap="none" lIns="45720" rIns="45720" tIns="18288" bIns="18288" anchor="ctr">
+            <a:noAutofit/>
+          </a:bodyPr>
+          <a:lstStyle/>
+          <a:p>
+            <a:pPr algn="l"/>
+            <a:r>
+              <a:rPr sz="2280" b="0" i="0">
                 <a:solidFill>
                   <a:srgbClr val="1A1A1A"/>
                 </a:solidFill>
                 <a:latin typeface="Lexend"/>
               </a:rPr>
-              <a:t>2</a:t>
-            </a:r>
-            <a:r>
-              <a:rPr sz="2280" b="0" i="0">
-                <a:solidFill>
-                  <a:srgbClr val="1A1A1A"/>
-                </a:solidFill>
-                <a:latin typeface="Lexend"/>
-              </a:rPr>
               <a:t> in area.</a:t>
             </a:r>
           </a:p>
@@ -4375,13 +4488,13 @@
       </p:sp>
       <p:sp>
         <p:nvSpPr>
-          <p:cNvPr id="9" name="TextBox 8"/>
-          <p:cNvSpPr txBox="1"/>
-          <p:nvPr/>
-        </p:nvSpPr>
-        <p:spPr>
-          <a:xfrm>
-            <a:off x="777240" y="2825098"/>
+          <p:cNvPr id="12" name="TextBox 11"/>
+          <p:cNvSpPr txBox="1"/>
+          <p:nvPr/>
+        </p:nvSpPr>
+        <p:spPr>
+          <a:xfrm>
+            <a:off x="777240" y="2971800"/>
             <a:ext cx="10607040" cy="429370"/>
           </a:xfrm>
           <a:prstGeom prst="rect">
@@ -4956,29 +5069,53 @@
           </a:p>
         </p:txBody>
       </p:sp>
-      <p:sp>
-        <p:nvSpPr>
-          <p:cNvPr id="8" name="TextBox 7"/>
-          <p:cNvSpPr txBox="1"/>
-          <p:nvPr/>
-        </p:nvSpPr>
-        <p:spPr>
-          <a:xfrm>
-            <a:off x="777240" y="1600200"/>
-            <a:ext cx="10607040" cy="429370"/>
-          </a:xfrm>
-          <a:prstGeom prst="rect">
-            <a:avLst/>
-          </a:prstGeom>
-          <a:noFill/>
-        </p:spPr>
-        <p:txBody>
-          <a:bodyPr wrap="square" lIns="45720" rIns="45720" tIns="18288" bIns="18288" anchor="t">
-            <a:spAutoFit/>
-          </a:bodyPr>
-          <a:lstStyle/>
-          <a:p>
-            <a:pPr algn="ctr"/>
+      <p:pic>
+        <p:nvPicPr>
+          <p:cNvPr id="8" name="Picture 7" descr="85d78c8d2e33f8ba.png"/>
+          <p:cNvPicPr>
+            <a:picLocks noChangeAspect="1"/>
+          </p:cNvPicPr>
+          <p:nvPr/>
+        </p:nvPicPr>
+        <p:blipFill>
+          <a:blip r:embed="rId2"/>
+          <a:stretch>
+            <a:fillRect/>
+          </a:stretch>
+        </p:blipFill>
+        <p:spPr>
+          <a:xfrm>
+            <a:off x="3580725" y="1688592"/>
+            <a:ext cx="1304544" cy="304800"/>
+          </a:xfrm>
+          <a:prstGeom prst="rect">
+            <a:avLst/>
+          </a:prstGeom>
+        </p:spPr>
+      </p:pic>
+      <p:sp>
+        <p:nvSpPr>
+          <p:cNvPr id="9" name="TextBox 8"/>
+          <p:cNvSpPr txBox="1"/>
+          <p:nvPr/>
+        </p:nvSpPr>
+        <p:spPr>
+          <a:xfrm>
+            <a:off x="4885269" y="1577340"/>
+            <a:ext cx="1851137" cy="457200"/>
+          </a:xfrm>
+          <a:prstGeom prst="rect">
+            <a:avLst/>
+          </a:prstGeom>
+          <a:noFill/>
+        </p:spPr>
+        <p:txBody>
+          <a:bodyPr wrap="none" lIns="45720" rIns="45720" tIns="18288" bIns="18288" anchor="ctr">
+            <a:noAutofit/>
+          </a:bodyPr>
+          <a:lstStyle/>
+          <a:p>
+            <a:pPr algn="l"/>
             <a:r>
               <a:rPr sz="2280" b="0" i="0">
                 <a:solidFill>
@@ -4986,24 +5123,65 @@
                 </a:solidFill>
                 <a:latin typeface="Lexend"/>
               </a:rPr>
-              <a:t>1 yd = 3 ft. A patio is 5 yd</a:t>
-            </a:r>
-            <a:r>
-              <a:rPr sz="2280" b="0" i="0" baseline="30000">
+              <a:t>. A patio is </a:t>
+            </a:r>
+          </a:p>
+        </p:txBody>
+      </p:sp>
+      <p:pic>
+        <p:nvPicPr>
+          <p:cNvPr id="10" name="Picture 9" descr="b80bf23af7e2cccd.png"/>
+          <p:cNvPicPr>
+            <a:picLocks noChangeAspect="1"/>
+          </p:cNvPicPr>
+          <p:nvPr/>
+        </p:nvPicPr>
+        <p:blipFill>
+          <a:blip r:embed="rId3"/>
+          <a:stretch>
+            <a:fillRect/>
+          </a:stretch>
+        </p:blipFill>
+        <p:spPr>
+          <a:xfrm>
+            <a:off x="6599247" y="1645920"/>
+            <a:ext cx="713232" cy="347472"/>
+          </a:xfrm>
+          <a:prstGeom prst="rect">
+            <a:avLst/>
+          </a:prstGeom>
+        </p:spPr>
+      </p:pic>
+      <p:sp>
+        <p:nvSpPr>
+          <p:cNvPr id="11" name="TextBox 10"/>
+          <p:cNvSpPr txBox="1"/>
+          <p:nvPr/>
+        </p:nvSpPr>
+        <p:spPr>
+          <a:xfrm>
+            <a:off x="7312479" y="1577340"/>
+            <a:ext cx="1405474" cy="457200"/>
+          </a:xfrm>
+          <a:prstGeom prst="rect">
+            <a:avLst/>
+          </a:prstGeom>
+          <a:noFill/>
+        </p:spPr>
+        <p:txBody>
+          <a:bodyPr wrap="none" lIns="45720" rIns="45720" tIns="18288" bIns="18288" anchor="ctr">
+            <a:noAutofit/>
+          </a:bodyPr>
+          <a:lstStyle/>
+          <a:p>
+            <a:pPr algn="l"/>
+            <a:r>
+              <a:rPr sz="2280" b="0" i="0">
                 <a:solidFill>
                   <a:srgbClr val="1A1A1A"/>
                 </a:solidFill>
                 <a:latin typeface="Lexend"/>
               </a:rPr>
-              <a:t>2</a:t>
-            </a:r>
-            <a:r>
-              <a:rPr sz="2280" b="0" i="0">
-                <a:solidFill>
-                  <a:srgbClr val="1A1A1A"/>
-                </a:solidFill>
-                <a:latin typeface="Lexend"/>
-              </a:rPr>
               <a:t> in area.</a:t>
             </a:r>
           </a:p>
@@ -5011,13 +5189,13 @@
       </p:sp>
       <p:sp>
         <p:nvSpPr>
-          <p:cNvPr id="9" name="TextBox 8"/>
-          <p:cNvSpPr txBox="1"/>
-          <p:nvPr/>
-        </p:nvSpPr>
-        <p:spPr>
-          <a:xfrm>
-            <a:off x="777240" y="2139298"/>
+          <p:cNvPr id="12" name="TextBox 11"/>
+          <p:cNvSpPr txBox="1"/>
+          <p:nvPr/>
+        </p:nvSpPr>
+        <p:spPr>
+          <a:xfrm>
+            <a:off x="777240" y="2286000"/>
             <a:ext cx="10607040" cy="429370"/>
           </a:xfrm>
           <a:prstGeom prst="rect">
@@ -5272,97 +5450,9 @@
           </a:p>
         </p:txBody>
       </p:sp>
-      <p:sp>
-        <p:nvSpPr>
-          <p:cNvPr id="8" name="TextBox 7"/>
-          <p:cNvSpPr txBox="1"/>
-          <p:nvPr/>
-        </p:nvSpPr>
-        <p:spPr>
-          <a:xfrm>
-            <a:off x="777240" y="1600200"/>
-            <a:ext cx="10607040" cy="429370"/>
-          </a:xfrm>
-          <a:prstGeom prst="rect">
-            <a:avLst/>
-          </a:prstGeom>
-          <a:noFill/>
-        </p:spPr>
-        <p:txBody>
-          <a:bodyPr wrap="square" lIns="45720" rIns="45720" tIns="18288" bIns="18288" anchor="t">
-            <a:spAutoFit/>
-          </a:bodyPr>
-          <a:lstStyle/>
-          <a:p>
-            <a:pPr algn="ctr"/>
-            <a:r>
-              <a:rPr sz="2280" b="0" i="0">
-                <a:solidFill>
-                  <a:srgbClr val="1A1A1A"/>
-                </a:solidFill>
-                <a:latin typeface="Lexend"/>
-              </a:rPr>
-              <a:t>1 yd = 3 ft. A patio is 5 yd</a:t>
-            </a:r>
-            <a:r>
-              <a:rPr sz="2280" b="0" i="0" baseline="30000">
-                <a:solidFill>
-                  <a:srgbClr val="1A1A1A"/>
-                </a:solidFill>
-                <a:latin typeface="Lexend"/>
-              </a:rPr>
-              <a:t>2</a:t>
-            </a:r>
-            <a:r>
-              <a:rPr sz="2280" b="0" i="0">
-                <a:solidFill>
-                  <a:srgbClr val="1A1A1A"/>
-                </a:solidFill>
-                <a:latin typeface="Lexend"/>
-              </a:rPr>
-              <a:t> in area.</a:t>
-            </a:r>
-          </a:p>
-        </p:txBody>
-      </p:sp>
-      <p:sp>
-        <p:nvSpPr>
-          <p:cNvPr id="9" name="TextBox 8"/>
-          <p:cNvSpPr txBox="1"/>
-          <p:nvPr/>
-        </p:nvSpPr>
-        <p:spPr>
-          <a:xfrm>
-            <a:off x="777240" y="2139298"/>
-            <a:ext cx="10607040" cy="429370"/>
-          </a:xfrm>
-          <a:prstGeom prst="rect">
-            <a:avLst/>
-          </a:prstGeom>
-          <a:noFill/>
-        </p:spPr>
-        <p:txBody>
-          <a:bodyPr wrap="square" lIns="45720" rIns="45720" tIns="18288" bIns="18288" anchor="t">
-            <a:spAutoFit/>
-          </a:bodyPr>
-          <a:lstStyle/>
-          <a:p>
-            <a:pPr algn="ctr"/>
-            <a:r>
-              <a:rPr sz="2280" b="0" i="0">
-                <a:solidFill>
-                  <a:srgbClr val="1A1A1A"/>
-                </a:solidFill>
-                <a:latin typeface="Lexend"/>
-              </a:rPr>
-              <a:t>How many square feet is that?</a:t>
-            </a:r>
-          </a:p>
-        </p:txBody>
-      </p:sp>
       <p:pic>
         <p:nvPicPr>
-          <p:cNvPr id="10" name="Picture 9" descr="c9fe1cb570749efd.png"/>
+          <p:cNvPr id="8" name="Picture 7" descr="eb837b0c98931562.png"/>
           <p:cNvPicPr>
             <a:picLocks noChangeAspect="1"/>
           </p:cNvPicPr>
@@ -5376,8 +5466,8 @@
         </p:blipFill>
         <p:spPr>
           <a:xfrm>
-            <a:off x="3907711" y="2804888"/>
-            <a:ext cx="838200" cy="304800"/>
+            <a:off x="3577677" y="1688592"/>
+            <a:ext cx="1307592" cy="304800"/>
           </a:xfrm>
           <a:prstGeom prst="rect">
             <a:avLst/>
@@ -5386,14 +5476,14 @@
       </p:pic>
       <p:sp>
         <p:nvSpPr>
-          <p:cNvPr id="11" name="TextBox 10"/>
-          <p:cNvSpPr txBox="1"/>
-          <p:nvPr/>
-        </p:nvSpPr>
-        <p:spPr>
-          <a:xfrm>
-            <a:off x="4745911" y="2728688"/>
-            <a:ext cx="3757832" cy="457200"/>
+          <p:cNvPr id="9" name="TextBox 8"/>
+          <p:cNvSpPr txBox="1"/>
+          <p:nvPr/>
+        </p:nvSpPr>
+        <p:spPr>
+          <a:xfrm>
+            <a:off x="4885269" y="1577340"/>
+            <a:ext cx="1851137" cy="457200"/>
           </a:xfrm>
           <a:prstGeom prst="rect">
             <a:avLst/>
@@ -5408,38 +5498,20 @@
           <a:p>
             <a:pPr algn="l"/>
             <a:r>
-              <a:rPr sz="2750" b="0" i="0">
+              <a:rPr sz="2280" b="0" i="0">
                 <a:solidFill>
                   <a:srgbClr val="1A1A1A"/>
                 </a:solidFill>
                 <a:latin typeface="Lexend"/>
               </a:rPr>
-              <a:t> ft</a:t>
-            </a:r>
-            <a:r>
-              <a:rPr sz="2750" b="0" i="0" baseline="30000">
-                <a:solidFill>
-                  <a:srgbClr val="1A1A1A"/>
-                </a:solidFill>
-                <a:latin typeface="Lexend"/>
-              </a:rPr>
-              <a:t>2</a:t>
-            </a:r>
-            <a:r>
-              <a:rPr sz="2750" b="0" i="0">
-                <a:solidFill>
-                  <a:srgbClr val="1A1A1A"/>
-                </a:solidFill>
-                <a:latin typeface="Lexend"/>
-              </a:rPr>
-              <a:t> in a square yard</a:t>
+              <a:t>. A patio is </a:t>
             </a:r>
           </a:p>
         </p:txBody>
       </p:sp>
       <p:pic>
         <p:nvPicPr>
-          <p:cNvPr id="12" name="Picture 11" descr="33061e30c29e67c6.png"/>
+          <p:cNvPr id="10" name="Picture 9" descr="e4af36b06ea23b40.png"/>
           <p:cNvPicPr>
             <a:picLocks noChangeAspect="1"/>
           </p:cNvPicPr>
@@ -5453,7 +5525,178 @@
         </p:blipFill>
         <p:spPr>
           <a:xfrm>
-            <a:off x="3907711" y="3370292"/>
+            <a:off x="6599247" y="1645920"/>
+            <a:ext cx="716280" cy="347472"/>
+          </a:xfrm>
+          <a:prstGeom prst="rect">
+            <a:avLst/>
+          </a:prstGeom>
+        </p:spPr>
+      </p:pic>
+      <p:sp>
+        <p:nvSpPr>
+          <p:cNvPr id="11" name="TextBox 10"/>
+          <p:cNvSpPr txBox="1"/>
+          <p:nvPr/>
+        </p:nvSpPr>
+        <p:spPr>
+          <a:xfrm>
+            <a:off x="7315527" y="1577340"/>
+            <a:ext cx="1405474" cy="457200"/>
+          </a:xfrm>
+          <a:prstGeom prst="rect">
+            <a:avLst/>
+          </a:prstGeom>
+          <a:noFill/>
+        </p:spPr>
+        <p:txBody>
+          <a:bodyPr wrap="none" lIns="45720" rIns="45720" tIns="18288" bIns="18288" anchor="ctr">
+            <a:noAutofit/>
+          </a:bodyPr>
+          <a:lstStyle/>
+          <a:p>
+            <a:pPr algn="l"/>
+            <a:r>
+              <a:rPr sz="2280" b="0" i="0">
+                <a:solidFill>
+                  <a:srgbClr val="1A1A1A"/>
+                </a:solidFill>
+                <a:latin typeface="Lexend"/>
+              </a:rPr>
+              <a:t> in area.</a:t>
+            </a:r>
+          </a:p>
+        </p:txBody>
+      </p:sp>
+      <p:sp>
+        <p:nvSpPr>
+          <p:cNvPr id="12" name="TextBox 11"/>
+          <p:cNvSpPr txBox="1"/>
+          <p:nvPr/>
+        </p:nvSpPr>
+        <p:spPr>
+          <a:xfrm>
+            <a:off x="777240" y="2286000"/>
+            <a:ext cx="10607040" cy="429370"/>
+          </a:xfrm>
+          <a:prstGeom prst="rect">
+            <a:avLst/>
+          </a:prstGeom>
+          <a:noFill/>
+        </p:spPr>
+        <p:txBody>
+          <a:bodyPr wrap="square" lIns="45720" rIns="45720" tIns="18288" bIns="18288" anchor="t">
+            <a:spAutoFit/>
+          </a:bodyPr>
+          <a:lstStyle/>
+          <a:p>
+            <a:pPr algn="ctr"/>
+            <a:r>
+              <a:rPr sz="2280" b="0" i="0">
+                <a:solidFill>
+                  <a:srgbClr val="1A1A1A"/>
+                </a:solidFill>
+                <a:latin typeface="Lexend"/>
+              </a:rPr>
+              <a:t>How many square feet is that?</a:t>
+            </a:r>
+          </a:p>
+        </p:txBody>
+      </p:sp>
+      <p:pic>
+        <p:nvPicPr>
+          <p:cNvPr id="13" name="Picture 12" descr="c9fe1cb570749efd.png"/>
+          <p:cNvPicPr>
+            <a:picLocks noChangeAspect="1"/>
+          </p:cNvPicPr>
+          <p:nvPr/>
+        </p:nvPicPr>
+        <p:blipFill>
+          <a:blip r:embed="rId4"/>
+          <a:stretch>
+            <a:fillRect/>
+          </a:stretch>
+        </p:blipFill>
+        <p:spPr>
+          <a:xfrm>
+            <a:off x="3907711" y="2943398"/>
+            <a:ext cx="838200" cy="304800"/>
+          </a:xfrm>
+          <a:prstGeom prst="rect">
+            <a:avLst/>
+          </a:prstGeom>
+        </p:spPr>
+      </p:pic>
+      <p:sp>
+        <p:nvSpPr>
+          <p:cNvPr id="14" name="TextBox 13"/>
+          <p:cNvSpPr txBox="1"/>
+          <p:nvPr/>
+        </p:nvSpPr>
+        <p:spPr>
+          <a:xfrm>
+            <a:off x="4745911" y="2875390"/>
+            <a:ext cx="3757832" cy="457200"/>
+          </a:xfrm>
+          <a:prstGeom prst="rect">
+            <a:avLst/>
+          </a:prstGeom>
+          <a:noFill/>
+        </p:spPr>
+        <p:txBody>
+          <a:bodyPr wrap="none" lIns="45720" rIns="45720" tIns="18288" bIns="18288" anchor="ctr">
+            <a:noAutofit/>
+          </a:bodyPr>
+          <a:lstStyle/>
+          <a:p>
+            <a:pPr algn="l"/>
+            <a:r>
+              <a:rPr sz="2750" b="0" i="0">
+                <a:solidFill>
+                  <a:srgbClr val="1A1A1A"/>
+                </a:solidFill>
+                <a:latin typeface="Lexend"/>
+              </a:rPr>
+              <a:t> ft</a:t>
+            </a:r>
+            <a:r>
+              <a:rPr sz="2750" b="0" i="0" baseline="30000">
+                <a:solidFill>
+                  <a:srgbClr val="1A1A1A"/>
+                </a:solidFill>
+                <a:latin typeface="Lexend"/>
+              </a:rPr>
+              <a:t>2</a:t>
+            </a:r>
+            <a:r>
+              <a:rPr sz="2750" b="0" i="0">
+                <a:solidFill>
+                  <a:srgbClr val="1A1A1A"/>
+                </a:solidFill>
+                <a:latin typeface="Lexend"/>
+              </a:rPr>
+              <a:t> in a square yard</a:t>
+            </a:r>
+          </a:p>
+        </p:txBody>
+      </p:sp>
+      <p:pic>
+        <p:nvPicPr>
+          <p:cNvPr id="15" name="Picture 14" descr="33061e30c29e67c6.png"/>
+          <p:cNvPicPr>
+            <a:picLocks noChangeAspect="1"/>
+          </p:cNvPicPr>
+          <p:nvPr/>
+        </p:nvPicPr>
+        <p:blipFill>
+          <a:blip r:embed="rId5"/>
+          <a:stretch>
+            <a:fillRect/>
+          </a:stretch>
+        </p:blipFill>
+        <p:spPr>
+          <a:xfrm>
+            <a:off x="3907711" y="3531662"/>
             <a:ext cx="1402080" cy="252984"/>
           </a:xfrm>
           <a:prstGeom prst="rect">
@@ -5463,7 +5706,7 @@
       </p:pic>
       <p:sp>
         <p:nvSpPr>
-          <p:cNvPr id="13" name="TextBox 12"/>
+          <p:cNvPr id="16" name="TextBox 15"/>
           <p:cNvSpPr txBox="1"/>
           <p:nvPr/>
         </p:nvSpPr>
@@ -5733,15 +5976,74 @@
           </a:p>
         </p:txBody>
       </p:sp>
-      <p:sp>
-        <p:nvSpPr>
-          <p:cNvPr id="8" name="TextBox 7"/>
-          <p:cNvSpPr txBox="1"/>
-          <p:nvPr/>
-        </p:nvSpPr>
-        <p:spPr>
-          <a:xfrm>
-            <a:off x="1234440" y="1874519"/>
+      <p:pic>
+        <p:nvPicPr>
+          <p:cNvPr id="8" name="Picture 7" descr="d7de33d50f52caf2.png"/>
+          <p:cNvPicPr>
+            <a:picLocks noChangeAspect="1"/>
+          </p:cNvPicPr>
+          <p:nvPr/>
+        </p:nvPicPr>
+        <p:blipFill>
+          <a:blip r:embed="rId2"/>
+          <a:stretch>
+            <a:fillRect/>
+          </a:stretch>
+        </p:blipFill>
+        <p:spPr>
+          <a:xfrm>
+            <a:off x="1234440" y="1962911"/>
+            <a:ext cx="1965960" cy="304800"/>
+          </a:xfrm>
+          <a:prstGeom prst="rect">
+            <a:avLst/>
+          </a:prstGeom>
+        </p:spPr>
+      </p:pic>
+      <p:sp>
+        <p:nvSpPr>
+          <p:cNvPr id="9" name="TextBox 8"/>
+          <p:cNvSpPr txBox="1"/>
+          <p:nvPr/>
+        </p:nvSpPr>
+        <p:spPr>
+          <a:xfrm>
+            <a:off x="3200400" y="1851660"/>
+            <a:ext cx="3549313" cy="457200"/>
+          </a:xfrm>
+          <a:prstGeom prst="rect">
+            <a:avLst/>
+          </a:prstGeom>
+          <a:noFill/>
+        </p:spPr>
+        <p:txBody>
+          <a:bodyPr wrap="none" lIns="45720" rIns="45720" tIns="18288" bIns="18288" anchor="ctr">
+            <a:noAutofit/>
+          </a:bodyPr>
+          <a:lstStyle/>
+          <a:p>
+            <a:pPr algn="l"/>
+            <a:r>
+              <a:rPr sz="2280" b="0" i="0">
+                <a:solidFill>
+                  <a:srgbClr val="1A1A1A"/>
+                </a:solidFill>
+                <a:latin typeface="Lexend"/>
+              </a:rPr>
+              <a:t>. A bag of rice is 10 kg.</a:t>
+            </a:r>
+          </a:p>
+        </p:txBody>
+      </p:sp>
+      <p:sp>
+        <p:nvSpPr>
+          <p:cNvPr id="10" name="TextBox 9"/>
+          <p:cNvSpPr txBox="1"/>
+          <p:nvPr/>
+        </p:nvSpPr>
+        <p:spPr>
+          <a:xfrm>
+            <a:off x="1234440" y="2487168"/>
             <a:ext cx="10058400" cy="429370"/>
           </a:xfrm>
           <a:prstGeom prst="rect">
@@ -5757,47 +6059,12 @@
           <a:p>
             <a:pPr algn="l"/>
             <a:r>
-              <a:rPr sz="2280" b="0" i="0">
+              <a:rPr sz="2280" b="1" i="0">
                 <a:solidFill>
                   <a:srgbClr val="1A1A1A"/>
                 </a:solidFill>
                 <a:latin typeface="Lexend"/>
               </a:rPr>
-              <a:t>1 kg = 2.204 lb. A bag of rice is 10 kg.</a:t>
-            </a:r>
-          </a:p>
-        </p:txBody>
-      </p:sp>
-      <p:sp>
-        <p:nvSpPr>
-          <p:cNvPr id="9" name="TextBox 8"/>
-          <p:cNvSpPr txBox="1"/>
-          <p:nvPr/>
-        </p:nvSpPr>
-        <p:spPr>
-          <a:xfrm>
-            <a:off x="1234440" y="2413618"/>
-            <a:ext cx="10058400" cy="429370"/>
-          </a:xfrm>
-          <a:prstGeom prst="rect">
-            <a:avLst/>
-          </a:prstGeom>
-          <a:noFill/>
-        </p:spPr>
-        <p:txBody>
-          <a:bodyPr wrap="square" lIns="45720" rIns="45720" tIns="18288" bIns="18288" anchor="t">
-            <a:spAutoFit/>
-          </a:bodyPr>
-          <a:lstStyle/>
-          <a:p>
-            <a:pPr algn="l"/>
-            <a:r>
-              <a:rPr sz="2280" b="1" i="0">
-                <a:solidFill>
-                  <a:srgbClr val="1A1A1A"/>
-                </a:solidFill>
-                <a:latin typeface="Lexend"/>
-              </a:rPr>
               <a:t>How many pounds is that?</a:t>
             </a:r>
           </a:p>
@@ -5805,7 +6072,7 @@
       </p:sp>
       <p:sp>
         <p:nvSpPr>
-          <p:cNvPr id="10" name="TextBox 9"/>
+          <p:cNvPr id="11" name="TextBox 10"/>
           <p:cNvSpPr txBox="1"/>
           <p:nvPr/>
         </p:nvSpPr>
@@ -6066,79 +6333,9 @@
           </a:p>
         </p:txBody>
       </p:sp>
-      <p:sp>
-        <p:nvSpPr>
-          <p:cNvPr id="8" name="TextBox 7"/>
-          <p:cNvSpPr txBox="1"/>
-          <p:nvPr/>
-        </p:nvSpPr>
-        <p:spPr>
-          <a:xfrm>
-            <a:off x="1234440" y="1874519"/>
-            <a:ext cx="10058400" cy="429370"/>
-          </a:xfrm>
-          <a:prstGeom prst="rect">
-            <a:avLst/>
-          </a:prstGeom>
-          <a:noFill/>
-        </p:spPr>
-        <p:txBody>
-          <a:bodyPr wrap="square" lIns="45720" rIns="45720" tIns="18288" bIns="18288" anchor="t">
-            <a:spAutoFit/>
-          </a:bodyPr>
-          <a:lstStyle/>
-          <a:p>
-            <a:pPr algn="l"/>
-            <a:r>
-              <a:rPr sz="2280" b="0" i="0">
-                <a:solidFill>
-                  <a:srgbClr val="1A1A1A"/>
-                </a:solidFill>
-                <a:latin typeface="Lexend"/>
-              </a:rPr>
-              <a:t>1 kg = 2.204 lb. A bag of rice is 10 kg.</a:t>
-            </a:r>
-          </a:p>
-        </p:txBody>
-      </p:sp>
-      <p:sp>
-        <p:nvSpPr>
-          <p:cNvPr id="9" name="TextBox 8"/>
-          <p:cNvSpPr txBox="1"/>
-          <p:nvPr/>
-        </p:nvSpPr>
-        <p:spPr>
-          <a:xfrm>
-            <a:off x="1234440" y="2413618"/>
-            <a:ext cx="10058400" cy="429370"/>
-          </a:xfrm>
-          <a:prstGeom prst="rect">
-            <a:avLst/>
-          </a:prstGeom>
-          <a:noFill/>
-        </p:spPr>
-        <p:txBody>
-          <a:bodyPr wrap="square" lIns="45720" rIns="45720" tIns="18288" bIns="18288" anchor="t">
-            <a:spAutoFit/>
-          </a:bodyPr>
-          <a:lstStyle/>
-          <a:p>
-            <a:pPr algn="l"/>
-            <a:r>
-              <a:rPr sz="2280" b="1" i="0">
-                <a:solidFill>
-                  <a:srgbClr val="1A1A1A"/>
-                </a:solidFill>
-                <a:latin typeface="Lexend"/>
-              </a:rPr>
-              <a:t>How many pounds is that?</a:t>
-            </a:r>
-          </a:p>
-        </p:txBody>
-      </p:sp>
       <p:pic>
         <p:nvPicPr>
-          <p:cNvPr id="10" name="Picture 9" descr="6312203239575ae0.png"/>
+          <p:cNvPr id="8" name="Picture 7" descr="e707e309a9336654.png"/>
           <p:cNvPicPr>
             <a:picLocks noChangeAspect="1"/>
           </p:cNvPicPr>
@@ -6152,7 +6349,101 @@
         </p:blipFill>
         <p:spPr>
           <a:xfrm>
-            <a:off x="4757927" y="3150836"/>
+            <a:off x="1234440" y="1962911"/>
+            <a:ext cx="1965960" cy="304800"/>
+          </a:xfrm>
+          <a:prstGeom prst="rect">
+            <a:avLst/>
+          </a:prstGeom>
+        </p:spPr>
+      </p:pic>
+      <p:sp>
+        <p:nvSpPr>
+          <p:cNvPr id="9" name="TextBox 8"/>
+          <p:cNvSpPr txBox="1"/>
+          <p:nvPr/>
+        </p:nvSpPr>
+        <p:spPr>
+          <a:xfrm>
+            <a:off x="3200400" y="1851660"/>
+            <a:ext cx="3549313" cy="457200"/>
+          </a:xfrm>
+          <a:prstGeom prst="rect">
+            <a:avLst/>
+          </a:prstGeom>
+          <a:noFill/>
+        </p:spPr>
+        <p:txBody>
+          <a:bodyPr wrap="none" lIns="45720" rIns="45720" tIns="18288" bIns="18288" anchor="ctr">
+            <a:noAutofit/>
+          </a:bodyPr>
+          <a:lstStyle/>
+          <a:p>
+            <a:pPr algn="l"/>
+            <a:r>
+              <a:rPr sz="2280" b="0" i="0">
+                <a:solidFill>
+                  <a:srgbClr val="1A1A1A"/>
+                </a:solidFill>
+                <a:latin typeface="Lexend"/>
+              </a:rPr>
+              <a:t>. A bag of rice is 10 kg.</a:t>
+            </a:r>
+          </a:p>
+        </p:txBody>
+      </p:sp>
+      <p:sp>
+        <p:nvSpPr>
+          <p:cNvPr id="10" name="TextBox 9"/>
+          <p:cNvSpPr txBox="1"/>
+          <p:nvPr/>
+        </p:nvSpPr>
+        <p:spPr>
+          <a:xfrm>
+            <a:off x="1234440" y="2487168"/>
+            <a:ext cx="10058400" cy="429370"/>
+          </a:xfrm>
+          <a:prstGeom prst="rect">
+            <a:avLst/>
+          </a:prstGeom>
+          <a:noFill/>
+        </p:spPr>
+        <p:txBody>
+          <a:bodyPr wrap="square" lIns="45720" rIns="45720" tIns="18288" bIns="18288" anchor="t">
+            <a:spAutoFit/>
+          </a:bodyPr>
+          <a:lstStyle/>
+          <a:p>
+            <a:pPr algn="l"/>
+            <a:r>
+              <a:rPr sz="2280" b="1" i="0">
+                <a:solidFill>
+                  <a:srgbClr val="1A1A1A"/>
+                </a:solidFill>
+                <a:latin typeface="Lexend"/>
+              </a:rPr>
+              <a:t>How many pounds is that?</a:t>
+            </a:r>
+          </a:p>
+        </p:txBody>
+      </p:sp>
+      <p:pic>
+        <p:nvPicPr>
+          <p:cNvPr id="11" name="Picture 10" descr="6312203239575ae0.png"/>
+          <p:cNvPicPr>
+            <a:picLocks noChangeAspect="1"/>
+          </p:cNvPicPr>
+          <p:nvPr/>
+        </p:nvPicPr>
+        <p:blipFill>
+          <a:blip r:embed="rId3"/>
+          <a:stretch>
+            <a:fillRect/>
+          </a:stretch>
+        </p:blipFill>
+        <p:spPr>
+          <a:xfrm>
+            <a:off x="4757927" y="3242102"/>
             <a:ext cx="2755392" cy="252984"/>
           </a:xfrm>
           <a:prstGeom prst="rect">
@@ -6162,7 +6453,7 @@
       </p:pic>
       <p:sp>
         <p:nvSpPr>
-          <p:cNvPr id="11" name="TextBox 10"/>
+          <p:cNvPr id="12" name="TextBox 11"/>
           <p:cNvSpPr txBox="1"/>
           <p:nvPr/>
         </p:nvSpPr>
@@ -6423,15 +6714,74 @@
           </a:p>
         </p:txBody>
       </p:sp>
-      <p:sp>
-        <p:nvSpPr>
-          <p:cNvPr id="8" name="TextBox 7"/>
-          <p:cNvSpPr txBox="1"/>
-          <p:nvPr/>
-        </p:nvSpPr>
-        <p:spPr>
-          <a:xfrm>
-            <a:off x="1234440" y="1874519"/>
+      <p:pic>
+        <p:nvPicPr>
+          <p:cNvPr id="8" name="Picture 7" descr="0d647df019511e64.png"/>
+          <p:cNvPicPr>
+            <a:picLocks noChangeAspect="1"/>
+          </p:cNvPicPr>
+          <p:nvPr/>
+        </p:nvPicPr>
+        <p:blipFill>
+          <a:blip r:embed="rId2"/>
+          <a:stretch>
+            <a:fillRect/>
+          </a:stretch>
+        </p:blipFill>
+        <p:spPr>
+          <a:xfrm>
+            <a:off x="1234440" y="1962911"/>
+            <a:ext cx="1935480" cy="304800"/>
+          </a:xfrm>
+          <a:prstGeom prst="rect">
+            <a:avLst/>
+          </a:prstGeom>
+        </p:spPr>
+      </p:pic>
+      <p:sp>
+        <p:nvSpPr>
+          <p:cNvPr id="9" name="TextBox 8"/>
+          <p:cNvSpPr txBox="1"/>
+          <p:nvPr/>
+        </p:nvSpPr>
+        <p:spPr>
+          <a:xfrm>
+            <a:off x="3169920" y="1851660"/>
+            <a:ext cx="3361876" cy="457200"/>
+          </a:xfrm>
+          <a:prstGeom prst="rect">
+            <a:avLst/>
+          </a:prstGeom>
+          <a:noFill/>
+        </p:spPr>
+        <p:txBody>
+          <a:bodyPr wrap="none" lIns="45720" rIns="45720" tIns="18288" bIns="18288" anchor="ctr">
+            <a:noAutofit/>
+          </a:bodyPr>
+          <a:lstStyle/>
+          <a:p>
+            <a:pPr algn="l"/>
+            <a:r>
+              <a:rPr sz="2280" b="0" i="0">
+                <a:solidFill>
+                  <a:srgbClr val="1A1A1A"/>
+                </a:solidFill>
+                <a:latin typeface="Lexend"/>
+              </a:rPr>
+              <a:t>. A cooler holds 4 gal.</a:t>
+            </a:r>
+          </a:p>
+        </p:txBody>
+      </p:sp>
+      <p:sp>
+        <p:nvSpPr>
+          <p:cNvPr id="10" name="TextBox 9"/>
+          <p:cNvSpPr txBox="1"/>
+          <p:nvPr/>
+        </p:nvSpPr>
+        <p:spPr>
+          <a:xfrm>
+            <a:off x="1234440" y="2487168"/>
             <a:ext cx="10058400" cy="429370"/>
           </a:xfrm>
           <a:prstGeom prst="rect">
@@ -6447,47 +6797,12 @@
           <a:p>
             <a:pPr algn="l"/>
             <a:r>
-              <a:rPr sz="2280" b="0" i="0">
+              <a:rPr sz="2280" b="1" i="0">
                 <a:solidFill>
                   <a:srgbClr val="1A1A1A"/>
                 </a:solidFill>
                 <a:latin typeface="Lexend"/>
               </a:rPr>
-              <a:t>1 gal = 3.785 L. A cooler holds 4 gal.</a:t>
-            </a:r>
-          </a:p>
-        </p:txBody>
-      </p:sp>
-      <p:sp>
-        <p:nvSpPr>
-          <p:cNvPr id="9" name="TextBox 8"/>
-          <p:cNvSpPr txBox="1"/>
-          <p:nvPr/>
-        </p:nvSpPr>
-        <p:spPr>
-          <a:xfrm>
-            <a:off x="1234440" y="2413618"/>
-            <a:ext cx="10058400" cy="429370"/>
-          </a:xfrm>
-          <a:prstGeom prst="rect">
-            <a:avLst/>
-          </a:prstGeom>
-          <a:noFill/>
-        </p:spPr>
-        <p:txBody>
-          <a:bodyPr wrap="square" lIns="45720" rIns="45720" tIns="18288" bIns="18288" anchor="t">
-            <a:spAutoFit/>
-          </a:bodyPr>
-          <a:lstStyle/>
-          <a:p>
-            <a:pPr algn="l"/>
-            <a:r>
-              <a:rPr sz="2280" b="1" i="0">
-                <a:solidFill>
-                  <a:srgbClr val="1A1A1A"/>
-                </a:solidFill>
-                <a:latin typeface="Lexend"/>
-              </a:rPr>
               <a:t>How many liters is that?</a:t>
             </a:r>
           </a:p>
@@ -6495,7 +6810,7 @@
       </p:sp>
       <p:sp>
         <p:nvSpPr>
-          <p:cNvPr id="10" name="TextBox 9"/>
+          <p:cNvPr id="11" name="TextBox 10"/>
           <p:cNvSpPr txBox="1"/>
           <p:nvPr/>
         </p:nvSpPr>
@@ -6756,79 +7071,9 @@
           </a:p>
         </p:txBody>
       </p:sp>
-      <p:sp>
-        <p:nvSpPr>
-          <p:cNvPr id="8" name="TextBox 7"/>
-          <p:cNvSpPr txBox="1"/>
-          <p:nvPr/>
-        </p:nvSpPr>
-        <p:spPr>
-          <a:xfrm>
-            <a:off x="1234440" y="1874519"/>
-            <a:ext cx="10058400" cy="429370"/>
-          </a:xfrm>
-          <a:prstGeom prst="rect">
-            <a:avLst/>
-          </a:prstGeom>
-          <a:noFill/>
-        </p:spPr>
-        <p:txBody>
-          <a:bodyPr wrap="square" lIns="45720" rIns="45720" tIns="18288" bIns="18288" anchor="t">
-            <a:spAutoFit/>
-          </a:bodyPr>
-          <a:lstStyle/>
-          <a:p>
-            <a:pPr algn="l"/>
-            <a:r>
-              <a:rPr sz="2280" b="0" i="0">
-                <a:solidFill>
-                  <a:srgbClr val="1A1A1A"/>
-                </a:solidFill>
-                <a:latin typeface="Lexend"/>
-              </a:rPr>
-              <a:t>1 gal = 3.785 L. A cooler holds 4 gal.</a:t>
-            </a:r>
-          </a:p>
-        </p:txBody>
-      </p:sp>
-      <p:sp>
-        <p:nvSpPr>
-          <p:cNvPr id="9" name="TextBox 8"/>
-          <p:cNvSpPr txBox="1"/>
-          <p:nvPr/>
-        </p:nvSpPr>
-        <p:spPr>
-          <a:xfrm>
-            <a:off x="1234440" y="2413618"/>
-            <a:ext cx="10058400" cy="429370"/>
-          </a:xfrm>
-          <a:prstGeom prst="rect">
-            <a:avLst/>
-          </a:prstGeom>
-          <a:noFill/>
-        </p:spPr>
-        <p:txBody>
-          <a:bodyPr wrap="square" lIns="45720" rIns="45720" tIns="18288" bIns="18288" anchor="t">
-            <a:spAutoFit/>
-          </a:bodyPr>
-          <a:lstStyle/>
-          <a:p>
-            <a:pPr algn="l"/>
-            <a:r>
-              <a:rPr sz="2280" b="1" i="0">
-                <a:solidFill>
-                  <a:srgbClr val="1A1A1A"/>
-                </a:solidFill>
-                <a:latin typeface="Lexend"/>
-              </a:rPr>
-              <a:t>How many liters is that?</a:t>
-            </a:r>
-          </a:p>
-        </p:txBody>
-      </p:sp>
       <p:pic>
         <p:nvPicPr>
-          <p:cNvPr id="10" name="Picture 9" descr="94f8980594becd93.png"/>
+          <p:cNvPr id="8" name="Picture 7" descr="118ca277248594bf.png"/>
           <p:cNvPicPr>
             <a:picLocks noChangeAspect="1"/>
           </p:cNvPicPr>
@@ -6842,7 +7087,101 @@
         </p:blipFill>
         <p:spPr>
           <a:xfrm>
-            <a:off x="4876799" y="3150836"/>
+            <a:off x="1234440" y="1962911"/>
+            <a:ext cx="1935480" cy="304800"/>
+          </a:xfrm>
+          <a:prstGeom prst="rect">
+            <a:avLst/>
+          </a:prstGeom>
+        </p:spPr>
+      </p:pic>
+      <p:sp>
+        <p:nvSpPr>
+          <p:cNvPr id="9" name="TextBox 8"/>
+          <p:cNvSpPr txBox="1"/>
+          <p:nvPr/>
+        </p:nvSpPr>
+        <p:spPr>
+          <a:xfrm>
+            <a:off x="3169920" y="1851660"/>
+            <a:ext cx="3361876" cy="457200"/>
+          </a:xfrm>
+          <a:prstGeom prst="rect">
+            <a:avLst/>
+          </a:prstGeom>
+          <a:noFill/>
+        </p:spPr>
+        <p:txBody>
+          <a:bodyPr wrap="none" lIns="45720" rIns="45720" tIns="18288" bIns="18288" anchor="ctr">
+            <a:noAutofit/>
+          </a:bodyPr>
+          <a:lstStyle/>
+          <a:p>
+            <a:pPr algn="l"/>
+            <a:r>
+              <a:rPr sz="2280" b="0" i="0">
+                <a:solidFill>
+                  <a:srgbClr val="1A1A1A"/>
+                </a:solidFill>
+                <a:latin typeface="Lexend"/>
+              </a:rPr>
+              <a:t>. A cooler holds 4 gal.</a:t>
+            </a:r>
+          </a:p>
+        </p:txBody>
+      </p:sp>
+      <p:sp>
+        <p:nvSpPr>
+          <p:cNvPr id="10" name="TextBox 9"/>
+          <p:cNvSpPr txBox="1"/>
+          <p:nvPr/>
+        </p:nvSpPr>
+        <p:spPr>
+          <a:xfrm>
+            <a:off x="1234440" y="2487168"/>
+            <a:ext cx="10058400" cy="429370"/>
+          </a:xfrm>
+          <a:prstGeom prst="rect">
+            <a:avLst/>
+          </a:prstGeom>
+          <a:noFill/>
+        </p:spPr>
+        <p:txBody>
+          <a:bodyPr wrap="square" lIns="45720" rIns="45720" tIns="18288" bIns="18288" anchor="t">
+            <a:spAutoFit/>
+          </a:bodyPr>
+          <a:lstStyle/>
+          <a:p>
+            <a:pPr algn="l"/>
+            <a:r>
+              <a:rPr sz="2280" b="1" i="0">
+                <a:solidFill>
+                  <a:srgbClr val="1A1A1A"/>
+                </a:solidFill>
+                <a:latin typeface="Lexend"/>
+              </a:rPr>
+              <a:t>How many liters is that?</a:t>
+            </a:r>
+          </a:p>
+        </p:txBody>
+      </p:sp>
+      <p:pic>
+        <p:nvPicPr>
+          <p:cNvPr id="11" name="Picture 10" descr="94f8980594becd93.png"/>
+          <p:cNvPicPr>
+            <a:picLocks noChangeAspect="1"/>
+          </p:cNvPicPr>
+          <p:nvPr/>
+        </p:nvPicPr>
+        <p:blipFill>
+          <a:blip r:embed="rId3"/>
+          <a:stretch>
+            <a:fillRect/>
+          </a:stretch>
+        </p:blipFill>
+        <p:spPr>
+          <a:xfrm>
+            <a:off x="4876799" y="3242102"/>
             <a:ext cx="2520696" cy="252984"/>
           </a:xfrm>
           <a:prstGeom prst="rect">
@@ -6852,7 +7191,7 @@
       </p:pic>
       <p:sp>
         <p:nvSpPr>
-          <p:cNvPr id="11" name="TextBox 10"/>
+          <p:cNvPr id="12" name="TextBox 11"/>
           <p:cNvSpPr txBox="1"/>
           <p:nvPr/>
         </p:nvSpPr>
@@ -7122,7 +7461,7 @@
         <p:spPr>
           <a:xfrm>
             <a:off x="1874519" y="1440180"/>
-            <a:ext cx="7198446" cy="457200"/>
+            <a:ext cx="671561" cy="457200"/>
           </a:xfrm>
           <a:prstGeom prst="rect">
             <a:avLst/>
@@ -7143,102 +7482,14 @@
                 </a:solidFill>
                 <a:latin typeface="Lexend"/>
               </a:rPr>
-              <a:t>1.   1 in = 2.54 cm. How many centimeters is 12 in?</a:t>
-            </a:r>
-          </a:p>
-        </p:txBody>
-      </p:sp>
-      <p:sp>
-        <p:nvSpPr>
-          <p:cNvPr id="9" name="TextBox 8"/>
-          <p:cNvSpPr txBox="1"/>
-          <p:nvPr/>
-        </p:nvSpPr>
-        <p:spPr>
-          <a:xfrm>
-            <a:off x="1874519" y="2052828"/>
-            <a:ext cx="9664656" cy="457200"/>
-          </a:xfrm>
-          <a:prstGeom prst="rect">
-            <a:avLst/>
-          </a:prstGeom>
-          <a:noFill/>
-        </p:spPr>
-        <p:txBody>
-          <a:bodyPr wrap="none" lIns="45720" rIns="45720" tIns="18288" bIns="18288" anchor="ctr">
-            <a:noAutofit/>
-          </a:bodyPr>
-          <a:lstStyle/>
-          <a:p>
-            <a:pPr algn="l"/>
-            <a:r>
-              <a:rPr sz="2180" b="0" i="0">
-                <a:solidFill>
-                  <a:srgbClr val="1A1A1A"/>
-                </a:solidFill>
-                <a:latin typeface="Lexend"/>
-              </a:rPr>
-              <a:t>2.   A figure with area 7 cm</a:t>
-            </a:r>
-            <a:r>
-              <a:rPr sz="2180" b="0" i="0" baseline="30000">
-                <a:solidFill>
-                  <a:srgbClr val="1A1A1A"/>
-                </a:solidFill>
-                <a:latin typeface="Lexend"/>
-              </a:rPr>
-              <a:t>2</a:t>
-            </a:r>
-            <a:r>
-              <a:rPr sz="2180" b="0" i="0">
-                <a:solidFill>
-                  <a:srgbClr val="1A1A1A"/>
-                </a:solidFill>
-                <a:latin typeface="Lexend"/>
-              </a:rPr>
-              <a:t> is scaled by k = 3. Find the copy's area.</a:t>
-            </a:r>
-          </a:p>
-        </p:txBody>
-      </p:sp>
-      <p:sp>
-        <p:nvSpPr>
-          <p:cNvPr id="10" name="TextBox 9"/>
-          <p:cNvSpPr txBox="1"/>
-          <p:nvPr/>
-        </p:nvSpPr>
-        <p:spPr>
-          <a:xfrm>
-            <a:off x="1874519" y="2665476"/>
-            <a:ext cx="3275301" cy="457200"/>
-          </a:xfrm>
-          <a:prstGeom prst="rect">
-            <a:avLst/>
-          </a:prstGeom>
-          <a:noFill/>
-        </p:spPr>
-        <p:txBody>
-          <a:bodyPr wrap="none" lIns="45720" rIns="45720" tIns="18288" bIns="18288" anchor="ctr">
-            <a:noAutofit/>
-          </a:bodyPr>
-          <a:lstStyle/>
-          <a:p>
-            <a:pPr algn="l"/>
-            <a:r>
-              <a:rPr sz="2180" b="0" i="0">
-                <a:solidFill>
-                  <a:srgbClr val="1A1A1A"/>
-                </a:solidFill>
-                <a:latin typeface="Lexend"/>
-              </a:rPr>
-              <a:t>3.   Find the product:  </a:t>
+              <a:t>1.   </a:t>
             </a:r>
           </a:p>
         </p:txBody>
       </p:sp>
       <p:pic>
         <p:nvPicPr>
-          <p:cNvPr id="11" name="Picture 10" descr="dd9d4cf5c31a1b9e.png"/>
+          <p:cNvPr id="9" name="Picture 8" descr="88d2b26b87c7a8c9.png"/>
           <p:cNvPicPr>
             <a:picLocks noChangeAspect="1"/>
           </p:cNvPicPr>
@@ -7252,8 +7503,8 @@
         </p:blipFill>
         <p:spPr>
           <a:xfrm>
-            <a:off x="5012661" y="2781300"/>
-            <a:ext cx="1036320" cy="225552"/>
+            <a:off x="2408921" y="1540573"/>
+            <a:ext cx="1847088" cy="243840"/>
           </a:xfrm>
           <a:prstGeom prst="rect">
             <a:avLst/>
@@ -7262,14 +7513,14 @@
       </p:pic>
       <p:sp>
         <p:nvSpPr>
-          <p:cNvPr id="12" name="TextBox 11"/>
-          <p:cNvSpPr txBox="1"/>
-          <p:nvPr/>
-        </p:nvSpPr>
-        <p:spPr>
-          <a:xfrm>
-            <a:off x="1874519" y="3278124"/>
-            <a:ext cx="8778425" cy="457200"/>
+          <p:cNvPr id="10" name="TextBox 9"/>
+          <p:cNvSpPr txBox="1"/>
+          <p:nvPr/>
+        </p:nvSpPr>
+        <p:spPr>
+          <a:xfrm>
+            <a:off x="4256009" y="1440180"/>
+            <a:ext cx="4831351" cy="457200"/>
           </a:xfrm>
           <a:prstGeom prst="rect">
             <a:avLst/>
@@ -7290,7 +7541,313 @@
                 </a:solidFill>
                 <a:latin typeface="Lexend"/>
               </a:rPr>
-              <a:t>4.   1 ft = 12 in. A 1-ft square has what area in square inches?</a:t>
+              <a:t>. How many centimeters is 12 in?</a:t>
+            </a:r>
+          </a:p>
+        </p:txBody>
+      </p:sp>
+      <p:sp>
+        <p:nvSpPr>
+          <p:cNvPr id="11" name="TextBox 10"/>
+          <p:cNvSpPr txBox="1"/>
+          <p:nvPr/>
+        </p:nvSpPr>
+        <p:spPr>
+          <a:xfrm>
+            <a:off x="1874519" y="2052828"/>
+            <a:ext cx="3016776" cy="457200"/>
+          </a:xfrm>
+          <a:prstGeom prst="rect">
+            <a:avLst/>
+          </a:prstGeom>
+          <a:noFill/>
+        </p:spPr>
+        <p:txBody>
+          <a:bodyPr wrap="none" lIns="45720" rIns="45720" tIns="18288" bIns="18288" anchor="ctr">
+            <a:noAutofit/>
+          </a:bodyPr>
+          <a:lstStyle/>
+          <a:p>
+            <a:pPr algn="l"/>
+            <a:r>
+              <a:rPr sz="2180" b="0" i="0">
+                <a:solidFill>
+                  <a:srgbClr val="1A1A1A"/>
+                </a:solidFill>
+                <a:latin typeface="Lexend"/>
+              </a:rPr>
+              <a:t>2.   A figure of area </a:t>
+            </a:r>
+          </a:p>
+        </p:txBody>
+      </p:sp>
+      <p:pic>
+        <p:nvPicPr>
+          <p:cNvPr id="12" name="Picture 11" descr="15179f9c1b681126.png"/>
+          <p:cNvPicPr>
+            <a:picLocks noChangeAspect="1"/>
+          </p:cNvPicPr>
+          <p:nvPr/>
+        </p:nvPicPr>
+        <p:blipFill>
+          <a:blip r:embed="rId3"/>
+          <a:stretch>
+            <a:fillRect/>
+          </a:stretch>
+        </p:blipFill>
+        <p:spPr>
+          <a:xfrm>
+            <a:off x="4754136" y="2119693"/>
+            <a:ext cx="774192" cy="277368"/>
+          </a:xfrm>
+          <a:prstGeom prst="rect">
+            <a:avLst/>
+          </a:prstGeom>
+        </p:spPr>
+      </p:pic>
+      <p:sp>
+        <p:nvSpPr>
+          <p:cNvPr id="13" name="TextBox 12"/>
+          <p:cNvSpPr txBox="1"/>
+          <p:nvPr/>
+        </p:nvSpPr>
+        <p:spPr>
+          <a:xfrm>
+            <a:off x="5528328" y="2052828"/>
+            <a:ext cx="2026935" cy="457200"/>
+          </a:xfrm>
+          <a:prstGeom prst="rect">
+            <a:avLst/>
+          </a:prstGeom>
+          <a:noFill/>
+        </p:spPr>
+        <p:txBody>
+          <a:bodyPr wrap="none" lIns="45720" rIns="45720" tIns="18288" bIns="18288" anchor="ctr">
+            <a:noAutofit/>
+          </a:bodyPr>
+          <a:lstStyle/>
+          <a:p>
+            <a:pPr algn="l"/>
+            <a:r>
+              <a:rPr sz="2180" b="0" i="0">
+                <a:solidFill>
+                  <a:srgbClr val="1A1A1A"/>
+                </a:solidFill>
+                <a:latin typeface="Lexend"/>
+              </a:rPr>
+              <a:t> is scaled by </a:t>
+            </a:r>
+          </a:p>
+        </p:txBody>
+      </p:sp>
+      <p:pic>
+        <p:nvPicPr>
+          <p:cNvPr id="14" name="Picture 13" descr="0937735c0d6e3897.png"/>
+          <p:cNvPicPr>
+            <a:picLocks noChangeAspect="1"/>
+          </p:cNvPicPr>
+          <p:nvPr/>
+        </p:nvPicPr>
+        <p:blipFill>
+          <a:blip r:embed="rId4"/>
+          <a:stretch>
+            <a:fillRect/>
+          </a:stretch>
+        </p:blipFill>
+        <p:spPr>
+          <a:xfrm>
+            <a:off x="7418103" y="2162365"/>
+            <a:ext cx="603504" cy="234696"/>
+          </a:xfrm>
+          <a:prstGeom prst="rect">
+            <a:avLst/>
+          </a:prstGeom>
+        </p:spPr>
+      </p:pic>
+      <p:sp>
+        <p:nvSpPr>
+          <p:cNvPr id="15" name="TextBox 14"/>
+          <p:cNvSpPr txBox="1"/>
+          <p:nvPr/>
+        </p:nvSpPr>
+        <p:spPr>
+          <a:xfrm>
+            <a:off x="8021607" y="2052828"/>
+            <a:ext cx="2738367" cy="457200"/>
+          </a:xfrm>
+          <a:prstGeom prst="rect">
+            <a:avLst/>
+          </a:prstGeom>
+          <a:noFill/>
+        </p:spPr>
+        <p:txBody>
+          <a:bodyPr wrap="none" lIns="45720" rIns="45720" tIns="18288" bIns="18288" anchor="ctr">
+            <a:noAutofit/>
+          </a:bodyPr>
+          <a:lstStyle/>
+          <a:p>
+            <a:pPr algn="l"/>
+            <a:r>
+              <a:rPr sz="2180" b="0" i="0">
+                <a:solidFill>
+                  <a:srgbClr val="1A1A1A"/>
+                </a:solidFill>
+                <a:latin typeface="Lexend"/>
+              </a:rPr>
+              <a:t>. The copy's area?</a:t>
+            </a:r>
+          </a:p>
+        </p:txBody>
+      </p:sp>
+      <p:sp>
+        <p:nvSpPr>
+          <p:cNvPr id="16" name="TextBox 15"/>
+          <p:cNvSpPr txBox="1"/>
+          <p:nvPr/>
+        </p:nvSpPr>
+        <p:spPr>
+          <a:xfrm>
+            <a:off x="1874519" y="2665476"/>
+            <a:ext cx="3275301" cy="457200"/>
+          </a:xfrm>
+          <a:prstGeom prst="rect">
+            <a:avLst/>
+          </a:prstGeom>
+          <a:noFill/>
+        </p:spPr>
+        <p:txBody>
+          <a:bodyPr wrap="none" lIns="45720" rIns="45720" tIns="18288" bIns="18288" anchor="ctr">
+            <a:noAutofit/>
+          </a:bodyPr>
+          <a:lstStyle/>
+          <a:p>
+            <a:pPr algn="l"/>
+            <a:r>
+              <a:rPr sz="2180" b="0" i="0">
+                <a:solidFill>
+                  <a:srgbClr val="1A1A1A"/>
+                </a:solidFill>
+                <a:latin typeface="Lexend"/>
+              </a:rPr>
+              <a:t>3.   Find the product:  </a:t>
+            </a:r>
+          </a:p>
+        </p:txBody>
+      </p:sp>
+      <p:pic>
+        <p:nvPicPr>
+          <p:cNvPr id="17" name="Picture 16" descr="dd9d4cf5c31a1b9e.png"/>
+          <p:cNvPicPr>
+            <a:picLocks noChangeAspect="1"/>
+          </p:cNvPicPr>
+          <p:nvPr/>
+        </p:nvPicPr>
+        <p:blipFill>
+          <a:blip r:embed="rId5"/>
+          <a:stretch>
+            <a:fillRect/>
+          </a:stretch>
+        </p:blipFill>
+        <p:spPr>
+          <a:xfrm>
+            <a:off x="5012661" y="2784157"/>
+            <a:ext cx="1036320" cy="225552"/>
+          </a:xfrm>
+          <a:prstGeom prst="rect">
+            <a:avLst/>
+          </a:prstGeom>
+        </p:spPr>
+      </p:pic>
+      <p:sp>
+        <p:nvSpPr>
+          <p:cNvPr id="18" name="TextBox 17"/>
+          <p:cNvSpPr txBox="1"/>
+          <p:nvPr/>
+        </p:nvSpPr>
+        <p:spPr>
+          <a:xfrm>
+            <a:off x="1874519" y="3278124"/>
+            <a:ext cx="706881" cy="457200"/>
+          </a:xfrm>
+          <a:prstGeom prst="rect">
+            <a:avLst/>
+          </a:prstGeom>
+          <a:noFill/>
+        </p:spPr>
+        <p:txBody>
+          <a:bodyPr wrap="none" lIns="45720" rIns="45720" tIns="18288" bIns="18288" anchor="ctr">
+            <a:noAutofit/>
+          </a:bodyPr>
+          <a:lstStyle/>
+          <a:p>
+            <a:pPr algn="l"/>
+            <a:r>
+              <a:rPr sz="2180" b="0" i="0">
+                <a:solidFill>
+                  <a:srgbClr val="1A1A1A"/>
+                </a:solidFill>
+                <a:latin typeface="Lexend"/>
+              </a:rPr>
+              <a:t>4.   </a:t>
+            </a:r>
+          </a:p>
+        </p:txBody>
+      </p:sp>
+      <p:pic>
+        <p:nvPicPr>
+          <p:cNvPr id="19" name="Picture 18" descr="a7e24ba549ecbc3a.png"/>
+          <p:cNvPicPr>
+            <a:picLocks noChangeAspect="1"/>
+          </p:cNvPicPr>
+          <p:nvPr/>
+        </p:nvPicPr>
+        <p:blipFill>
+          <a:blip r:embed="rId6"/>
+          <a:stretch>
+            <a:fillRect/>
+          </a:stretch>
+        </p:blipFill>
+        <p:spPr>
+          <a:xfrm>
+            <a:off x="2444241" y="3375469"/>
+            <a:ext cx="1347216" cy="240791"/>
+          </a:xfrm>
+          <a:prstGeom prst="rect">
+            <a:avLst/>
+          </a:prstGeom>
+        </p:spPr>
+      </p:pic>
+      <p:sp>
+        <p:nvSpPr>
+          <p:cNvPr id="20" name="TextBox 19"/>
+          <p:cNvSpPr txBox="1"/>
+          <p:nvPr/>
+        </p:nvSpPr>
+        <p:spPr>
+          <a:xfrm>
+            <a:off x="3791457" y="3278124"/>
+            <a:ext cx="6844254" cy="457200"/>
+          </a:xfrm>
+          <a:prstGeom prst="rect">
+            <a:avLst/>
+          </a:prstGeom>
+          <a:noFill/>
+        </p:spPr>
+        <p:txBody>
+          <a:bodyPr wrap="none" lIns="45720" rIns="45720" tIns="18288" bIns="18288" anchor="ctr">
+            <a:noAutofit/>
+          </a:bodyPr>
+          <a:lstStyle/>
+          <a:p>
+            <a:pPr algn="l"/>
+            <a:r>
+              <a:rPr sz="2180" b="0" i="0">
+                <a:solidFill>
+                  <a:srgbClr val="1A1A1A"/>
+                </a:solidFill>
+                <a:latin typeface="Lexend"/>
+              </a:rPr>
+              <a:t>. A 1-ft square has what area in square inches?</a:t>
             </a:r>
           </a:p>
         </p:txBody>
@@ -7523,15 +8080,74 @@
           </a:p>
         </p:txBody>
       </p:sp>
-      <p:sp>
-        <p:nvSpPr>
-          <p:cNvPr id="8" name="TextBox 7"/>
-          <p:cNvSpPr txBox="1"/>
-          <p:nvPr/>
-        </p:nvSpPr>
-        <p:spPr>
-          <a:xfrm>
-            <a:off x="1234440" y="1874519"/>
+      <p:pic>
+        <p:nvPicPr>
+          <p:cNvPr id="8" name="Picture 7" descr="9ab9b6452f97f390.png"/>
+          <p:cNvPicPr>
+            <a:picLocks noChangeAspect="1"/>
+          </p:cNvPicPr>
+          <p:nvPr/>
+        </p:nvPicPr>
+        <p:blipFill>
+          <a:blip r:embed="rId2"/>
+          <a:stretch>
+            <a:fillRect/>
+          </a:stretch>
+        </p:blipFill>
+        <p:spPr>
+          <a:xfrm>
+            <a:off x="1234440" y="1962911"/>
+            <a:ext cx="1972056" cy="304800"/>
+          </a:xfrm>
+          <a:prstGeom prst="rect">
+            <a:avLst/>
+          </a:prstGeom>
+        </p:spPr>
+      </p:pic>
+      <p:sp>
+        <p:nvSpPr>
+          <p:cNvPr id="9" name="TextBox 8"/>
+          <p:cNvSpPr txBox="1"/>
+          <p:nvPr/>
+        </p:nvSpPr>
+        <p:spPr>
+          <a:xfrm>
+            <a:off x="3206496" y="1851660"/>
+            <a:ext cx="2972964" cy="457200"/>
+          </a:xfrm>
+          <a:prstGeom prst="rect">
+            <a:avLst/>
+          </a:prstGeom>
+          <a:noFill/>
+        </p:spPr>
+        <p:txBody>
+          <a:bodyPr wrap="none" lIns="45720" rIns="45720" tIns="18288" bIns="18288" anchor="ctr">
+            <a:noAutofit/>
+          </a:bodyPr>
+          <a:lstStyle/>
+          <a:p>
+            <a:pPr algn="l"/>
+            <a:r>
+              <a:rPr sz="2280" b="0" i="0">
+                <a:solidFill>
+                  <a:srgbClr val="1A1A1A"/>
+                </a:solidFill>
+                <a:latin typeface="Lexend"/>
+              </a:rPr>
+              <a:t>. A tank holds 10 L.</a:t>
+            </a:r>
+          </a:p>
+        </p:txBody>
+      </p:sp>
+      <p:sp>
+        <p:nvSpPr>
+          <p:cNvPr id="10" name="TextBox 9"/>
+          <p:cNvSpPr txBox="1"/>
+          <p:nvPr/>
+        </p:nvSpPr>
+        <p:spPr>
+          <a:xfrm>
+            <a:off x="1234440" y="2487168"/>
             <a:ext cx="10058400" cy="429370"/>
           </a:xfrm>
           <a:prstGeom prst="rect">
@@ -7547,47 +8163,12 @@
           <a:p>
             <a:pPr algn="l"/>
             <a:r>
-              <a:rPr sz="2280" b="0" i="0">
+              <a:rPr sz="2280" b="1" i="0">
                 <a:solidFill>
                   <a:srgbClr val="1A1A1A"/>
                 </a:solidFill>
                 <a:latin typeface="Lexend"/>
               </a:rPr>
-              <a:t>1 L = 0.264 gal. A tank holds 10 L.</a:t>
-            </a:r>
-          </a:p>
-        </p:txBody>
-      </p:sp>
-      <p:sp>
-        <p:nvSpPr>
-          <p:cNvPr id="9" name="TextBox 8"/>
-          <p:cNvSpPr txBox="1"/>
-          <p:nvPr/>
-        </p:nvSpPr>
-        <p:spPr>
-          <a:xfrm>
-            <a:off x="1234440" y="2413618"/>
-            <a:ext cx="10058400" cy="429370"/>
-          </a:xfrm>
-          <a:prstGeom prst="rect">
-            <a:avLst/>
-          </a:prstGeom>
-          <a:noFill/>
-        </p:spPr>
-        <p:txBody>
-          <a:bodyPr wrap="square" lIns="45720" rIns="45720" tIns="18288" bIns="18288" anchor="t">
-            <a:spAutoFit/>
-          </a:bodyPr>
-          <a:lstStyle/>
-          <a:p>
-            <a:pPr algn="l"/>
-            <a:r>
-              <a:rPr sz="2280" b="1" i="0">
-                <a:solidFill>
-                  <a:srgbClr val="1A1A1A"/>
-                </a:solidFill>
-                <a:latin typeface="Lexend"/>
-              </a:rPr>
               <a:t>How many gallons is that?</a:t>
             </a:r>
           </a:p>
@@ -7595,7 +8176,7 @@
       </p:sp>
       <p:sp>
         <p:nvSpPr>
-          <p:cNvPr id="10" name="TextBox 9"/>
+          <p:cNvPr id="11" name="TextBox 10"/>
           <p:cNvSpPr txBox="1"/>
           <p:nvPr/>
         </p:nvSpPr>
@@ -7856,79 +8437,9 @@
           </a:p>
         </p:txBody>
       </p:sp>
-      <p:sp>
-        <p:nvSpPr>
-          <p:cNvPr id="8" name="TextBox 7"/>
-          <p:cNvSpPr txBox="1"/>
-          <p:nvPr/>
-        </p:nvSpPr>
-        <p:spPr>
-          <a:xfrm>
-            <a:off x="1234440" y="1874519"/>
-            <a:ext cx="10058400" cy="429370"/>
-          </a:xfrm>
-          <a:prstGeom prst="rect">
-            <a:avLst/>
-          </a:prstGeom>
-          <a:noFill/>
-        </p:spPr>
-        <p:txBody>
-          <a:bodyPr wrap="square" lIns="45720" rIns="45720" tIns="18288" bIns="18288" anchor="t">
-            <a:spAutoFit/>
-          </a:bodyPr>
-          <a:lstStyle/>
-          <a:p>
-            <a:pPr algn="l"/>
-            <a:r>
-              <a:rPr sz="2280" b="0" i="0">
-                <a:solidFill>
-                  <a:srgbClr val="1A1A1A"/>
-                </a:solidFill>
-                <a:latin typeface="Lexend"/>
-              </a:rPr>
-              <a:t>1 L = 0.264 gal. A tank holds 10 L.</a:t>
-            </a:r>
-          </a:p>
-        </p:txBody>
-      </p:sp>
-      <p:sp>
-        <p:nvSpPr>
-          <p:cNvPr id="9" name="TextBox 8"/>
-          <p:cNvSpPr txBox="1"/>
-          <p:nvPr/>
-        </p:nvSpPr>
-        <p:spPr>
-          <a:xfrm>
-            <a:off x="1234440" y="2413618"/>
-            <a:ext cx="10058400" cy="429370"/>
-          </a:xfrm>
-          <a:prstGeom prst="rect">
-            <a:avLst/>
-          </a:prstGeom>
-          <a:noFill/>
-        </p:spPr>
-        <p:txBody>
-          <a:bodyPr wrap="square" lIns="45720" rIns="45720" tIns="18288" bIns="18288" anchor="t">
-            <a:spAutoFit/>
-          </a:bodyPr>
-          <a:lstStyle/>
-          <a:p>
-            <a:pPr algn="l"/>
-            <a:r>
-              <a:rPr sz="2280" b="1" i="0">
-                <a:solidFill>
-                  <a:srgbClr val="1A1A1A"/>
-                </a:solidFill>
-                <a:latin typeface="Lexend"/>
-              </a:rPr>
-              <a:t>How many gallons is that?</a:t>
-            </a:r>
-          </a:p>
-        </p:txBody>
-      </p:sp>
       <p:pic>
         <p:nvPicPr>
-          <p:cNvPr id="10" name="Picture 9" descr="ba6a3ea2bb8d7c10.png"/>
+          <p:cNvPr id="8" name="Picture 7" descr="35b6bbccdafb35f4.png"/>
           <p:cNvPicPr>
             <a:picLocks noChangeAspect="1"/>
           </p:cNvPicPr>
@@ -7942,7 +8453,101 @@
         </p:blipFill>
         <p:spPr>
           <a:xfrm>
-            <a:off x="4861559" y="3149312"/>
+            <a:off x="1234440" y="1962911"/>
+            <a:ext cx="1972056" cy="304800"/>
+          </a:xfrm>
+          <a:prstGeom prst="rect">
+            <a:avLst/>
+          </a:prstGeom>
+        </p:spPr>
+      </p:pic>
+      <p:sp>
+        <p:nvSpPr>
+          <p:cNvPr id="9" name="TextBox 8"/>
+          <p:cNvSpPr txBox="1"/>
+          <p:nvPr/>
+        </p:nvSpPr>
+        <p:spPr>
+          <a:xfrm>
+            <a:off x="3206496" y="1851660"/>
+            <a:ext cx="2972964" cy="457200"/>
+          </a:xfrm>
+          <a:prstGeom prst="rect">
+            <a:avLst/>
+          </a:prstGeom>
+          <a:noFill/>
+        </p:spPr>
+        <p:txBody>
+          <a:bodyPr wrap="none" lIns="45720" rIns="45720" tIns="18288" bIns="18288" anchor="ctr">
+            <a:noAutofit/>
+          </a:bodyPr>
+          <a:lstStyle/>
+          <a:p>
+            <a:pPr algn="l"/>
+            <a:r>
+              <a:rPr sz="2280" b="0" i="0">
+                <a:solidFill>
+                  <a:srgbClr val="1A1A1A"/>
+                </a:solidFill>
+                <a:latin typeface="Lexend"/>
+              </a:rPr>
+              <a:t>. A tank holds 10 L.</a:t>
+            </a:r>
+          </a:p>
+        </p:txBody>
+      </p:sp>
+      <p:sp>
+        <p:nvSpPr>
+          <p:cNvPr id="10" name="TextBox 9"/>
+          <p:cNvSpPr txBox="1"/>
+          <p:nvPr/>
+        </p:nvSpPr>
+        <p:spPr>
+          <a:xfrm>
+            <a:off x="1234440" y="2487168"/>
+            <a:ext cx="10058400" cy="429370"/>
+          </a:xfrm>
+          <a:prstGeom prst="rect">
+            <a:avLst/>
+          </a:prstGeom>
+          <a:noFill/>
+        </p:spPr>
+        <p:txBody>
+          <a:bodyPr wrap="square" lIns="45720" rIns="45720" tIns="18288" bIns="18288" anchor="t">
+            <a:spAutoFit/>
+          </a:bodyPr>
+          <a:lstStyle/>
+          <a:p>
+            <a:pPr algn="l"/>
+            <a:r>
+              <a:rPr sz="2280" b="1" i="0">
+                <a:solidFill>
+                  <a:srgbClr val="1A1A1A"/>
+                </a:solidFill>
+                <a:latin typeface="Lexend"/>
+              </a:rPr>
+              <a:t>How many gallons is that?</a:t>
+            </a:r>
+          </a:p>
+        </p:txBody>
+      </p:sp>
+      <p:pic>
+        <p:nvPicPr>
+          <p:cNvPr id="11" name="Picture 10" descr="ba6a3ea2bb8d7c10.png"/>
+          <p:cNvPicPr>
+            <a:picLocks noChangeAspect="1"/>
+          </p:cNvPicPr>
+          <p:nvPr/>
+        </p:nvPicPr>
+        <p:blipFill>
+          <a:blip r:embed="rId3"/>
+          <a:stretch>
+            <a:fillRect/>
+          </a:stretch>
+        </p:blipFill>
+        <p:spPr>
+          <a:xfrm>
+            <a:off x="4861559" y="3239054"/>
             <a:ext cx="2548128" cy="256032"/>
           </a:xfrm>
           <a:prstGeom prst="rect">
@@ -7952,7 +8557,7 @@
       </p:pic>
       <p:sp>
         <p:nvSpPr>
-          <p:cNvPr id="11" name="TextBox 10"/>
+          <p:cNvPr id="12" name="TextBox 11"/>
           <p:cNvSpPr txBox="1"/>
           <p:nvPr/>
         </p:nvSpPr>
@@ -8213,132 +8818,9 @@
           </a:p>
         </p:txBody>
       </p:sp>
-      <p:sp>
-        <p:nvSpPr>
-          <p:cNvPr id="8" name="TextBox 7"/>
-          <p:cNvSpPr txBox="1"/>
-          <p:nvPr/>
-        </p:nvSpPr>
-        <p:spPr>
-          <a:xfrm>
-            <a:off x="1234440" y="1874519"/>
-            <a:ext cx="10058400" cy="429370"/>
-          </a:xfrm>
-          <a:prstGeom prst="rect">
-            <a:avLst/>
-          </a:prstGeom>
-          <a:noFill/>
-        </p:spPr>
-        <p:txBody>
-          <a:bodyPr wrap="square" lIns="45720" rIns="45720" tIns="18288" bIns="18288" anchor="t">
-            <a:spAutoFit/>
-          </a:bodyPr>
-          <a:lstStyle/>
-          <a:p>
-            <a:pPr algn="l"/>
-            <a:r>
-              <a:rPr sz="2280" b="0" i="0">
-                <a:solidFill>
-                  <a:srgbClr val="1A1A1A"/>
-                </a:solidFill>
-                <a:latin typeface="Lexend"/>
-              </a:rPr>
-              <a:t>1 yd = 3 ft. A patch of lawn is 2 yd</a:t>
-            </a:r>
-            <a:r>
-              <a:rPr sz="2280" b="0" i="0" baseline="30000">
-                <a:solidFill>
-                  <a:srgbClr val="1A1A1A"/>
-                </a:solidFill>
-                <a:latin typeface="Lexend"/>
-              </a:rPr>
-              <a:t>2</a:t>
-            </a:r>
-            <a:r>
-              <a:rPr sz="2280" b="0" i="0">
-                <a:solidFill>
-                  <a:srgbClr val="1A1A1A"/>
-                </a:solidFill>
-                <a:latin typeface="Lexend"/>
-              </a:rPr>
-              <a:t> in area.</a:t>
-            </a:r>
-          </a:p>
-        </p:txBody>
-      </p:sp>
-      <p:sp>
-        <p:nvSpPr>
-          <p:cNvPr id="9" name="TextBox 8"/>
-          <p:cNvSpPr txBox="1"/>
-          <p:nvPr/>
-        </p:nvSpPr>
-        <p:spPr>
-          <a:xfrm>
-            <a:off x="1234440" y="2413618"/>
-            <a:ext cx="10058400" cy="429370"/>
-          </a:xfrm>
-          <a:prstGeom prst="rect">
-            <a:avLst/>
-          </a:prstGeom>
-          <a:noFill/>
-        </p:spPr>
-        <p:txBody>
-          <a:bodyPr wrap="square" lIns="45720" rIns="45720" tIns="18288" bIns="18288" anchor="t">
-            <a:spAutoFit/>
-          </a:bodyPr>
-          <a:lstStyle/>
-          <a:p>
-            <a:pPr algn="l"/>
-            <a:r>
-              <a:rPr sz="2280" b="1" i="0">
-                <a:solidFill>
-                  <a:srgbClr val="1A1A1A"/>
-                </a:solidFill>
-                <a:latin typeface="Lexend"/>
-              </a:rPr>
-              <a:t>How many square feet is that?</a:t>
-            </a:r>
-          </a:p>
-        </p:txBody>
-      </p:sp>
-      <p:sp>
-        <p:nvSpPr>
-          <p:cNvPr id="10" name="TextBox 9"/>
-          <p:cNvSpPr txBox="1"/>
-          <p:nvPr/>
-        </p:nvSpPr>
-        <p:spPr>
-          <a:xfrm>
-            <a:off x="1691640" y="3144740"/>
-            <a:ext cx="594360" cy="457200"/>
-          </a:xfrm>
-          <a:prstGeom prst="rect">
-            <a:avLst/>
-          </a:prstGeom>
-          <a:noFill/>
-        </p:spPr>
-        <p:txBody>
-          <a:bodyPr wrap="square" lIns="45720" rIns="45720" tIns="18288" bIns="18288" anchor="t">
-            <a:spAutoFit/>
-          </a:bodyPr>
-          <a:lstStyle/>
-          <a:p>
-            <a:pPr algn="l"/>
-            <a:r>
-              <a:rPr sz="2280" b="1" i="0">
-                <a:solidFill>
-                  <a:srgbClr val="1A1A1A"/>
-                </a:solidFill>
-                <a:latin typeface="Lexend"/>
-              </a:rPr>
-              <a:t>A.</a:t>
-            </a:r>
-          </a:p>
-        </p:txBody>
-      </p:sp>
       <p:pic>
         <p:nvPicPr>
-          <p:cNvPr id="11" name="Picture 10" descr="1faa871627427bbb.png"/>
+          <p:cNvPr id="8" name="Picture 7" descr="85d78c8d2e33f8ba.png"/>
           <p:cNvPicPr>
             <a:picLocks noChangeAspect="1"/>
           </p:cNvPicPr>
@@ -8352,8 +8834,8 @@
         </p:blipFill>
         <p:spPr>
           <a:xfrm>
-            <a:off x="2258568" y="3124928"/>
-            <a:ext cx="920495" cy="341376"/>
+            <a:off x="1234440" y="1962911"/>
+            <a:ext cx="1304544" cy="304800"/>
           </a:xfrm>
           <a:prstGeom prst="rect">
             <a:avLst/>
@@ -8362,42 +8844,77 @@
       </p:pic>
       <p:sp>
         <p:nvSpPr>
-          <p:cNvPr id="12" name="TextBox 11"/>
-          <p:cNvSpPr txBox="1"/>
-          <p:nvPr/>
-        </p:nvSpPr>
-        <p:spPr>
-          <a:xfrm>
-            <a:off x="6537959" y="3144740"/>
-            <a:ext cx="594360" cy="457200"/>
-          </a:xfrm>
-          <a:prstGeom prst="rect">
-            <a:avLst/>
-          </a:prstGeom>
-          <a:noFill/>
-        </p:spPr>
-        <p:txBody>
-          <a:bodyPr wrap="square" lIns="45720" rIns="45720" tIns="18288" bIns="18288" anchor="t">
-            <a:spAutoFit/>
-          </a:bodyPr>
-          <a:lstStyle/>
-          <a:p>
-            <a:pPr algn="l"/>
-            <a:r>
-              <a:rPr sz="2280" b="1" i="0">
+          <p:cNvPr id="9" name="TextBox 8"/>
+          <p:cNvSpPr txBox="1"/>
+          <p:nvPr/>
+        </p:nvSpPr>
+        <p:spPr>
+          <a:xfrm>
+            <a:off x="2538984" y="1851660"/>
+            <a:ext cx="280301" cy="457200"/>
+          </a:xfrm>
+          <a:prstGeom prst="rect">
+            <a:avLst/>
+          </a:prstGeom>
+          <a:noFill/>
+        </p:spPr>
+        <p:txBody>
+          <a:bodyPr wrap="none" lIns="45720" rIns="45720" tIns="18288" bIns="18288" anchor="ctr">
+            <a:noAutofit/>
+          </a:bodyPr>
+          <a:lstStyle/>
+          <a:p>
+            <a:pPr algn="l"/>
+            <a:r>
+              <a:rPr sz="2280" b="0" i="0">
                 <a:solidFill>
                   <a:srgbClr val="1A1A1A"/>
                 </a:solidFill>
                 <a:latin typeface="Lexend"/>
               </a:rPr>
-              <a:t>B.</a:t>
+              <a:t>.</a:t>
+            </a:r>
+          </a:p>
+        </p:txBody>
+      </p:sp>
+      <p:sp>
+        <p:nvSpPr>
+          <p:cNvPr id="10" name="TextBox 9"/>
+          <p:cNvSpPr txBox="1"/>
+          <p:nvPr/>
+        </p:nvSpPr>
+        <p:spPr>
+          <a:xfrm>
+            <a:off x="1234440" y="2464308"/>
+            <a:ext cx="2936146" cy="457200"/>
+          </a:xfrm>
+          <a:prstGeom prst="rect">
+            <a:avLst/>
+          </a:prstGeom>
+          <a:noFill/>
+        </p:spPr>
+        <p:txBody>
+          <a:bodyPr wrap="none" lIns="45720" rIns="45720" tIns="18288" bIns="18288" anchor="ctr">
+            <a:noAutofit/>
+          </a:bodyPr>
+          <a:lstStyle/>
+          <a:p>
+            <a:pPr algn="l"/>
+            <a:r>
+              <a:rPr sz="2280" b="0" i="0">
+                <a:solidFill>
+                  <a:srgbClr val="1A1A1A"/>
+                </a:solidFill>
+                <a:latin typeface="Lexend"/>
+              </a:rPr>
+              <a:t>A patch of lawn is </a:t>
             </a:r>
           </a:p>
         </p:txBody>
       </p:sp>
       <p:pic>
         <p:nvPicPr>
-          <p:cNvPr id="13" name="Picture 12" descr="fa7c6ba97e7789dd.png"/>
+          <p:cNvPr id="11" name="Picture 10" descr="1bf4f9ec3810cb3c.png"/>
           <p:cNvPicPr>
             <a:picLocks noChangeAspect="1"/>
           </p:cNvPicPr>
@@ -8411,8 +8928,8 @@
         </p:blipFill>
         <p:spPr>
           <a:xfrm>
-            <a:off x="7104888" y="3124928"/>
-            <a:ext cx="932688" cy="341376"/>
+            <a:off x="4033426" y="2532888"/>
+            <a:ext cx="704088" cy="347472"/>
           </a:xfrm>
           <a:prstGeom prst="rect">
             <a:avLst/>
@@ -8421,14 +8938,49 @@
       </p:pic>
       <p:sp>
         <p:nvSpPr>
-          <p:cNvPr id="14" name="TextBox 13"/>
-          <p:cNvSpPr txBox="1"/>
-          <p:nvPr/>
-        </p:nvSpPr>
-        <p:spPr>
-          <a:xfrm>
-            <a:off x="1691640" y="3757388"/>
-            <a:ext cx="594360" cy="457200"/>
+          <p:cNvPr id="12" name="TextBox 11"/>
+          <p:cNvSpPr txBox="1"/>
+          <p:nvPr/>
+        </p:nvSpPr>
+        <p:spPr>
+          <a:xfrm>
+            <a:off x="4737514" y="2464308"/>
+            <a:ext cx="1405474" cy="457200"/>
+          </a:xfrm>
+          <a:prstGeom prst="rect">
+            <a:avLst/>
+          </a:prstGeom>
+          <a:noFill/>
+        </p:spPr>
+        <p:txBody>
+          <a:bodyPr wrap="none" lIns="45720" rIns="45720" tIns="18288" bIns="18288" anchor="ctr">
+            <a:noAutofit/>
+          </a:bodyPr>
+          <a:lstStyle/>
+          <a:p>
+            <a:pPr algn="l"/>
+            <a:r>
+              <a:rPr sz="2280" b="0" i="0">
+                <a:solidFill>
+                  <a:srgbClr val="1A1A1A"/>
+                </a:solidFill>
+                <a:latin typeface="Lexend"/>
+              </a:rPr>
+              <a:t> in area.</a:t>
+            </a:r>
+          </a:p>
+        </p:txBody>
+      </p:sp>
+      <p:sp>
+        <p:nvSpPr>
+          <p:cNvPr id="13" name="TextBox 12"/>
+          <p:cNvSpPr txBox="1"/>
+          <p:nvPr/>
+        </p:nvSpPr>
+        <p:spPr>
+          <a:xfrm>
+            <a:off x="1234440" y="3099816"/>
+            <a:ext cx="10058400" cy="429370"/>
           </a:xfrm>
           <a:prstGeom prst="rect">
             <a:avLst/>
@@ -8449,14 +9001,49 @@
                 </a:solidFill>
                 <a:latin typeface="Lexend"/>
               </a:rPr>
-              <a:t>C.</a:t>
+              <a:t>How many square feet is that?</a:t>
+            </a:r>
+          </a:p>
+        </p:txBody>
+      </p:sp>
+      <p:sp>
+        <p:nvSpPr>
+          <p:cNvPr id="14" name="TextBox 13"/>
+          <p:cNvSpPr txBox="1"/>
+          <p:nvPr/>
+        </p:nvSpPr>
+        <p:spPr>
+          <a:xfrm>
+            <a:off x="1691640" y="3830938"/>
+            <a:ext cx="594360" cy="457200"/>
+          </a:xfrm>
+          <a:prstGeom prst="rect">
+            <a:avLst/>
+          </a:prstGeom>
+          <a:noFill/>
+        </p:spPr>
+        <p:txBody>
+          <a:bodyPr wrap="square" lIns="45720" rIns="45720" tIns="18288" bIns="18288" anchor="t">
+            <a:spAutoFit/>
+          </a:bodyPr>
+          <a:lstStyle/>
+          <a:p>
+            <a:pPr algn="l"/>
+            <a:r>
+              <a:rPr sz="2280" b="1" i="0">
+                <a:solidFill>
+                  <a:srgbClr val="1A1A1A"/>
+                </a:solidFill>
+                <a:latin typeface="Lexend"/>
+              </a:rPr>
+              <a:t>A.</a:t>
             </a:r>
           </a:p>
         </p:txBody>
       </p:sp>
       <p:pic>
         <p:nvPicPr>
-          <p:cNvPr id="15" name="Picture 14" descr="9327eaee863255b4.png"/>
+          <p:cNvPr id="15" name="Picture 14" descr="1faa871627427bbb.png"/>
           <p:cNvPicPr>
             <a:picLocks noChangeAspect="1"/>
           </p:cNvPicPr>
@@ -8470,8 +9057,8 @@
         </p:blipFill>
         <p:spPr>
           <a:xfrm>
-            <a:off x="2258568" y="3737576"/>
-            <a:ext cx="752856" cy="341376"/>
+            <a:off x="2258568" y="3776074"/>
+            <a:ext cx="920495" cy="341376"/>
           </a:xfrm>
           <a:prstGeom prst="rect">
             <a:avLst/>
@@ -8486,7 +9073,7 @@
         </p:nvSpPr>
         <p:spPr>
           <a:xfrm>
-            <a:off x="6537959" y="3757388"/>
+            <a:off x="6537959" y="3830938"/>
             <a:ext cx="594360" cy="457200"/>
           </a:xfrm>
           <a:prstGeom prst="rect">
@@ -8508,14 +9095,14 @@
                 </a:solidFill>
                 <a:latin typeface="Lexend"/>
               </a:rPr>
-              <a:t>D.</a:t>
+              <a:t>B.</a:t>
             </a:r>
           </a:p>
         </p:txBody>
       </p:sp>
       <p:pic>
         <p:nvPicPr>
-          <p:cNvPr id="17" name="Picture 16" descr="e03f104e5972ce9d.png"/>
+          <p:cNvPr id="17" name="Picture 16" descr="fa7c6ba97e7789dd.png"/>
           <p:cNvPicPr>
             <a:picLocks noChangeAspect="1"/>
           </p:cNvPicPr>
@@ -8529,7 +9116,125 @@
         </p:blipFill>
         <p:spPr>
           <a:xfrm>
-            <a:off x="7104888" y="3737576"/>
+            <a:off x="7104888" y="3776074"/>
+            <a:ext cx="932688" cy="341376"/>
+          </a:xfrm>
+          <a:prstGeom prst="rect">
+            <a:avLst/>
+          </a:prstGeom>
+        </p:spPr>
+      </p:pic>
+      <p:sp>
+        <p:nvSpPr>
+          <p:cNvPr id="18" name="TextBox 17"/>
+          <p:cNvSpPr txBox="1"/>
+          <p:nvPr/>
+        </p:nvSpPr>
+        <p:spPr>
+          <a:xfrm>
+            <a:off x="1691640" y="4443586"/>
+            <a:ext cx="594360" cy="457200"/>
+          </a:xfrm>
+          <a:prstGeom prst="rect">
+            <a:avLst/>
+          </a:prstGeom>
+          <a:noFill/>
+        </p:spPr>
+        <p:txBody>
+          <a:bodyPr wrap="square" lIns="45720" rIns="45720" tIns="18288" bIns="18288" anchor="t">
+            <a:spAutoFit/>
+          </a:bodyPr>
+          <a:lstStyle/>
+          <a:p>
+            <a:pPr algn="l"/>
+            <a:r>
+              <a:rPr sz="2280" b="1" i="0">
+                <a:solidFill>
+                  <a:srgbClr val="1A1A1A"/>
+                </a:solidFill>
+                <a:latin typeface="Lexend"/>
+              </a:rPr>
+              <a:t>C.</a:t>
+            </a:r>
+          </a:p>
+        </p:txBody>
+      </p:sp>
+      <p:pic>
+        <p:nvPicPr>
+          <p:cNvPr id="19" name="Picture 18" descr="9327eaee863255b4.png"/>
+          <p:cNvPicPr>
+            <a:picLocks noChangeAspect="1"/>
+          </p:cNvPicPr>
+          <p:nvPr/>
+        </p:nvPicPr>
+        <p:blipFill>
+          <a:blip r:embed="rId6"/>
+          <a:stretch>
+            <a:fillRect/>
+          </a:stretch>
+        </p:blipFill>
+        <p:spPr>
+          <a:xfrm>
+            <a:off x="2258568" y="4388722"/>
+            <a:ext cx="752856" cy="341376"/>
+          </a:xfrm>
+          <a:prstGeom prst="rect">
+            <a:avLst/>
+          </a:prstGeom>
+        </p:spPr>
+      </p:pic>
+      <p:sp>
+        <p:nvSpPr>
+          <p:cNvPr id="20" name="TextBox 19"/>
+          <p:cNvSpPr txBox="1"/>
+          <p:nvPr/>
+        </p:nvSpPr>
+        <p:spPr>
+          <a:xfrm>
+            <a:off x="6537959" y="4443586"/>
+            <a:ext cx="594360" cy="457200"/>
+          </a:xfrm>
+          <a:prstGeom prst="rect">
+            <a:avLst/>
+          </a:prstGeom>
+          <a:noFill/>
+        </p:spPr>
+        <p:txBody>
+          <a:bodyPr wrap="square" lIns="45720" rIns="45720" tIns="18288" bIns="18288" anchor="t">
+            <a:spAutoFit/>
+          </a:bodyPr>
+          <a:lstStyle/>
+          <a:p>
+            <a:pPr algn="l"/>
+            <a:r>
+              <a:rPr sz="2280" b="1" i="0">
+                <a:solidFill>
+                  <a:srgbClr val="1A1A1A"/>
+                </a:solidFill>
+                <a:latin typeface="Lexend"/>
+              </a:rPr>
+              <a:t>D.</a:t>
+            </a:r>
+          </a:p>
+        </p:txBody>
+      </p:sp>
+      <p:pic>
+        <p:nvPicPr>
+          <p:cNvPr id="21" name="Picture 20" descr="e03f104e5972ce9d.png"/>
+          <p:cNvPicPr>
+            <a:picLocks noChangeAspect="1"/>
+          </p:cNvPicPr>
+          <p:nvPr/>
+        </p:nvPicPr>
+        <p:blipFill>
+          <a:blip r:embed="rId7"/>
+          <a:stretch>
+            <a:fillRect/>
+          </a:stretch>
+        </p:blipFill>
+        <p:spPr>
+          <a:xfrm>
+            <a:off x="7104888" y="4388722"/>
             <a:ext cx="749808" cy="341376"/>
           </a:xfrm>
           <a:prstGeom prst="rect">
@@ -8539,13 +9244,13 @@
       </p:pic>
       <p:sp>
         <p:nvSpPr>
-          <p:cNvPr id="18" name="TextBox 17"/>
-          <p:cNvSpPr txBox="1"/>
-          <p:nvPr/>
-        </p:nvSpPr>
-        <p:spPr>
-          <a:xfrm>
-            <a:off x="777240" y="4434044"/>
+          <p:cNvPr id="22" name="TextBox 21"/>
+          <p:cNvSpPr txBox="1"/>
+          <p:nvPr/>
+        </p:nvSpPr>
+        <p:spPr>
+          <a:xfrm>
+            <a:off x="777240" y="5120242"/>
             <a:ext cx="10607040" cy="457200"/>
           </a:xfrm>
           <a:prstGeom prst="rect">
@@ -8800,97 +9505,9 @@
           </a:p>
         </p:txBody>
       </p:sp>
-      <p:sp>
-        <p:nvSpPr>
-          <p:cNvPr id="8" name="TextBox 7"/>
-          <p:cNvSpPr txBox="1"/>
-          <p:nvPr/>
-        </p:nvSpPr>
-        <p:spPr>
-          <a:xfrm>
-            <a:off x="1234440" y="1874519"/>
-            <a:ext cx="10058400" cy="429370"/>
-          </a:xfrm>
-          <a:prstGeom prst="rect">
-            <a:avLst/>
-          </a:prstGeom>
-          <a:noFill/>
-        </p:spPr>
-        <p:txBody>
-          <a:bodyPr wrap="square" lIns="45720" rIns="45720" tIns="18288" bIns="18288" anchor="t">
-            <a:spAutoFit/>
-          </a:bodyPr>
-          <a:lstStyle/>
-          <a:p>
-            <a:pPr algn="l"/>
-            <a:r>
-              <a:rPr sz="2280" b="0" i="0">
-                <a:solidFill>
-                  <a:srgbClr val="1A1A1A"/>
-                </a:solidFill>
-                <a:latin typeface="Lexend"/>
-              </a:rPr>
-              <a:t>1 yd = 3 ft. A patch of lawn is 2 yd</a:t>
-            </a:r>
-            <a:r>
-              <a:rPr sz="2280" b="0" i="0" baseline="30000">
-                <a:solidFill>
-                  <a:srgbClr val="1A1A1A"/>
-                </a:solidFill>
-                <a:latin typeface="Lexend"/>
-              </a:rPr>
-              <a:t>2</a:t>
-            </a:r>
-            <a:r>
-              <a:rPr sz="2280" b="0" i="0">
-                <a:solidFill>
-                  <a:srgbClr val="1A1A1A"/>
-                </a:solidFill>
-                <a:latin typeface="Lexend"/>
-              </a:rPr>
-              <a:t> in area.</a:t>
-            </a:r>
-          </a:p>
-        </p:txBody>
-      </p:sp>
-      <p:sp>
-        <p:nvSpPr>
-          <p:cNvPr id="9" name="TextBox 8"/>
-          <p:cNvSpPr txBox="1"/>
-          <p:nvPr/>
-        </p:nvSpPr>
-        <p:spPr>
-          <a:xfrm>
-            <a:off x="1234440" y="2413618"/>
-            <a:ext cx="10058400" cy="429370"/>
-          </a:xfrm>
-          <a:prstGeom prst="rect">
-            <a:avLst/>
-          </a:prstGeom>
-          <a:noFill/>
-        </p:spPr>
-        <p:txBody>
-          <a:bodyPr wrap="square" lIns="45720" rIns="45720" tIns="18288" bIns="18288" anchor="t">
-            <a:spAutoFit/>
-          </a:bodyPr>
-          <a:lstStyle/>
-          <a:p>
-            <a:pPr algn="l"/>
-            <a:r>
-              <a:rPr sz="2280" b="1" i="0">
-                <a:solidFill>
-                  <a:srgbClr val="1A1A1A"/>
-                </a:solidFill>
-                <a:latin typeface="Lexend"/>
-              </a:rPr>
-              <a:t>How many square feet is that?</a:t>
-            </a:r>
-          </a:p>
-        </p:txBody>
-      </p:sp>
       <p:pic>
         <p:nvPicPr>
-          <p:cNvPr id="10" name="Picture 9" descr="c9fe1cb570749efd.png"/>
+          <p:cNvPr id="8" name="Picture 7" descr="eb837b0c98931562.png"/>
           <p:cNvPicPr>
             <a:picLocks noChangeAspect="1"/>
           </p:cNvPicPr>
@@ -8904,8 +9521,8 @@
         </p:blipFill>
         <p:spPr>
           <a:xfrm>
-            <a:off x="3907711" y="3124928"/>
-            <a:ext cx="838200" cy="304800"/>
+            <a:off x="1234440" y="1962911"/>
+            <a:ext cx="1307592" cy="304800"/>
           </a:xfrm>
           <a:prstGeom prst="rect">
             <a:avLst/>
@@ -8914,14 +9531,14 @@
       </p:pic>
       <p:sp>
         <p:nvSpPr>
-          <p:cNvPr id="11" name="TextBox 10"/>
-          <p:cNvSpPr txBox="1"/>
-          <p:nvPr/>
-        </p:nvSpPr>
-        <p:spPr>
-          <a:xfrm>
-            <a:off x="4745911" y="3048728"/>
-            <a:ext cx="3757832" cy="457200"/>
+          <p:cNvPr id="9" name="TextBox 8"/>
+          <p:cNvSpPr txBox="1"/>
+          <p:nvPr/>
+        </p:nvSpPr>
+        <p:spPr>
+          <a:xfrm>
+            <a:off x="2542032" y="1851660"/>
+            <a:ext cx="280301" cy="457200"/>
           </a:xfrm>
           <a:prstGeom prst="rect">
             <a:avLst/>
@@ -8936,38 +9553,55 @@
           <a:p>
             <a:pPr algn="l"/>
             <a:r>
-              <a:rPr sz="2750" b="0" i="0">
+              <a:rPr sz="2280" b="0" i="0">
                 <a:solidFill>
                   <a:srgbClr val="1A1A1A"/>
                 </a:solidFill>
                 <a:latin typeface="Lexend"/>
               </a:rPr>
-              <a:t> ft</a:t>
-            </a:r>
-            <a:r>
-              <a:rPr sz="2750" b="0" i="0" baseline="30000">
+              <a:t>.</a:t>
+            </a:r>
+          </a:p>
+        </p:txBody>
+      </p:sp>
+      <p:sp>
+        <p:nvSpPr>
+          <p:cNvPr id="10" name="TextBox 9"/>
+          <p:cNvSpPr txBox="1"/>
+          <p:nvPr/>
+        </p:nvSpPr>
+        <p:spPr>
+          <a:xfrm>
+            <a:off x="1234440" y="2464308"/>
+            <a:ext cx="2936146" cy="457200"/>
+          </a:xfrm>
+          <a:prstGeom prst="rect">
+            <a:avLst/>
+          </a:prstGeom>
+          <a:noFill/>
+        </p:spPr>
+        <p:txBody>
+          <a:bodyPr wrap="none" lIns="45720" rIns="45720" tIns="18288" bIns="18288" anchor="ctr">
+            <a:noAutofit/>
+          </a:bodyPr>
+          <a:lstStyle/>
+          <a:p>
+            <a:pPr algn="l"/>
+            <a:r>
+              <a:rPr sz="2280" b="0" i="0">
                 <a:solidFill>
                   <a:srgbClr val="1A1A1A"/>
                 </a:solidFill>
                 <a:latin typeface="Lexend"/>
               </a:rPr>
-              <a:t>2</a:t>
-            </a:r>
-            <a:r>
-              <a:rPr sz="2750" b="0" i="0">
-                <a:solidFill>
-                  <a:srgbClr val="1A1A1A"/>
-                </a:solidFill>
-                <a:latin typeface="Lexend"/>
-              </a:rPr>
-              <a:t> in a square yard</a:t>
+              <a:t>A patch of lawn is </a:t>
             </a:r>
           </a:p>
         </p:txBody>
       </p:sp>
       <p:pic>
         <p:nvPicPr>
-          <p:cNvPr id="12" name="Picture 11" descr="33de29ff29e259d3.png"/>
+          <p:cNvPr id="11" name="Picture 10" descr="116cfbe2b85a3e8f.png"/>
           <p:cNvPicPr>
             <a:picLocks noChangeAspect="1"/>
           </p:cNvPicPr>
@@ -8981,7 +9615,178 @@
         </p:blipFill>
         <p:spPr>
           <a:xfrm>
-            <a:off x="3907711" y="3691856"/>
+            <a:off x="4033426" y="2532888"/>
+            <a:ext cx="707136" cy="347472"/>
+          </a:xfrm>
+          <a:prstGeom prst="rect">
+            <a:avLst/>
+          </a:prstGeom>
+        </p:spPr>
+      </p:pic>
+      <p:sp>
+        <p:nvSpPr>
+          <p:cNvPr id="12" name="TextBox 11"/>
+          <p:cNvSpPr txBox="1"/>
+          <p:nvPr/>
+        </p:nvSpPr>
+        <p:spPr>
+          <a:xfrm>
+            <a:off x="4740562" y="2464308"/>
+            <a:ext cx="1405474" cy="457200"/>
+          </a:xfrm>
+          <a:prstGeom prst="rect">
+            <a:avLst/>
+          </a:prstGeom>
+          <a:noFill/>
+        </p:spPr>
+        <p:txBody>
+          <a:bodyPr wrap="none" lIns="45720" rIns="45720" tIns="18288" bIns="18288" anchor="ctr">
+            <a:noAutofit/>
+          </a:bodyPr>
+          <a:lstStyle/>
+          <a:p>
+            <a:pPr algn="l"/>
+            <a:r>
+              <a:rPr sz="2280" b="0" i="0">
+                <a:solidFill>
+                  <a:srgbClr val="1A1A1A"/>
+                </a:solidFill>
+                <a:latin typeface="Lexend"/>
+              </a:rPr>
+              <a:t> in area.</a:t>
+            </a:r>
+          </a:p>
+        </p:txBody>
+      </p:sp>
+      <p:sp>
+        <p:nvSpPr>
+          <p:cNvPr id="13" name="TextBox 12"/>
+          <p:cNvSpPr txBox="1"/>
+          <p:nvPr/>
+        </p:nvSpPr>
+        <p:spPr>
+          <a:xfrm>
+            <a:off x="1234440" y="3099816"/>
+            <a:ext cx="10058400" cy="429370"/>
+          </a:xfrm>
+          <a:prstGeom prst="rect">
+            <a:avLst/>
+          </a:prstGeom>
+          <a:noFill/>
+        </p:spPr>
+        <p:txBody>
+          <a:bodyPr wrap="square" lIns="45720" rIns="45720" tIns="18288" bIns="18288" anchor="t">
+            <a:spAutoFit/>
+          </a:bodyPr>
+          <a:lstStyle/>
+          <a:p>
+            <a:pPr algn="l"/>
+            <a:r>
+              <a:rPr sz="2280" b="1" i="0">
+                <a:solidFill>
+                  <a:srgbClr val="1A1A1A"/>
+                </a:solidFill>
+                <a:latin typeface="Lexend"/>
+              </a:rPr>
+              <a:t>How many square feet is that?</a:t>
+            </a:r>
+          </a:p>
+        </p:txBody>
+      </p:sp>
+      <p:pic>
+        <p:nvPicPr>
+          <p:cNvPr id="14" name="Picture 13" descr="c9fe1cb570749efd.png"/>
+          <p:cNvPicPr>
+            <a:picLocks noChangeAspect="1"/>
+          </p:cNvPicPr>
+          <p:nvPr/>
+        </p:nvPicPr>
+        <p:blipFill>
+          <a:blip r:embed="rId4"/>
+          <a:stretch>
+            <a:fillRect/>
+          </a:stretch>
+        </p:blipFill>
+        <p:spPr>
+          <a:xfrm>
+            <a:off x="3907711" y="3802934"/>
+            <a:ext cx="838200" cy="304800"/>
+          </a:xfrm>
+          <a:prstGeom prst="rect">
+            <a:avLst/>
+          </a:prstGeom>
+        </p:spPr>
+      </p:pic>
+      <p:sp>
+        <p:nvSpPr>
+          <p:cNvPr id="15" name="TextBox 14"/>
+          <p:cNvSpPr txBox="1"/>
+          <p:nvPr/>
+        </p:nvSpPr>
+        <p:spPr>
+          <a:xfrm>
+            <a:off x="4745911" y="3734926"/>
+            <a:ext cx="3757832" cy="457200"/>
+          </a:xfrm>
+          <a:prstGeom prst="rect">
+            <a:avLst/>
+          </a:prstGeom>
+          <a:noFill/>
+        </p:spPr>
+        <p:txBody>
+          <a:bodyPr wrap="none" lIns="45720" rIns="45720" tIns="18288" bIns="18288" anchor="ctr">
+            <a:noAutofit/>
+          </a:bodyPr>
+          <a:lstStyle/>
+          <a:p>
+            <a:pPr algn="l"/>
+            <a:r>
+              <a:rPr sz="2750" b="0" i="0">
+                <a:solidFill>
+                  <a:srgbClr val="1A1A1A"/>
+                </a:solidFill>
+                <a:latin typeface="Lexend"/>
+              </a:rPr>
+              <a:t> ft</a:t>
+            </a:r>
+            <a:r>
+              <a:rPr sz="2750" b="0" i="0" baseline="30000">
+                <a:solidFill>
+                  <a:srgbClr val="1A1A1A"/>
+                </a:solidFill>
+                <a:latin typeface="Lexend"/>
+              </a:rPr>
+              <a:t>2</a:t>
+            </a:r>
+            <a:r>
+              <a:rPr sz="2750" b="0" i="0">
+                <a:solidFill>
+                  <a:srgbClr val="1A1A1A"/>
+                </a:solidFill>
+                <a:latin typeface="Lexend"/>
+              </a:rPr>
+              <a:t> in a square yard</a:t>
+            </a:r>
+          </a:p>
+        </p:txBody>
+      </p:sp>
+      <p:pic>
+        <p:nvPicPr>
+          <p:cNvPr id="16" name="Picture 15" descr="33de29ff29e259d3.png"/>
+          <p:cNvPicPr>
+            <a:picLocks noChangeAspect="1"/>
+          </p:cNvPicPr>
+          <p:nvPr/>
+        </p:nvPicPr>
+        <p:blipFill>
+          <a:blip r:embed="rId5"/>
+          <a:stretch>
+            <a:fillRect/>
+          </a:stretch>
+        </p:blipFill>
+        <p:spPr>
+          <a:xfrm>
+            <a:off x="3907711" y="4394246"/>
             <a:ext cx="1353312" cy="249935"/>
           </a:xfrm>
           <a:prstGeom prst="rect">
@@ -8991,13 +9796,13 @@
       </p:pic>
       <p:sp>
         <p:nvSpPr>
-          <p:cNvPr id="13" name="TextBox 12"/>
-          <p:cNvSpPr txBox="1"/>
-          <p:nvPr/>
-        </p:nvSpPr>
-        <p:spPr>
-          <a:xfrm>
-            <a:off x="777240" y="4663440"/>
+          <p:cNvPr id="17" name="TextBox 16"/>
+          <p:cNvSpPr txBox="1"/>
+          <p:nvPr/>
+        </p:nvSpPr>
+        <p:spPr>
+          <a:xfrm>
+            <a:off x="777240" y="4845922"/>
             <a:ext cx="10607040" cy="548640"/>
           </a:xfrm>
           <a:prstGeom prst="rect">
@@ -9261,15 +10066,133 @@
           </a:p>
         </p:txBody>
       </p:sp>
-      <p:sp>
-        <p:nvSpPr>
-          <p:cNvPr id="8" name="TextBox 7"/>
-          <p:cNvSpPr txBox="1"/>
-          <p:nvPr/>
-        </p:nvSpPr>
-        <p:spPr>
-          <a:xfrm>
-            <a:off x="1234440" y="1874519"/>
+      <p:pic>
+        <p:nvPicPr>
+          <p:cNvPr id="8" name="Picture 7" descr="53fb1d19ce360046.png"/>
+          <p:cNvPicPr>
+            <a:picLocks noChangeAspect="1"/>
+          </p:cNvPicPr>
+          <p:nvPr/>
+        </p:nvPicPr>
+        <p:blipFill>
+          <a:blip r:embed="rId2"/>
+          <a:stretch>
+            <a:fillRect/>
+          </a:stretch>
+        </p:blipFill>
+        <p:spPr>
+          <a:xfrm>
+            <a:off x="1234440" y="1965960"/>
+            <a:ext cx="1493520" cy="234696"/>
+          </a:xfrm>
+          <a:prstGeom prst="rect">
+            <a:avLst/>
+          </a:prstGeom>
+        </p:spPr>
+      </p:pic>
+      <p:sp>
+        <p:nvSpPr>
+          <p:cNvPr id="9" name="TextBox 8"/>
+          <p:cNvSpPr txBox="1"/>
+          <p:nvPr/>
+        </p:nvSpPr>
+        <p:spPr>
+          <a:xfrm>
+            <a:off x="2727960" y="1851660"/>
+            <a:ext cx="953666" cy="457200"/>
+          </a:xfrm>
+          <a:prstGeom prst="rect">
+            <a:avLst/>
+          </a:prstGeom>
+          <a:noFill/>
+        </p:spPr>
+        <p:txBody>
+          <a:bodyPr wrap="none" lIns="45720" rIns="45720" tIns="18288" bIns="18288" anchor="ctr">
+            <a:noAutofit/>
+          </a:bodyPr>
+          <a:lstStyle/>
+          <a:p>
+            <a:pPr algn="l"/>
+            <a:r>
+              <a:rPr sz="2280" b="0" i="0">
+                <a:solidFill>
+                  <a:srgbClr val="1A1A1A"/>
+                </a:solidFill>
+                <a:latin typeface="Lexend"/>
+              </a:rPr>
+              <a:t> and </a:t>
+            </a:r>
+          </a:p>
+        </p:txBody>
+      </p:sp>
+      <p:pic>
+        <p:nvPicPr>
+          <p:cNvPr id="10" name="Picture 9" descr="aae6846e2fca6d95.png"/>
+          <p:cNvPicPr>
+            <a:picLocks noChangeAspect="1"/>
+          </p:cNvPicPr>
+          <p:nvPr/>
+        </p:nvPicPr>
+        <p:blipFill>
+          <a:blip r:embed="rId3"/>
+          <a:stretch>
+            <a:fillRect/>
+          </a:stretch>
+        </p:blipFill>
+        <p:spPr>
+          <a:xfrm>
+            <a:off x="3544466" y="1975103"/>
+            <a:ext cx="1484376" cy="225552"/>
+          </a:xfrm>
+          <a:prstGeom prst="rect">
+            <a:avLst/>
+          </a:prstGeom>
+        </p:spPr>
+      </p:pic>
+      <p:sp>
+        <p:nvSpPr>
+          <p:cNvPr id="11" name="TextBox 10"/>
+          <p:cNvSpPr txBox="1"/>
+          <p:nvPr/>
+        </p:nvSpPr>
+        <p:spPr>
+          <a:xfrm>
+            <a:off x="5028842" y="1851660"/>
+            <a:ext cx="280301" cy="457200"/>
+          </a:xfrm>
+          <a:prstGeom prst="rect">
+            <a:avLst/>
+          </a:prstGeom>
+          <a:noFill/>
+        </p:spPr>
+        <p:txBody>
+          <a:bodyPr wrap="none" lIns="45720" rIns="45720" tIns="18288" bIns="18288" anchor="ctr">
+            <a:noAutofit/>
+          </a:bodyPr>
+          <a:lstStyle/>
+          <a:p>
+            <a:pPr algn="l"/>
+            <a:r>
+              <a:rPr sz="2280" b="0" i="0">
+                <a:solidFill>
+                  <a:srgbClr val="1A1A1A"/>
+                </a:solidFill>
+                <a:latin typeface="Lexend"/>
+              </a:rPr>
+              <a:t>.</a:t>
+            </a:r>
+          </a:p>
+        </p:txBody>
+      </p:sp>
+      <p:sp>
+        <p:nvSpPr>
+          <p:cNvPr id="12" name="TextBox 11"/>
+          <p:cNvSpPr txBox="1"/>
+          <p:nvPr/>
+        </p:nvSpPr>
+        <p:spPr>
+          <a:xfrm>
+            <a:off x="1234440" y="2487168"/>
             <a:ext cx="10058400" cy="429370"/>
           </a:xfrm>
           <a:prstGeom prst="rect">
@@ -9291,20 +10214,20 @@
                 </a:solidFill>
                 <a:latin typeface="Lexend"/>
               </a:rPr>
-              <a:t>1 c = 8 fl oz and 1 c = 0.24 L. A bottle holds 16 fl oz.</a:t>
-            </a:r>
-          </a:p>
-        </p:txBody>
-      </p:sp>
-      <p:sp>
-        <p:nvSpPr>
-          <p:cNvPr id="9" name="TextBox 8"/>
-          <p:cNvSpPr txBox="1"/>
-          <p:nvPr/>
-        </p:nvSpPr>
-        <p:spPr>
-          <a:xfrm>
-            <a:off x="1234440" y="2413618"/>
+              <a:t>A bottle holds 16 fl oz.</a:t>
+            </a:r>
+          </a:p>
+        </p:txBody>
+      </p:sp>
+      <p:sp>
+        <p:nvSpPr>
+          <p:cNvPr id="13" name="TextBox 12"/>
+          <p:cNvSpPr txBox="1"/>
+          <p:nvPr/>
+        </p:nvSpPr>
+        <p:spPr>
+          <a:xfrm>
+            <a:off x="1234440" y="3026266"/>
             <a:ext cx="10058400" cy="429370"/>
           </a:xfrm>
           <a:prstGeom prst="rect">
@@ -9333,7 +10256,7 @@
       </p:sp>
       <p:sp>
         <p:nvSpPr>
-          <p:cNvPr id="10" name="TextBox 9"/>
+          <p:cNvPr id="14" name="TextBox 13"/>
           <p:cNvSpPr txBox="1"/>
           <p:nvPr/>
         </p:nvSpPr>
@@ -9594,79 +10517,9 @@
           </a:p>
         </p:txBody>
       </p:sp>
-      <p:sp>
-        <p:nvSpPr>
-          <p:cNvPr id="8" name="TextBox 7"/>
-          <p:cNvSpPr txBox="1"/>
-          <p:nvPr/>
-        </p:nvSpPr>
-        <p:spPr>
-          <a:xfrm>
-            <a:off x="1234440" y="1874519"/>
-            <a:ext cx="10058400" cy="429370"/>
-          </a:xfrm>
-          <a:prstGeom prst="rect">
-            <a:avLst/>
-          </a:prstGeom>
-          <a:noFill/>
-        </p:spPr>
-        <p:txBody>
-          <a:bodyPr wrap="square" lIns="45720" rIns="45720" tIns="18288" bIns="18288" anchor="t">
-            <a:spAutoFit/>
-          </a:bodyPr>
-          <a:lstStyle/>
-          <a:p>
-            <a:pPr algn="l"/>
-            <a:r>
-              <a:rPr sz="2280" b="0" i="0">
-                <a:solidFill>
-                  <a:srgbClr val="1A1A1A"/>
-                </a:solidFill>
-                <a:latin typeface="Lexend"/>
-              </a:rPr>
-              <a:t>1 c = 8 fl oz and 1 c = 0.24 L. A bottle holds 16 fl oz.</a:t>
-            </a:r>
-          </a:p>
-        </p:txBody>
-      </p:sp>
-      <p:sp>
-        <p:nvSpPr>
-          <p:cNvPr id="9" name="TextBox 8"/>
-          <p:cNvSpPr txBox="1"/>
-          <p:nvPr/>
-        </p:nvSpPr>
-        <p:spPr>
-          <a:xfrm>
-            <a:off x="1234440" y="2413618"/>
-            <a:ext cx="10058400" cy="429370"/>
-          </a:xfrm>
-          <a:prstGeom prst="rect">
-            <a:avLst/>
-          </a:prstGeom>
-          <a:noFill/>
-        </p:spPr>
-        <p:txBody>
-          <a:bodyPr wrap="square" lIns="45720" rIns="45720" tIns="18288" bIns="18288" anchor="t">
-            <a:spAutoFit/>
-          </a:bodyPr>
-          <a:lstStyle/>
-          <a:p>
-            <a:pPr algn="l"/>
-            <a:r>
-              <a:rPr sz="2280" b="1" i="0">
-                <a:solidFill>
-                  <a:srgbClr val="1A1A1A"/>
-                </a:solidFill>
-                <a:latin typeface="Lexend"/>
-              </a:rPr>
-              <a:t>How many liters is that?</a:t>
-            </a:r>
-          </a:p>
-        </p:txBody>
-      </p:sp>
       <p:pic>
         <p:nvPicPr>
-          <p:cNvPr id="10" name="Picture 9" descr="83c4edb2bd6b7774.png"/>
+          <p:cNvPr id="8" name="Picture 7" descr="bcdf2ce76b20063c.png"/>
           <p:cNvPicPr>
             <a:picLocks noChangeAspect="1"/>
           </p:cNvPicPr>
@@ -9680,17 +10533,52 @@
         </p:blipFill>
         <p:spPr>
           <a:xfrm>
-            <a:off x="5038343" y="3149312"/>
-            <a:ext cx="1676400" cy="256032"/>
+            <a:off x="1234440" y="1965960"/>
+            <a:ext cx="1490472" cy="234696"/>
           </a:xfrm>
           <a:prstGeom prst="rect">
             <a:avLst/>
           </a:prstGeom>
         </p:spPr>
       </p:pic>
+      <p:sp>
+        <p:nvSpPr>
+          <p:cNvPr id="9" name="TextBox 8"/>
+          <p:cNvSpPr txBox="1"/>
+          <p:nvPr/>
+        </p:nvSpPr>
+        <p:spPr>
+          <a:xfrm>
+            <a:off x="2724912" y="1851660"/>
+            <a:ext cx="953666" cy="457200"/>
+          </a:xfrm>
+          <a:prstGeom prst="rect">
+            <a:avLst/>
+          </a:prstGeom>
+          <a:noFill/>
+        </p:spPr>
+        <p:txBody>
+          <a:bodyPr wrap="none" lIns="45720" rIns="45720" tIns="18288" bIns="18288" anchor="ctr">
+            <a:noAutofit/>
+          </a:bodyPr>
+          <a:lstStyle/>
+          <a:p>
+            <a:pPr algn="l"/>
+            <a:r>
+              <a:rPr sz="2280" b="0" i="0">
+                <a:solidFill>
+                  <a:srgbClr val="1A1A1A"/>
+                </a:solidFill>
+                <a:latin typeface="Lexend"/>
+              </a:rPr>
+              <a:t> and </a:t>
+            </a:r>
+          </a:p>
+        </p:txBody>
+      </p:sp>
       <p:pic>
         <p:nvPicPr>
-          <p:cNvPr id="11" name="Picture 10" descr="f589dab710055d0e.png"/>
+          <p:cNvPr id="10" name="Picture 9" descr="5cfd257165b20456.png"/>
           <p:cNvPicPr>
             <a:picLocks noChangeAspect="1"/>
           </p:cNvPicPr>
@@ -9704,7 +10592,160 @@
         </p:blipFill>
         <p:spPr>
           <a:xfrm>
-            <a:off x="5038343" y="3690332"/>
+            <a:off x="3541418" y="1975103"/>
+            <a:ext cx="1481328" cy="225552"/>
+          </a:xfrm>
+          <a:prstGeom prst="rect">
+            <a:avLst/>
+          </a:prstGeom>
+        </p:spPr>
+      </p:pic>
+      <p:sp>
+        <p:nvSpPr>
+          <p:cNvPr id="11" name="TextBox 10"/>
+          <p:cNvSpPr txBox="1"/>
+          <p:nvPr/>
+        </p:nvSpPr>
+        <p:spPr>
+          <a:xfrm>
+            <a:off x="5022746" y="1851660"/>
+            <a:ext cx="280301" cy="457200"/>
+          </a:xfrm>
+          <a:prstGeom prst="rect">
+            <a:avLst/>
+          </a:prstGeom>
+          <a:noFill/>
+        </p:spPr>
+        <p:txBody>
+          <a:bodyPr wrap="none" lIns="45720" rIns="45720" tIns="18288" bIns="18288" anchor="ctr">
+            <a:noAutofit/>
+          </a:bodyPr>
+          <a:lstStyle/>
+          <a:p>
+            <a:pPr algn="l"/>
+            <a:r>
+              <a:rPr sz="2280" b="0" i="0">
+                <a:solidFill>
+                  <a:srgbClr val="1A1A1A"/>
+                </a:solidFill>
+                <a:latin typeface="Lexend"/>
+              </a:rPr>
+              <a:t>.</a:t>
+            </a:r>
+          </a:p>
+        </p:txBody>
+      </p:sp>
+      <p:sp>
+        <p:nvSpPr>
+          <p:cNvPr id="12" name="TextBox 11"/>
+          <p:cNvSpPr txBox="1"/>
+          <p:nvPr/>
+        </p:nvSpPr>
+        <p:spPr>
+          <a:xfrm>
+            <a:off x="1234440" y="2487168"/>
+            <a:ext cx="10058400" cy="429370"/>
+          </a:xfrm>
+          <a:prstGeom prst="rect">
+            <a:avLst/>
+          </a:prstGeom>
+          <a:noFill/>
+        </p:spPr>
+        <p:txBody>
+          <a:bodyPr wrap="square" lIns="45720" rIns="45720" tIns="18288" bIns="18288" anchor="t">
+            <a:spAutoFit/>
+          </a:bodyPr>
+          <a:lstStyle/>
+          <a:p>
+            <a:pPr algn="l"/>
+            <a:r>
+              <a:rPr sz="2280" b="0" i="0">
+                <a:solidFill>
+                  <a:srgbClr val="1A1A1A"/>
+                </a:solidFill>
+                <a:latin typeface="Lexend"/>
+              </a:rPr>
+              <a:t>A bottle holds 16 fl oz.</a:t>
+            </a:r>
+          </a:p>
+        </p:txBody>
+      </p:sp>
+      <p:sp>
+        <p:nvSpPr>
+          <p:cNvPr id="13" name="TextBox 12"/>
+          <p:cNvSpPr txBox="1"/>
+          <p:nvPr/>
+        </p:nvSpPr>
+        <p:spPr>
+          <a:xfrm>
+            <a:off x="1234440" y="3026266"/>
+            <a:ext cx="10058400" cy="429370"/>
+          </a:xfrm>
+          <a:prstGeom prst="rect">
+            <a:avLst/>
+          </a:prstGeom>
+          <a:noFill/>
+        </p:spPr>
+        <p:txBody>
+          <a:bodyPr wrap="square" lIns="45720" rIns="45720" tIns="18288" bIns="18288" anchor="t">
+            <a:spAutoFit/>
+          </a:bodyPr>
+          <a:lstStyle/>
+          <a:p>
+            <a:pPr algn="l"/>
+            <a:r>
+              <a:rPr sz="2280" b="1" i="0">
+                <a:solidFill>
+                  <a:srgbClr val="1A1A1A"/>
+                </a:solidFill>
+                <a:latin typeface="Lexend"/>
+              </a:rPr>
+              <a:t>How many liters is that?</a:t>
+            </a:r>
+          </a:p>
+        </p:txBody>
+      </p:sp>
+      <p:pic>
+        <p:nvPicPr>
+          <p:cNvPr id="14" name="Picture 13" descr="83c4edb2bd6b7774.png"/>
+          <p:cNvPicPr>
+            <a:picLocks noChangeAspect="1"/>
+          </p:cNvPicPr>
+          <p:nvPr/>
+        </p:nvPicPr>
+        <p:blipFill>
+          <a:blip r:embed="rId4"/>
+          <a:stretch>
+            <a:fillRect/>
+          </a:stretch>
+        </p:blipFill>
+        <p:spPr>
+          <a:xfrm>
+            <a:off x="5038343" y="3778153"/>
+            <a:ext cx="1676400" cy="256032"/>
+          </a:xfrm>
+          <a:prstGeom prst="rect">
+            <a:avLst/>
+          </a:prstGeom>
+        </p:spPr>
+      </p:pic>
+      <p:pic>
+        <p:nvPicPr>
+          <p:cNvPr id="15" name="Picture 14" descr="f589dab710055d0e.png"/>
+          <p:cNvPicPr>
+            <a:picLocks noChangeAspect="1"/>
+          </p:cNvPicPr>
+          <p:nvPr/>
+        </p:nvPicPr>
+        <p:blipFill>
+          <a:blip r:embed="rId5"/>
+          <a:stretch>
+            <a:fillRect/>
+          </a:stretch>
+        </p:blipFill>
+        <p:spPr>
+          <a:xfrm>
+            <a:off x="5038343" y="4320697"/>
             <a:ext cx="2194560" cy="252984"/>
           </a:xfrm>
           <a:prstGeom prst="rect">
@@ -9714,13 +10755,13 @@
       </p:pic>
       <p:sp>
         <p:nvSpPr>
-          <p:cNvPr id="12" name="TextBox 11"/>
-          <p:cNvSpPr txBox="1"/>
-          <p:nvPr/>
-        </p:nvSpPr>
-        <p:spPr>
-          <a:xfrm>
-            <a:off x="777240" y="4663440"/>
+          <p:cNvPr id="16" name="TextBox 15"/>
+          <p:cNvSpPr txBox="1"/>
+          <p:nvPr/>
+        </p:nvSpPr>
+        <p:spPr>
+          <a:xfrm>
+            <a:off x="777240" y="4772372"/>
             <a:ext cx="10607040" cy="548640"/>
           </a:xfrm>
           <a:prstGeom prst="rect">
@@ -9975,132 +11016,9 @@
           </a:p>
         </p:txBody>
       </p:sp>
-      <p:sp>
-        <p:nvSpPr>
-          <p:cNvPr id="8" name="TextBox 7"/>
-          <p:cNvSpPr txBox="1"/>
-          <p:nvPr/>
-        </p:nvSpPr>
-        <p:spPr>
-          <a:xfrm>
-            <a:off x="1234440" y="1874519"/>
-            <a:ext cx="10058400" cy="429370"/>
-          </a:xfrm>
-          <a:prstGeom prst="rect">
-            <a:avLst/>
-          </a:prstGeom>
-          <a:noFill/>
-        </p:spPr>
-        <p:txBody>
-          <a:bodyPr wrap="square" lIns="45720" rIns="45720" tIns="18288" bIns="18288" anchor="t">
-            <a:spAutoFit/>
-          </a:bodyPr>
-          <a:lstStyle/>
-          <a:p>
-            <a:pPr algn="l"/>
-            <a:r>
-              <a:rPr sz="2280" b="0" i="0">
-                <a:solidFill>
-                  <a:srgbClr val="1A1A1A"/>
-                </a:solidFill>
-                <a:latin typeface="Lexend"/>
-              </a:rPr>
-              <a:t>1 m = 100 cm.</a:t>
-            </a:r>
-          </a:p>
-        </p:txBody>
-      </p:sp>
-      <p:sp>
-        <p:nvSpPr>
-          <p:cNvPr id="9" name="TextBox 8"/>
-          <p:cNvSpPr txBox="1"/>
-          <p:nvPr/>
-        </p:nvSpPr>
-        <p:spPr>
-          <a:xfrm>
-            <a:off x="1234440" y="2413618"/>
-            <a:ext cx="10058400" cy="429370"/>
-          </a:xfrm>
-          <a:prstGeom prst="rect">
-            <a:avLst/>
-          </a:prstGeom>
-          <a:noFill/>
-        </p:spPr>
-        <p:txBody>
-          <a:bodyPr wrap="square" lIns="45720" rIns="45720" tIns="18288" bIns="18288" anchor="t">
-            <a:spAutoFit/>
-          </a:bodyPr>
-          <a:lstStyle/>
-          <a:p>
-            <a:pPr algn="l"/>
-            <a:r>
-              <a:rPr sz="2280" b="1" i="0">
-                <a:solidFill>
-                  <a:srgbClr val="1A1A1A"/>
-                </a:solidFill>
-                <a:latin typeface="Lexend"/>
-              </a:rPr>
-              <a:t>How many square centimeters is 1 m</a:t>
-            </a:r>
-            <a:r>
-              <a:rPr sz="2280" b="1" i="0" baseline="30000">
-                <a:solidFill>
-                  <a:srgbClr val="1A1A1A"/>
-                </a:solidFill>
-                <a:latin typeface="Lexend"/>
-              </a:rPr>
-              <a:t>2</a:t>
-            </a:r>
-            <a:r>
-              <a:rPr sz="2280" b="1" i="0">
-                <a:solidFill>
-                  <a:srgbClr val="1A1A1A"/>
-                </a:solidFill>
-                <a:latin typeface="Lexend"/>
-              </a:rPr>
-              <a:t>?</a:t>
-            </a:r>
-          </a:p>
-        </p:txBody>
-      </p:sp>
-      <p:sp>
-        <p:nvSpPr>
-          <p:cNvPr id="10" name="TextBox 9"/>
-          <p:cNvSpPr txBox="1"/>
-          <p:nvPr/>
-        </p:nvSpPr>
-        <p:spPr>
-          <a:xfrm>
-            <a:off x="1691640" y="3144740"/>
-            <a:ext cx="594360" cy="457200"/>
-          </a:xfrm>
-          <a:prstGeom prst="rect">
-            <a:avLst/>
-          </a:prstGeom>
-          <a:noFill/>
-        </p:spPr>
-        <p:txBody>
-          <a:bodyPr wrap="square" lIns="45720" rIns="45720" tIns="18288" bIns="18288" anchor="t">
-            <a:spAutoFit/>
-          </a:bodyPr>
-          <a:lstStyle/>
-          <a:p>
-            <a:pPr algn="l"/>
-            <a:r>
-              <a:rPr sz="2280" b="1" i="0">
-                <a:solidFill>
-                  <a:srgbClr val="1A1A1A"/>
-                </a:solidFill>
-                <a:latin typeface="Lexend"/>
-              </a:rPr>
-              <a:t>A.</a:t>
-            </a:r>
-          </a:p>
-        </p:txBody>
-      </p:sp>
       <p:pic>
         <p:nvPicPr>
-          <p:cNvPr id="11" name="Picture 10" descr="14ef69fc1ef0ed0c.png"/>
+          <p:cNvPr id="8" name="Picture 7" descr="fb110fe836d86e95.png"/>
           <p:cNvPicPr>
             <a:picLocks noChangeAspect="1"/>
           </p:cNvPicPr>
@@ -10114,8 +11032,8 @@
         </p:blipFill>
         <p:spPr>
           <a:xfrm>
-            <a:off x="2258568" y="3123404"/>
-            <a:ext cx="947928" cy="344424"/>
+            <a:off x="1234440" y="1975103"/>
+            <a:ext cx="1783080" cy="225552"/>
           </a:xfrm>
           <a:prstGeom prst="rect">
             <a:avLst/>
@@ -10124,23 +11042,58 @@
       </p:pic>
       <p:sp>
         <p:nvSpPr>
-          <p:cNvPr id="12" name="TextBox 11"/>
-          <p:cNvSpPr txBox="1"/>
-          <p:nvPr/>
-        </p:nvSpPr>
-        <p:spPr>
-          <a:xfrm>
-            <a:off x="6537959" y="3144740"/>
-            <a:ext cx="594360" cy="457200"/>
-          </a:xfrm>
-          <a:prstGeom prst="rect">
-            <a:avLst/>
-          </a:prstGeom>
-          <a:noFill/>
-        </p:spPr>
-        <p:txBody>
-          <a:bodyPr wrap="square" lIns="45720" rIns="45720" tIns="18288" bIns="18288" anchor="t">
-            <a:spAutoFit/>
+          <p:cNvPr id="9" name="TextBox 8"/>
+          <p:cNvSpPr txBox="1"/>
+          <p:nvPr/>
+        </p:nvSpPr>
+        <p:spPr>
+          <a:xfrm>
+            <a:off x="3017520" y="1851660"/>
+            <a:ext cx="280301" cy="457200"/>
+          </a:xfrm>
+          <a:prstGeom prst="rect">
+            <a:avLst/>
+          </a:prstGeom>
+          <a:noFill/>
+        </p:spPr>
+        <p:txBody>
+          <a:bodyPr wrap="none" lIns="45720" rIns="45720" tIns="18288" bIns="18288" anchor="ctr">
+            <a:noAutofit/>
+          </a:bodyPr>
+          <a:lstStyle/>
+          <a:p>
+            <a:pPr algn="l"/>
+            <a:r>
+              <a:rPr sz="2280" b="0" i="0">
+                <a:solidFill>
+                  <a:srgbClr val="1A1A1A"/>
+                </a:solidFill>
+                <a:latin typeface="Lexend"/>
+              </a:rPr>
+              <a:t>.</a:t>
+            </a:r>
+          </a:p>
+        </p:txBody>
+      </p:sp>
+      <p:sp>
+        <p:nvSpPr>
+          <p:cNvPr id="10" name="TextBox 9"/>
+          <p:cNvSpPr txBox="1"/>
+          <p:nvPr/>
+        </p:nvSpPr>
+        <p:spPr>
+          <a:xfrm>
+            <a:off x="1234440" y="2464308"/>
+            <a:ext cx="5413246" cy="457200"/>
+          </a:xfrm>
+          <a:prstGeom prst="rect">
+            <a:avLst/>
+          </a:prstGeom>
+          <a:noFill/>
+        </p:spPr>
+        <p:txBody>
+          <a:bodyPr wrap="none" lIns="45720" rIns="45720" tIns="18288" bIns="18288" anchor="ctr">
+            <a:noAutofit/>
           </a:bodyPr>
           <a:lstStyle/>
           <a:p>
@@ -10152,14 +11105,14 @@
                 </a:solidFill>
                 <a:latin typeface="Lexend"/>
               </a:rPr>
-              <a:t>B.</a:t>
+              <a:t>How many square centimeters is </a:t>
             </a:r>
           </a:p>
         </p:txBody>
       </p:sp>
       <p:pic>
         <p:nvPicPr>
-          <p:cNvPr id="13" name="Picture 12" descr="6c5a704f658703bd.png"/>
+          <p:cNvPr id="11" name="Picture 10" descr="54aa35aeb0a18864.png"/>
           <p:cNvPicPr>
             <a:picLocks noChangeAspect="1"/>
           </p:cNvPicPr>
@@ -10173,8 +11126,8 @@
         </p:blipFill>
         <p:spPr>
           <a:xfrm>
-            <a:off x="7104888" y="3156932"/>
-            <a:ext cx="646176" cy="277368"/>
+            <a:off x="6510526" y="2532888"/>
+            <a:ext cx="585216" cy="274320"/>
           </a:xfrm>
           <a:prstGeom prst="rect">
             <a:avLst/>
@@ -10183,13 +11136,48 @@
       </p:pic>
       <p:sp>
         <p:nvSpPr>
-          <p:cNvPr id="14" name="TextBox 13"/>
-          <p:cNvSpPr txBox="1"/>
-          <p:nvPr/>
-        </p:nvSpPr>
-        <p:spPr>
-          <a:xfrm>
-            <a:off x="1691640" y="3757388"/>
+          <p:cNvPr id="12" name="TextBox 11"/>
+          <p:cNvSpPr txBox="1"/>
+          <p:nvPr/>
+        </p:nvSpPr>
+        <p:spPr>
+          <a:xfrm>
+            <a:off x="7095742" y="2464308"/>
+            <a:ext cx="374819" cy="457200"/>
+          </a:xfrm>
+          <a:prstGeom prst="rect">
+            <a:avLst/>
+          </a:prstGeom>
+          <a:noFill/>
+        </p:spPr>
+        <p:txBody>
+          <a:bodyPr wrap="none" lIns="45720" rIns="45720" tIns="18288" bIns="18288" anchor="ctr">
+            <a:noAutofit/>
+          </a:bodyPr>
+          <a:lstStyle/>
+          <a:p>
+            <a:pPr algn="l"/>
+            <a:r>
+              <a:rPr sz="2280" b="1" i="0">
+                <a:solidFill>
+                  <a:srgbClr val="1A1A1A"/>
+                </a:solidFill>
+                <a:latin typeface="Lexend"/>
+              </a:rPr>
+              <a:t>?</a:t>
+            </a:r>
+          </a:p>
+        </p:txBody>
+      </p:sp>
+      <p:sp>
+        <p:nvSpPr>
+          <p:cNvPr id="13" name="TextBox 12"/>
+          <p:cNvSpPr txBox="1"/>
+          <p:nvPr/>
+        </p:nvSpPr>
+        <p:spPr>
+          <a:xfrm>
+            <a:off x="1691640" y="3291840"/>
             <a:ext cx="594360" cy="457200"/>
           </a:xfrm>
           <a:prstGeom prst="rect">
@@ -10211,14 +11199,14 @@
                 </a:solidFill>
                 <a:latin typeface="Lexend"/>
               </a:rPr>
-              <a:t>C.</a:t>
+              <a:t>A.</a:t>
             </a:r>
           </a:p>
         </p:txBody>
       </p:sp>
       <p:pic>
         <p:nvPicPr>
-          <p:cNvPr id="15" name="Picture 14" descr="e79298326e3b3d50.png"/>
+          <p:cNvPr id="14" name="Picture 13" descr="14ef69fc1ef0ed0c.png"/>
           <p:cNvPicPr>
             <a:picLocks noChangeAspect="1"/>
           </p:cNvPicPr>
@@ -10232,8 +11220,8 @@
         </p:blipFill>
         <p:spPr>
           <a:xfrm>
-            <a:off x="2258568" y="3736052"/>
-            <a:ext cx="1182624" cy="344424"/>
+            <a:off x="2258568" y="3282696"/>
+            <a:ext cx="947928" cy="344424"/>
           </a:xfrm>
           <a:prstGeom prst="rect">
             <a:avLst/>
@@ -10242,13 +11230,13 @@
       </p:pic>
       <p:sp>
         <p:nvSpPr>
-          <p:cNvPr id="16" name="TextBox 15"/>
-          <p:cNvSpPr txBox="1"/>
-          <p:nvPr/>
-        </p:nvSpPr>
-        <p:spPr>
-          <a:xfrm>
-            <a:off x="6537959" y="3757388"/>
+          <p:cNvPr id="15" name="TextBox 14"/>
+          <p:cNvSpPr txBox="1"/>
+          <p:nvPr/>
+        </p:nvSpPr>
+        <p:spPr>
+          <a:xfrm>
+            <a:off x="6537959" y="3291840"/>
             <a:ext cx="594360" cy="457200"/>
           </a:xfrm>
           <a:prstGeom prst="rect">
@@ -10270,14 +11258,14 @@
                 </a:solidFill>
                 <a:latin typeface="Lexend"/>
               </a:rPr>
-              <a:t>D.</a:t>
+              <a:t>B.</a:t>
             </a:r>
           </a:p>
         </p:txBody>
       </p:sp>
       <p:pic>
         <p:nvPicPr>
-          <p:cNvPr id="17" name="Picture 16" descr="b951781f60105738.png"/>
+          <p:cNvPr id="16" name="Picture 15" descr="6c5a704f658703bd.png"/>
           <p:cNvPicPr>
             <a:picLocks noChangeAspect="1"/>
           </p:cNvPicPr>
@@ -10291,7 +11279,125 @@
         </p:blipFill>
         <p:spPr>
           <a:xfrm>
-            <a:off x="7104888" y="3769580"/>
+            <a:off x="7104888" y="3285744"/>
+            <a:ext cx="646176" cy="277368"/>
+          </a:xfrm>
+          <a:prstGeom prst="rect">
+            <a:avLst/>
+          </a:prstGeom>
+        </p:spPr>
+      </p:pic>
+      <p:sp>
+        <p:nvSpPr>
+          <p:cNvPr id="17" name="TextBox 16"/>
+          <p:cNvSpPr txBox="1"/>
+          <p:nvPr/>
+        </p:nvSpPr>
+        <p:spPr>
+          <a:xfrm>
+            <a:off x="1691640" y="3904488"/>
+            <a:ext cx="594360" cy="457200"/>
+          </a:xfrm>
+          <a:prstGeom prst="rect">
+            <a:avLst/>
+          </a:prstGeom>
+          <a:noFill/>
+        </p:spPr>
+        <p:txBody>
+          <a:bodyPr wrap="square" lIns="45720" rIns="45720" tIns="18288" bIns="18288" anchor="t">
+            <a:spAutoFit/>
+          </a:bodyPr>
+          <a:lstStyle/>
+          <a:p>
+            <a:pPr algn="l"/>
+            <a:r>
+              <a:rPr sz="2280" b="1" i="0">
+                <a:solidFill>
+                  <a:srgbClr val="1A1A1A"/>
+                </a:solidFill>
+                <a:latin typeface="Lexend"/>
+              </a:rPr>
+              <a:t>C.</a:t>
+            </a:r>
+          </a:p>
+        </p:txBody>
+      </p:sp>
+      <p:pic>
+        <p:nvPicPr>
+          <p:cNvPr id="18" name="Picture 17" descr="e79298326e3b3d50.png"/>
+          <p:cNvPicPr>
+            <a:picLocks noChangeAspect="1"/>
+          </p:cNvPicPr>
+          <p:nvPr/>
+        </p:nvPicPr>
+        <p:blipFill>
+          <a:blip r:embed="rId6"/>
+          <a:stretch>
+            <a:fillRect/>
+          </a:stretch>
+        </p:blipFill>
+        <p:spPr>
+          <a:xfrm>
+            <a:off x="2258568" y="3895344"/>
+            <a:ext cx="1182624" cy="344424"/>
+          </a:xfrm>
+          <a:prstGeom prst="rect">
+            <a:avLst/>
+          </a:prstGeom>
+        </p:spPr>
+      </p:pic>
+      <p:sp>
+        <p:nvSpPr>
+          <p:cNvPr id="19" name="TextBox 18"/>
+          <p:cNvSpPr txBox="1"/>
+          <p:nvPr/>
+        </p:nvSpPr>
+        <p:spPr>
+          <a:xfrm>
+            <a:off x="6537959" y="3904488"/>
+            <a:ext cx="594360" cy="457200"/>
+          </a:xfrm>
+          <a:prstGeom prst="rect">
+            <a:avLst/>
+          </a:prstGeom>
+          <a:noFill/>
+        </p:spPr>
+        <p:txBody>
+          <a:bodyPr wrap="square" lIns="45720" rIns="45720" tIns="18288" bIns="18288" anchor="t">
+            <a:spAutoFit/>
+          </a:bodyPr>
+          <a:lstStyle/>
+          <a:p>
+            <a:pPr algn="l"/>
+            <a:r>
+              <a:rPr sz="2280" b="1" i="0">
+                <a:solidFill>
+                  <a:srgbClr val="1A1A1A"/>
+                </a:solidFill>
+                <a:latin typeface="Lexend"/>
+              </a:rPr>
+              <a:t>D.</a:t>
+            </a:r>
+          </a:p>
+        </p:txBody>
+      </p:sp>
+      <p:pic>
+        <p:nvPicPr>
+          <p:cNvPr id="20" name="Picture 19" descr="b951781f60105738.png"/>
+          <p:cNvPicPr>
+            <a:picLocks noChangeAspect="1"/>
+          </p:cNvPicPr>
+          <p:nvPr/>
+        </p:nvPicPr>
+        <p:blipFill>
+          <a:blip r:embed="rId7"/>
+          <a:stretch>
+            <a:fillRect/>
+          </a:stretch>
+        </p:blipFill>
+        <p:spPr>
+          <a:xfrm>
+            <a:off x="7104888" y="3898392"/>
             <a:ext cx="612648" cy="277368"/>
           </a:xfrm>
           <a:prstGeom prst="rect">
@@ -10301,13 +11407,13 @@
       </p:pic>
       <p:sp>
         <p:nvSpPr>
-          <p:cNvPr id="18" name="TextBox 17"/>
-          <p:cNvSpPr txBox="1"/>
-          <p:nvPr/>
-        </p:nvSpPr>
-        <p:spPr>
-          <a:xfrm>
-            <a:off x="777240" y="4434044"/>
+          <p:cNvPr id="21" name="TextBox 20"/>
+          <p:cNvSpPr txBox="1"/>
+          <p:nvPr/>
+        </p:nvSpPr>
+        <p:spPr>
+          <a:xfrm>
+            <a:off x="777240" y="4581144"/>
             <a:ext cx="10607040" cy="457200"/>
           </a:xfrm>
           <a:prstGeom prst="rect">
@@ -10562,97 +11668,9 @@
           </a:p>
         </p:txBody>
       </p:sp>
-      <p:sp>
-        <p:nvSpPr>
-          <p:cNvPr id="8" name="TextBox 7"/>
-          <p:cNvSpPr txBox="1"/>
-          <p:nvPr/>
-        </p:nvSpPr>
-        <p:spPr>
-          <a:xfrm>
-            <a:off x="1234440" y="1874519"/>
-            <a:ext cx="10058400" cy="429370"/>
-          </a:xfrm>
-          <a:prstGeom prst="rect">
-            <a:avLst/>
-          </a:prstGeom>
-          <a:noFill/>
-        </p:spPr>
-        <p:txBody>
-          <a:bodyPr wrap="square" lIns="45720" rIns="45720" tIns="18288" bIns="18288" anchor="t">
-            <a:spAutoFit/>
-          </a:bodyPr>
-          <a:lstStyle/>
-          <a:p>
-            <a:pPr algn="l"/>
-            <a:r>
-              <a:rPr sz="2280" b="0" i="0">
-                <a:solidFill>
-                  <a:srgbClr val="1A1A1A"/>
-                </a:solidFill>
-                <a:latin typeface="Lexend"/>
-              </a:rPr>
-              <a:t>1 m = 100 cm.</a:t>
-            </a:r>
-          </a:p>
-        </p:txBody>
-      </p:sp>
-      <p:sp>
-        <p:nvSpPr>
-          <p:cNvPr id="9" name="TextBox 8"/>
-          <p:cNvSpPr txBox="1"/>
-          <p:nvPr/>
-        </p:nvSpPr>
-        <p:spPr>
-          <a:xfrm>
-            <a:off x="1234440" y="2413618"/>
-            <a:ext cx="10058400" cy="429370"/>
-          </a:xfrm>
-          <a:prstGeom prst="rect">
-            <a:avLst/>
-          </a:prstGeom>
-          <a:noFill/>
-        </p:spPr>
-        <p:txBody>
-          <a:bodyPr wrap="square" lIns="45720" rIns="45720" tIns="18288" bIns="18288" anchor="t">
-            <a:spAutoFit/>
-          </a:bodyPr>
-          <a:lstStyle/>
-          <a:p>
-            <a:pPr algn="l"/>
-            <a:r>
-              <a:rPr sz="2280" b="1" i="0">
-                <a:solidFill>
-                  <a:srgbClr val="1A1A1A"/>
-                </a:solidFill>
-                <a:latin typeface="Lexend"/>
-              </a:rPr>
-              <a:t>How many square centimeters is 1 m</a:t>
-            </a:r>
-            <a:r>
-              <a:rPr sz="2280" b="1" i="0" baseline="30000">
-                <a:solidFill>
-                  <a:srgbClr val="1A1A1A"/>
-                </a:solidFill>
-                <a:latin typeface="Lexend"/>
-              </a:rPr>
-              <a:t>2</a:t>
-            </a:r>
-            <a:r>
-              <a:rPr sz="2280" b="1" i="0">
-                <a:solidFill>
-                  <a:srgbClr val="1A1A1A"/>
-                </a:solidFill>
-                <a:latin typeface="Lexend"/>
-              </a:rPr>
-              <a:t>?</a:t>
-            </a:r>
-          </a:p>
-        </p:txBody>
-      </p:sp>
       <p:pic>
         <p:nvPicPr>
-          <p:cNvPr id="10" name="Picture 9" descr="90afc68956724874.png"/>
+          <p:cNvPr id="8" name="Picture 7" descr="b9580ee1a813cbc9.png"/>
           <p:cNvPicPr>
             <a:picLocks noChangeAspect="1"/>
           </p:cNvPicPr>
@@ -10666,7 +11684,160 @@
         </p:blipFill>
         <p:spPr>
           <a:xfrm>
-            <a:off x="4686299" y="3120356"/>
+            <a:off x="1234440" y="1975103"/>
+            <a:ext cx="1783080" cy="225552"/>
+          </a:xfrm>
+          <a:prstGeom prst="rect">
+            <a:avLst/>
+          </a:prstGeom>
+        </p:spPr>
+      </p:pic>
+      <p:sp>
+        <p:nvSpPr>
+          <p:cNvPr id="9" name="TextBox 8"/>
+          <p:cNvSpPr txBox="1"/>
+          <p:nvPr/>
+        </p:nvSpPr>
+        <p:spPr>
+          <a:xfrm>
+            <a:off x="3017520" y="1851660"/>
+            <a:ext cx="280301" cy="457200"/>
+          </a:xfrm>
+          <a:prstGeom prst="rect">
+            <a:avLst/>
+          </a:prstGeom>
+          <a:noFill/>
+        </p:spPr>
+        <p:txBody>
+          <a:bodyPr wrap="none" lIns="45720" rIns="45720" tIns="18288" bIns="18288" anchor="ctr">
+            <a:noAutofit/>
+          </a:bodyPr>
+          <a:lstStyle/>
+          <a:p>
+            <a:pPr algn="l"/>
+            <a:r>
+              <a:rPr sz="2280" b="0" i="0">
+                <a:solidFill>
+                  <a:srgbClr val="1A1A1A"/>
+                </a:solidFill>
+                <a:latin typeface="Lexend"/>
+              </a:rPr>
+              <a:t>.</a:t>
+            </a:r>
+          </a:p>
+        </p:txBody>
+      </p:sp>
+      <p:sp>
+        <p:nvSpPr>
+          <p:cNvPr id="10" name="TextBox 9"/>
+          <p:cNvSpPr txBox="1"/>
+          <p:nvPr/>
+        </p:nvSpPr>
+        <p:spPr>
+          <a:xfrm>
+            <a:off x="1234440" y="2464308"/>
+            <a:ext cx="5413246" cy="457200"/>
+          </a:xfrm>
+          <a:prstGeom prst="rect">
+            <a:avLst/>
+          </a:prstGeom>
+          <a:noFill/>
+        </p:spPr>
+        <p:txBody>
+          <a:bodyPr wrap="none" lIns="45720" rIns="45720" tIns="18288" bIns="18288" anchor="ctr">
+            <a:noAutofit/>
+          </a:bodyPr>
+          <a:lstStyle/>
+          <a:p>
+            <a:pPr algn="l"/>
+            <a:r>
+              <a:rPr sz="2280" b="1" i="0">
+                <a:solidFill>
+                  <a:srgbClr val="1A1A1A"/>
+                </a:solidFill>
+                <a:latin typeface="Lexend"/>
+              </a:rPr>
+              <a:t>How many square centimeters is </a:t>
+            </a:r>
+          </a:p>
+        </p:txBody>
+      </p:sp>
+      <p:pic>
+        <p:nvPicPr>
+          <p:cNvPr id="11" name="Picture 10" descr="e6f525412f578c85.png"/>
+          <p:cNvPicPr>
+            <a:picLocks noChangeAspect="1"/>
+          </p:cNvPicPr>
+          <p:nvPr/>
+        </p:nvPicPr>
+        <p:blipFill>
+          <a:blip r:embed="rId3"/>
+          <a:stretch>
+            <a:fillRect/>
+          </a:stretch>
+        </p:blipFill>
+        <p:spPr>
+          <a:xfrm>
+            <a:off x="6510526" y="2532888"/>
+            <a:ext cx="588264" cy="274320"/>
+          </a:xfrm>
+          <a:prstGeom prst="rect">
+            <a:avLst/>
+          </a:prstGeom>
+        </p:spPr>
+      </p:pic>
+      <p:sp>
+        <p:nvSpPr>
+          <p:cNvPr id="12" name="TextBox 11"/>
+          <p:cNvSpPr txBox="1"/>
+          <p:nvPr/>
+        </p:nvSpPr>
+        <p:spPr>
+          <a:xfrm>
+            <a:off x="7098790" y="2464308"/>
+            <a:ext cx="374819" cy="457200"/>
+          </a:xfrm>
+          <a:prstGeom prst="rect">
+            <a:avLst/>
+          </a:prstGeom>
+          <a:noFill/>
+        </p:spPr>
+        <p:txBody>
+          <a:bodyPr wrap="none" lIns="45720" rIns="45720" tIns="18288" bIns="18288" anchor="ctr">
+            <a:noAutofit/>
+          </a:bodyPr>
+          <a:lstStyle/>
+          <a:p>
+            <a:pPr algn="l"/>
+            <a:r>
+              <a:rPr sz="2280" b="1" i="0">
+                <a:solidFill>
+                  <a:srgbClr val="1A1A1A"/>
+                </a:solidFill>
+                <a:latin typeface="Lexend"/>
+              </a:rPr>
+              <a:t>?</a:t>
+            </a:r>
+          </a:p>
+        </p:txBody>
+      </p:sp>
+      <p:pic>
+        <p:nvPicPr>
+          <p:cNvPr id="13" name="Picture 12" descr="90afc68956724874.png"/>
+          <p:cNvPicPr>
+            <a:picLocks noChangeAspect="1"/>
+          </p:cNvPicPr>
+          <p:nvPr/>
+        </p:nvPicPr>
+        <p:blipFill>
+          <a:blip r:embed="rId4"/>
+          <a:stretch>
+            <a:fillRect/>
+          </a:stretch>
+        </p:blipFill>
+        <p:spPr>
+          <a:xfrm>
+            <a:off x="4686299" y="3312604"/>
             <a:ext cx="2898648" cy="313944"/>
           </a:xfrm>
           <a:prstGeom prst="rect">
@@ -10676,7 +11847,7 @@
       </p:pic>
       <p:sp>
         <p:nvSpPr>
-          <p:cNvPr id="11" name="TextBox 10"/>
+          <p:cNvPr id="14" name="TextBox 13"/>
           <p:cNvSpPr txBox="1"/>
           <p:nvPr/>
         </p:nvSpPr>
@@ -10946,15 +12117,74 @@
           </a:p>
         </p:txBody>
       </p:sp>
-      <p:sp>
-        <p:nvSpPr>
-          <p:cNvPr id="8" name="TextBox 7"/>
-          <p:cNvSpPr txBox="1"/>
-          <p:nvPr/>
-        </p:nvSpPr>
-        <p:spPr>
-          <a:xfrm>
-            <a:off x="1234440" y="1874519"/>
+      <p:pic>
+        <p:nvPicPr>
+          <p:cNvPr id="8" name="Picture 7" descr="d7de33d50f52caf2.png"/>
+          <p:cNvPicPr>
+            <a:picLocks noChangeAspect="1"/>
+          </p:cNvPicPr>
+          <p:nvPr/>
+        </p:nvPicPr>
+        <p:blipFill>
+          <a:blip r:embed="rId2"/>
+          <a:stretch>
+            <a:fillRect/>
+          </a:stretch>
+        </p:blipFill>
+        <p:spPr>
+          <a:xfrm>
+            <a:off x="1234440" y="1962911"/>
+            <a:ext cx="1965960" cy="304800"/>
+          </a:xfrm>
+          <a:prstGeom prst="rect">
+            <a:avLst/>
+          </a:prstGeom>
+        </p:spPr>
+      </p:pic>
+      <p:sp>
+        <p:nvSpPr>
+          <p:cNvPr id="9" name="TextBox 8"/>
+          <p:cNvSpPr txBox="1"/>
+          <p:nvPr/>
+        </p:nvSpPr>
+        <p:spPr>
+          <a:xfrm>
+            <a:off x="3200400" y="1851660"/>
+            <a:ext cx="280301" cy="457200"/>
+          </a:xfrm>
+          <a:prstGeom prst="rect">
+            <a:avLst/>
+          </a:prstGeom>
+          <a:noFill/>
+        </p:spPr>
+        <p:txBody>
+          <a:bodyPr wrap="none" lIns="45720" rIns="45720" tIns="18288" bIns="18288" anchor="ctr">
+            <a:noAutofit/>
+          </a:bodyPr>
+          <a:lstStyle/>
+          <a:p>
+            <a:pPr algn="l"/>
+            <a:r>
+              <a:rPr sz="2280" b="0" i="0">
+                <a:solidFill>
+                  <a:srgbClr val="1A1A1A"/>
+                </a:solidFill>
+                <a:latin typeface="Lexend"/>
+              </a:rPr>
+              <a:t>.</a:t>
+            </a:r>
+          </a:p>
+        </p:txBody>
+      </p:sp>
+      <p:sp>
+        <p:nvSpPr>
+          <p:cNvPr id="10" name="TextBox 9"/>
+          <p:cNvSpPr txBox="1"/>
+          <p:nvPr/>
+        </p:nvSpPr>
+        <p:spPr>
+          <a:xfrm>
+            <a:off x="1234440" y="2487168"/>
             <a:ext cx="10058400" cy="429370"/>
           </a:xfrm>
           <a:prstGeom prst="rect">
@@ -10976,20 +12206,20 @@
                 </a:solidFill>
                 <a:latin typeface="Lexend"/>
               </a:rPr>
-              <a:t>1 kg = 2.204 lb. A 5-lb bag of flour and a 2.5-kg bag of sugar.</a:t>
-            </a:r>
-          </a:p>
-        </p:txBody>
-      </p:sp>
-      <p:sp>
-        <p:nvSpPr>
-          <p:cNvPr id="9" name="TextBox 8"/>
-          <p:cNvSpPr txBox="1"/>
-          <p:nvPr/>
-        </p:nvSpPr>
-        <p:spPr>
-          <a:xfrm>
-            <a:off x="1234440" y="2413618"/>
+              <a:t>A 5-lb bag of flour and a 2.5-kg bag of sugar.</a:t>
+            </a:r>
+          </a:p>
+        </p:txBody>
+      </p:sp>
+      <p:sp>
+        <p:nvSpPr>
+          <p:cNvPr id="11" name="TextBox 10"/>
+          <p:cNvSpPr txBox="1"/>
+          <p:nvPr/>
+        </p:nvSpPr>
+        <p:spPr>
+          <a:xfrm>
+            <a:off x="1234440" y="3026266"/>
             <a:ext cx="10058400" cy="429370"/>
           </a:xfrm>
           <a:prstGeom prst="rect">
@@ -11018,7 +12248,7 @@
       </p:sp>
       <p:sp>
         <p:nvSpPr>
-          <p:cNvPr id="10" name="TextBox 9"/>
+          <p:cNvPr id="12" name="TextBox 11"/>
           <p:cNvSpPr txBox="1"/>
           <p:nvPr/>
         </p:nvSpPr>
@@ -11279,79 +12509,9 @@
           </a:p>
         </p:txBody>
       </p:sp>
-      <p:sp>
-        <p:nvSpPr>
-          <p:cNvPr id="8" name="TextBox 7"/>
-          <p:cNvSpPr txBox="1"/>
-          <p:nvPr/>
-        </p:nvSpPr>
-        <p:spPr>
-          <a:xfrm>
-            <a:off x="1234440" y="1874519"/>
-            <a:ext cx="10058400" cy="429370"/>
-          </a:xfrm>
-          <a:prstGeom prst="rect">
-            <a:avLst/>
-          </a:prstGeom>
-          <a:noFill/>
-        </p:spPr>
-        <p:txBody>
-          <a:bodyPr wrap="square" lIns="45720" rIns="45720" tIns="18288" bIns="18288" anchor="t">
-            <a:spAutoFit/>
-          </a:bodyPr>
-          <a:lstStyle/>
-          <a:p>
-            <a:pPr algn="l"/>
-            <a:r>
-              <a:rPr sz="2280" b="0" i="0">
-                <a:solidFill>
-                  <a:srgbClr val="1A1A1A"/>
-                </a:solidFill>
-                <a:latin typeface="Lexend"/>
-              </a:rPr>
-              <a:t>1 kg = 2.204 lb. A 5-lb bag of flour and a 2.5-kg bag of sugar.</a:t>
-            </a:r>
-          </a:p>
-        </p:txBody>
-      </p:sp>
-      <p:sp>
-        <p:nvSpPr>
-          <p:cNvPr id="9" name="TextBox 8"/>
-          <p:cNvSpPr txBox="1"/>
-          <p:nvPr/>
-        </p:nvSpPr>
-        <p:spPr>
-          <a:xfrm>
-            <a:off x="1234440" y="2413618"/>
-            <a:ext cx="10058400" cy="429370"/>
-          </a:xfrm>
-          <a:prstGeom prst="rect">
-            <a:avLst/>
-          </a:prstGeom>
-          <a:noFill/>
-        </p:spPr>
-        <p:txBody>
-          <a:bodyPr wrap="square" lIns="45720" rIns="45720" tIns="18288" bIns="18288" anchor="t">
-            <a:spAutoFit/>
-          </a:bodyPr>
-          <a:lstStyle/>
-          <a:p>
-            <a:pPr algn="l"/>
-            <a:r>
-              <a:rPr sz="2280" b="1" i="0">
-                <a:solidFill>
-                  <a:srgbClr val="1A1A1A"/>
-                </a:solidFill>
-                <a:latin typeface="Lexend"/>
-              </a:rPr>
-              <a:t>Which is heavier, and by how much?</a:t>
-            </a:r>
-          </a:p>
-        </p:txBody>
-      </p:sp>
       <p:pic>
         <p:nvPicPr>
-          <p:cNvPr id="10" name="Picture 9" descr="1da7a0dd2289da73.png"/>
+          <p:cNvPr id="8" name="Picture 7" descr="e707e309a9336654.png"/>
           <p:cNvPicPr>
             <a:picLocks noChangeAspect="1"/>
           </p:cNvPicPr>
@@ -11365,17 +12525,122 @@
         </p:blipFill>
         <p:spPr>
           <a:xfrm>
-            <a:off x="4628387" y="3144740"/>
-            <a:ext cx="3014472" cy="265176"/>
+            <a:off x="1234440" y="1962911"/>
+            <a:ext cx="1965960" cy="304800"/>
           </a:xfrm>
           <a:prstGeom prst="rect">
             <a:avLst/>
           </a:prstGeom>
         </p:spPr>
       </p:pic>
+      <p:sp>
+        <p:nvSpPr>
+          <p:cNvPr id="9" name="TextBox 8"/>
+          <p:cNvSpPr txBox="1"/>
+          <p:nvPr/>
+        </p:nvSpPr>
+        <p:spPr>
+          <a:xfrm>
+            <a:off x="3200400" y="1851660"/>
+            <a:ext cx="280301" cy="457200"/>
+          </a:xfrm>
+          <a:prstGeom prst="rect">
+            <a:avLst/>
+          </a:prstGeom>
+          <a:noFill/>
+        </p:spPr>
+        <p:txBody>
+          <a:bodyPr wrap="none" lIns="45720" rIns="45720" tIns="18288" bIns="18288" anchor="ctr">
+            <a:noAutofit/>
+          </a:bodyPr>
+          <a:lstStyle/>
+          <a:p>
+            <a:pPr algn="l"/>
+            <a:r>
+              <a:rPr sz="2280" b="0" i="0">
+                <a:solidFill>
+                  <a:srgbClr val="1A1A1A"/>
+                </a:solidFill>
+                <a:latin typeface="Lexend"/>
+              </a:rPr>
+              <a:t>.</a:t>
+            </a:r>
+          </a:p>
+        </p:txBody>
+      </p:sp>
+      <p:sp>
+        <p:nvSpPr>
+          <p:cNvPr id="10" name="TextBox 9"/>
+          <p:cNvSpPr txBox="1"/>
+          <p:nvPr/>
+        </p:nvSpPr>
+        <p:spPr>
+          <a:xfrm>
+            <a:off x="1234440" y="2487168"/>
+            <a:ext cx="10058400" cy="429370"/>
+          </a:xfrm>
+          <a:prstGeom prst="rect">
+            <a:avLst/>
+          </a:prstGeom>
+          <a:noFill/>
+        </p:spPr>
+        <p:txBody>
+          <a:bodyPr wrap="square" lIns="45720" rIns="45720" tIns="18288" bIns="18288" anchor="t">
+            <a:spAutoFit/>
+          </a:bodyPr>
+          <a:lstStyle/>
+          <a:p>
+            <a:pPr algn="l"/>
+            <a:r>
+              <a:rPr sz="2280" b="0" i="0">
+                <a:solidFill>
+                  <a:srgbClr val="1A1A1A"/>
+                </a:solidFill>
+                <a:latin typeface="Lexend"/>
+              </a:rPr>
+              <a:t>A 5-lb bag of flour and a 2.5-kg bag of sugar.</a:t>
+            </a:r>
+          </a:p>
+        </p:txBody>
+      </p:sp>
+      <p:sp>
+        <p:nvSpPr>
+          <p:cNvPr id="11" name="TextBox 10"/>
+          <p:cNvSpPr txBox="1"/>
+          <p:nvPr/>
+        </p:nvSpPr>
+        <p:spPr>
+          <a:xfrm>
+            <a:off x="1234440" y="3026266"/>
+            <a:ext cx="10058400" cy="429370"/>
+          </a:xfrm>
+          <a:prstGeom prst="rect">
+            <a:avLst/>
+          </a:prstGeom>
+          <a:noFill/>
+        </p:spPr>
+        <p:txBody>
+          <a:bodyPr wrap="square" lIns="45720" rIns="45720" tIns="18288" bIns="18288" anchor="t">
+            <a:spAutoFit/>
+          </a:bodyPr>
+          <a:lstStyle/>
+          <a:p>
+            <a:pPr algn="l"/>
+            <a:r>
+              <a:rPr sz="2280" b="1" i="0">
+                <a:solidFill>
+                  <a:srgbClr val="1A1A1A"/>
+                </a:solidFill>
+                <a:latin typeface="Lexend"/>
+              </a:rPr>
+              <a:t>Which is heavier, and by how much?</a:t>
+            </a:r>
+          </a:p>
+        </p:txBody>
+      </p:sp>
       <p:pic>
         <p:nvPicPr>
-          <p:cNvPr id="11" name="Picture 10" descr="d2ea0731c01267cd.png"/>
+          <p:cNvPr id="12" name="Picture 11" descr="1da7a0dd2289da73.png"/>
           <p:cNvPicPr>
             <a:picLocks noChangeAspect="1"/>
           </p:cNvPicPr>
@@ -11389,7 +12654,31 @@
         </p:blipFill>
         <p:spPr>
           <a:xfrm>
-            <a:off x="4628387" y="3690332"/>
+            <a:off x="4628387" y="3769009"/>
+            <a:ext cx="3014472" cy="265176"/>
+          </a:xfrm>
+          <a:prstGeom prst="rect">
+            <a:avLst/>
+          </a:prstGeom>
+        </p:spPr>
+      </p:pic>
+      <p:pic>
+        <p:nvPicPr>
+          <p:cNvPr id="13" name="Picture 12" descr="d2ea0731c01267cd.png"/>
+          <p:cNvPicPr>
+            <a:picLocks noChangeAspect="1"/>
+          </p:cNvPicPr>
+          <p:nvPr/>
+        </p:nvPicPr>
+        <p:blipFill>
+          <a:blip r:embed="rId4"/>
+          <a:stretch>
+            <a:fillRect/>
+          </a:stretch>
+        </p:blipFill>
+        <p:spPr>
+          <a:xfrm>
+            <a:off x="4628387" y="4320697"/>
             <a:ext cx="2145792" cy="252984"/>
           </a:xfrm>
           <a:prstGeom prst="rect">
@@ -11399,13 +12688,13 @@
       </p:pic>
       <p:sp>
         <p:nvSpPr>
-          <p:cNvPr id="12" name="TextBox 11"/>
-          <p:cNvSpPr txBox="1"/>
-          <p:nvPr/>
-        </p:nvSpPr>
-        <p:spPr>
-          <a:xfrm>
-            <a:off x="777240" y="4663440"/>
+          <p:cNvPr id="14" name="TextBox 13"/>
+          <p:cNvSpPr txBox="1"/>
+          <p:nvPr/>
+        </p:nvSpPr>
+        <p:spPr>
+          <a:xfrm>
+            <a:off x="777240" y="4772372"/>
             <a:ext cx="10607040" cy="548640"/>
           </a:xfrm>
           <a:prstGeom prst="rect">
@@ -11669,7 +12958,7 @@
         <p:spPr>
           <a:xfrm>
             <a:off x="1874519" y="1440180"/>
-            <a:ext cx="7198446" cy="457200"/>
+            <a:ext cx="671561" cy="457200"/>
           </a:xfrm>
           <a:prstGeom prst="rect">
             <a:avLst/>
@@ -11690,181 +12979,14 @@
                 </a:solidFill>
                 <a:latin typeface="Lexend"/>
               </a:rPr>
-              <a:t>1.   1 in = 2.54 cm. How many centimeters is 12 in?</a:t>
-            </a:r>
-          </a:p>
-        </p:txBody>
-      </p:sp>
-      <p:sp>
-        <p:nvSpPr>
-          <p:cNvPr id="9" name="TextBox 8"/>
-          <p:cNvSpPr txBox="1"/>
-          <p:nvPr/>
-        </p:nvSpPr>
-        <p:spPr>
-          <a:xfrm>
-            <a:off x="9484446" y="1440180"/>
-            <a:ext cx="1559241" cy="457200"/>
-          </a:xfrm>
-          <a:prstGeom prst="rect">
-            <a:avLst/>
-          </a:prstGeom>
-          <a:noFill/>
-        </p:spPr>
-        <p:txBody>
-          <a:bodyPr wrap="none" lIns="45720" rIns="45720" tIns="18288" bIns="18288" anchor="ctr">
-            <a:noAutofit/>
-          </a:bodyPr>
-          <a:lstStyle/>
-          <a:p>
-            <a:pPr algn="l"/>
-            <a:r>
-              <a:rPr sz="2180" b="1" i="0">
-                <a:solidFill>
-                  <a:srgbClr val="9E1B32"/>
-                </a:solidFill>
-                <a:latin typeface="Lexend"/>
-              </a:rPr>
-              <a:t>30.48 cm</a:t>
-            </a:r>
-          </a:p>
-        </p:txBody>
-      </p:sp>
-      <p:sp>
-        <p:nvSpPr>
-          <p:cNvPr id="10" name="TextBox 9"/>
-          <p:cNvSpPr txBox="1"/>
-          <p:nvPr/>
-        </p:nvSpPr>
-        <p:spPr>
-          <a:xfrm>
-            <a:off x="1874519" y="2052828"/>
-            <a:ext cx="9664656" cy="457200"/>
-          </a:xfrm>
-          <a:prstGeom prst="rect">
-            <a:avLst/>
-          </a:prstGeom>
-          <a:noFill/>
-        </p:spPr>
-        <p:txBody>
-          <a:bodyPr wrap="none" lIns="45720" rIns="45720" tIns="18288" bIns="18288" anchor="ctr">
-            <a:noAutofit/>
-          </a:bodyPr>
-          <a:lstStyle/>
-          <a:p>
-            <a:pPr algn="l"/>
-            <a:r>
-              <a:rPr sz="2180" b="0" i="0">
-                <a:solidFill>
-                  <a:srgbClr val="1A1A1A"/>
-                </a:solidFill>
-                <a:latin typeface="Lexend"/>
-              </a:rPr>
-              <a:t>2.   A figure with area 7 cm</a:t>
-            </a:r>
-            <a:r>
-              <a:rPr sz="2180" b="0" i="0" baseline="30000">
-                <a:solidFill>
-                  <a:srgbClr val="1A1A1A"/>
-                </a:solidFill>
-                <a:latin typeface="Lexend"/>
-              </a:rPr>
-              <a:t>2</a:t>
-            </a:r>
-            <a:r>
-              <a:rPr sz="2180" b="0" i="0">
-                <a:solidFill>
-                  <a:srgbClr val="1A1A1A"/>
-                </a:solidFill>
-                <a:latin typeface="Lexend"/>
-              </a:rPr>
-              <a:t> is scaled by k = 3. Find the copy's area.</a:t>
-            </a:r>
-          </a:p>
-        </p:txBody>
-      </p:sp>
-      <p:sp>
-        <p:nvSpPr>
-          <p:cNvPr id="11" name="TextBox 10"/>
-          <p:cNvSpPr txBox="1"/>
-          <p:nvPr/>
-        </p:nvSpPr>
-        <p:spPr>
-          <a:xfrm>
-            <a:off x="2606040" y="2510028"/>
-            <a:ext cx="1198903" cy="457200"/>
-          </a:xfrm>
-          <a:prstGeom prst="rect">
-            <a:avLst/>
-          </a:prstGeom>
-          <a:noFill/>
-        </p:spPr>
-        <p:txBody>
-          <a:bodyPr wrap="none" lIns="45720" rIns="45720" tIns="18288" bIns="18288" anchor="ctr">
-            <a:noAutofit/>
-          </a:bodyPr>
-          <a:lstStyle/>
-          <a:p>
-            <a:pPr algn="l"/>
-            <a:r>
-              <a:rPr sz="2180" b="1" i="0">
-                <a:solidFill>
-                  <a:srgbClr val="9E1B32"/>
-                </a:solidFill>
-                <a:latin typeface="Lexend"/>
-              </a:rPr>
-              <a:t>63 cm</a:t>
-            </a:r>
-            <a:r>
-              <a:rPr sz="2180" b="1" i="0" baseline="30000">
-                <a:solidFill>
-                  <a:srgbClr val="9E1B32"/>
-                </a:solidFill>
-                <a:latin typeface="Lexend"/>
-              </a:rPr>
-              <a:t>2</a:t>
-            </a:r>
-          </a:p>
-        </p:txBody>
-      </p:sp>
-      <p:sp>
-        <p:nvSpPr>
-          <p:cNvPr id="12" name="TextBox 11"/>
-          <p:cNvSpPr txBox="1"/>
-          <p:nvPr/>
-        </p:nvSpPr>
-        <p:spPr>
-          <a:xfrm>
-            <a:off x="1874519" y="3122676"/>
-            <a:ext cx="3275301" cy="457200"/>
-          </a:xfrm>
-          <a:prstGeom prst="rect">
-            <a:avLst/>
-          </a:prstGeom>
-          <a:noFill/>
-        </p:spPr>
-        <p:txBody>
-          <a:bodyPr wrap="none" lIns="45720" rIns="45720" tIns="18288" bIns="18288" anchor="ctr">
-            <a:noAutofit/>
-          </a:bodyPr>
-          <a:lstStyle/>
-          <a:p>
-            <a:pPr algn="l"/>
-            <a:r>
-              <a:rPr sz="2180" b="0" i="0">
-                <a:solidFill>
-                  <a:srgbClr val="1A1A1A"/>
-                </a:solidFill>
-                <a:latin typeface="Lexend"/>
-              </a:rPr>
-              <a:t>3.   Find the product:  </a:t>
+              <a:t>1.   </a:t>
             </a:r>
           </a:p>
         </p:txBody>
       </p:sp>
       <p:pic>
         <p:nvPicPr>
-          <p:cNvPr id="13" name="Picture 12" descr="dd9d4cf5c31a1b9e.png"/>
+          <p:cNvPr id="9" name="Picture 8" descr="88d2b26b87c7a8c9.png"/>
           <p:cNvPicPr>
             <a:picLocks noChangeAspect="1"/>
           </p:cNvPicPr>
@@ -11878,7 +13000,333 @@
         </p:blipFill>
         <p:spPr>
           <a:xfrm>
-            <a:off x="5012661" y="3238500"/>
+            <a:off x="2408921" y="1540573"/>
+            <a:ext cx="1847088" cy="243840"/>
+          </a:xfrm>
+          <a:prstGeom prst="rect">
+            <a:avLst/>
+          </a:prstGeom>
+        </p:spPr>
+      </p:pic>
+      <p:sp>
+        <p:nvSpPr>
+          <p:cNvPr id="10" name="TextBox 9"/>
+          <p:cNvSpPr txBox="1"/>
+          <p:nvPr/>
+        </p:nvSpPr>
+        <p:spPr>
+          <a:xfrm>
+            <a:off x="4256009" y="1440180"/>
+            <a:ext cx="4831351" cy="457200"/>
+          </a:xfrm>
+          <a:prstGeom prst="rect">
+            <a:avLst/>
+          </a:prstGeom>
+          <a:noFill/>
+        </p:spPr>
+        <p:txBody>
+          <a:bodyPr wrap="none" lIns="45720" rIns="45720" tIns="18288" bIns="18288" anchor="ctr">
+            <a:noAutofit/>
+          </a:bodyPr>
+          <a:lstStyle/>
+          <a:p>
+            <a:pPr algn="l"/>
+            <a:r>
+              <a:rPr sz="2180" b="0" i="0">
+                <a:solidFill>
+                  <a:srgbClr val="1A1A1A"/>
+                </a:solidFill>
+                <a:latin typeface="Lexend"/>
+              </a:rPr>
+              <a:t>. How many centimeters is 12 in?</a:t>
+            </a:r>
+          </a:p>
+        </p:txBody>
+      </p:sp>
+      <p:sp>
+        <p:nvSpPr>
+          <p:cNvPr id="11" name="TextBox 10"/>
+          <p:cNvSpPr txBox="1"/>
+          <p:nvPr/>
+        </p:nvSpPr>
+        <p:spPr>
+          <a:xfrm>
+            <a:off x="9498840" y="1440180"/>
+            <a:ext cx="1559241" cy="457200"/>
+          </a:xfrm>
+          <a:prstGeom prst="rect">
+            <a:avLst/>
+          </a:prstGeom>
+          <a:noFill/>
+        </p:spPr>
+        <p:txBody>
+          <a:bodyPr wrap="none" lIns="45720" rIns="45720" tIns="18288" bIns="18288" anchor="ctr">
+            <a:noAutofit/>
+          </a:bodyPr>
+          <a:lstStyle/>
+          <a:p>
+            <a:pPr algn="l"/>
+            <a:r>
+              <a:rPr sz="2180" b="1" i="0">
+                <a:solidFill>
+                  <a:srgbClr val="9E1B32"/>
+                </a:solidFill>
+                <a:latin typeface="Lexend"/>
+              </a:rPr>
+              <a:t>30.48 cm</a:t>
+            </a:r>
+          </a:p>
+        </p:txBody>
+      </p:sp>
+      <p:sp>
+        <p:nvSpPr>
+          <p:cNvPr id="12" name="TextBox 11"/>
+          <p:cNvSpPr txBox="1"/>
+          <p:nvPr/>
+        </p:nvSpPr>
+        <p:spPr>
+          <a:xfrm>
+            <a:off x="1874519" y="2052828"/>
+            <a:ext cx="3016776" cy="457200"/>
+          </a:xfrm>
+          <a:prstGeom prst="rect">
+            <a:avLst/>
+          </a:prstGeom>
+          <a:noFill/>
+        </p:spPr>
+        <p:txBody>
+          <a:bodyPr wrap="none" lIns="45720" rIns="45720" tIns="18288" bIns="18288" anchor="ctr">
+            <a:noAutofit/>
+          </a:bodyPr>
+          <a:lstStyle/>
+          <a:p>
+            <a:pPr algn="l"/>
+            <a:r>
+              <a:rPr sz="2180" b="0" i="0">
+                <a:solidFill>
+                  <a:srgbClr val="1A1A1A"/>
+                </a:solidFill>
+                <a:latin typeface="Lexend"/>
+              </a:rPr>
+              <a:t>2.   A figure of area </a:t>
+            </a:r>
+          </a:p>
+        </p:txBody>
+      </p:sp>
+      <p:pic>
+        <p:nvPicPr>
+          <p:cNvPr id="13" name="Picture 12" descr="15179f9c1b681126.png"/>
+          <p:cNvPicPr>
+            <a:picLocks noChangeAspect="1"/>
+          </p:cNvPicPr>
+          <p:nvPr/>
+        </p:nvPicPr>
+        <p:blipFill>
+          <a:blip r:embed="rId3"/>
+          <a:stretch>
+            <a:fillRect/>
+          </a:stretch>
+        </p:blipFill>
+        <p:spPr>
+          <a:xfrm>
+            <a:off x="4754136" y="2119693"/>
+            <a:ext cx="774192" cy="277368"/>
+          </a:xfrm>
+          <a:prstGeom prst="rect">
+            <a:avLst/>
+          </a:prstGeom>
+        </p:spPr>
+      </p:pic>
+      <p:sp>
+        <p:nvSpPr>
+          <p:cNvPr id="14" name="TextBox 13"/>
+          <p:cNvSpPr txBox="1"/>
+          <p:nvPr/>
+        </p:nvSpPr>
+        <p:spPr>
+          <a:xfrm>
+            <a:off x="5528328" y="2052828"/>
+            <a:ext cx="2026935" cy="457200"/>
+          </a:xfrm>
+          <a:prstGeom prst="rect">
+            <a:avLst/>
+          </a:prstGeom>
+          <a:noFill/>
+        </p:spPr>
+        <p:txBody>
+          <a:bodyPr wrap="none" lIns="45720" rIns="45720" tIns="18288" bIns="18288" anchor="ctr">
+            <a:noAutofit/>
+          </a:bodyPr>
+          <a:lstStyle/>
+          <a:p>
+            <a:pPr algn="l"/>
+            <a:r>
+              <a:rPr sz="2180" b="0" i="0">
+                <a:solidFill>
+                  <a:srgbClr val="1A1A1A"/>
+                </a:solidFill>
+                <a:latin typeface="Lexend"/>
+              </a:rPr>
+              <a:t> is scaled by </a:t>
+            </a:r>
+          </a:p>
+        </p:txBody>
+      </p:sp>
+      <p:pic>
+        <p:nvPicPr>
+          <p:cNvPr id="15" name="Picture 14" descr="0937735c0d6e3897.png"/>
+          <p:cNvPicPr>
+            <a:picLocks noChangeAspect="1"/>
+          </p:cNvPicPr>
+          <p:nvPr/>
+        </p:nvPicPr>
+        <p:blipFill>
+          <a:blip r:embed="rId4"/>
+          <a:stretch>
+            <a:fillRect/>
+          </a:stretch>
+        </p:blipFill>
+        <p:spPr>
+          <a:xfrm>
+            <a:off x="7418103" y="2162365"/>
+            <a:ext cx="603504" cy="234696"/>
+          </a:xfrm>
+          <a:prstGeom prst="rect">
+            <a:avLst/>
+          </a:prstGeom>
+        </p:spPr>
+      </p:pic>
+      <p:sp>
+        <p:nvSpPr>
+          <p:cNvPr id="16" name="TextBox 15"/>
+          <p:cNvSpPr txBox="1"/>
+          <p:nvPr/>
+        </p:nvSpPr>
+        <p:spPr>
+          <a:xfrm>
+            <a:off x="8021607" y="2052828"/>
+            <a:ext cx="2738367" cy="457200"/>
+          </a:xfrm>
+          <a:prstGeom prst="rect">
+            <a:avLst/>
+          </a:prstGeom>
+          <a:noFill/>
+        </p:spPr>
+        <p:txBody>
+          <a:bodyPr wrap="none" lIns="45720" rIns="45720" tIns="18288" bIns="18288" anchor="ctr">
+            <a:noAutofit/>
+          </a:bodyPr>
+          <a:lstStyle/>
+          <a:p>
+            <a:pPr algn="l"/>
+            <a:r>
+              <a:rPr sz="2180" b="0" i="0">
+                <a:solidFill>
+                  <a:srgbClr val="1A1A1A"/>
+                </a:solidFill>
+                <a:latin typeface="Lexend"/>
+              </a:rPr>
+              <a:t>. The copy's area?</a:t>
+            </a:r>
+          </a:p>
+        </p:txBody>
+      </p:sp>
+      <p:sp>
+        <p:nvSpPr>
+          <p:cNvPr id="17" name="TextBox 16"/>
+          <p:cNvSpPr txBox="1"/>
+          <p:nvPr/>
+        </p:nvSpPr>
+        <p:spPr>
+          <a:xfrm>
+            <a:off x="2606040" y="2510028"/>
+            <a:ext cx="1198903" cy="457200"/>
+          </a:xfrm>
+          <a:prstGeom prst="rect">
+            <a:avLst/>
+          </a:prstGeom>
+          <a:noFill/>
+        </p:spPr>
+        <p:txBody>
+          <a:bodyPr wrap="none" lIns="45720" rIns="45720" tIns="18288" bIns="18288" anchor="ctr">
+            <a:noAutofit/>
+          </a:bodyPr>
+          <a:lstStyle/>
+          <a:p>
+            <a:pPr algn="l"/>
+            <a:r>
+              <a:rPr sz="2180" b="1" i="0">
+                <a:solidFill>
+                  <a:srgbClr val="9E1B32"/>
+                </a:solidFill>
+                <a:latin typeface="Lexend"/>
+              </a:rPr>
+              <a:t>63 cm</a:t>
+            </a:r>
+            <a:r>
+              <a:rPr sz="2180" b="1" i="0" baseline="30000">
+                <a:solidFill>
+                  <a:srgbClr val="9E1B32"/>
+                </a:solidFill>
+                <a:latin typeface="Lexend"/>
+              </a:rPr>
+              <a:t>2</a:t>
+            </a:r>
+          </a:p>
+        </p:txBody>
+      </p:sp>
+      <p:sp>
+        <p:nvSpPr>
+          <p:cNvPr id="18" name="TextBox 17"/>
+          <p:cNvSpPr txBox="1"/>
+          <p:nvPr/>
+        </p:nvSpPr>
+        <p:spPr>
+          <a:xfrm>
+            <a:off x="1874519" y="3122676"/>
+            <a:ext cx="3275301" cy="457200"/>
+          </a:xfrm>
+          <a:prstGeom prst="rect">
+            <a:avLst/>
+          </a:prstGeom>
+          <a:noFill/>
+        </p:spPr>
+        <p:txBody>
+          <a:bodyPr wrap="none" lIns="45720" rIns="45720" tIns="18288" bIns="18288" anchor="ctr">
+            <a:noAutofit/>
+          </a:bodyPr>
+          <a:lstStyle/>
+          <a:p>
+            <a:pPr algn="l"/>
+            <a:r>
+              <a:rPr sz="2180" b="0" i="0">
+                <a:solidFill>
+                  <a:srgbClr val="1A1A1A"/>
+                </a:solidFill>
+                <a:latin typeface="Lexend"/>
+              </a:rPr>
+              <a:t>3.   Find the product:  </a:t>
+            </a:r>
+          </a:p>
+        </p:txBody>
+      </p:sp>
+      <p:pic>
+        <p:nvPicPr>
+          <p:cNvPr id="19" name="Picture 18" descr="dd9d4cf5c31a1b9e.png"/>
+          <p:cNvPicPr>
+            <a:picLocks noChangeAspect="1"/>
+          </p:cNvPicPr>
+          <p:nvPr/>
+        </p:nvPicPr>
+        <p:blipFill>
+          <a:blip r:embed="rId5"/>
+          <a:stretch>
+            <a:fillRect/>
+          </a:stretch>
+        </p:blipFill>
+        <p:spPr>
+          <a:xfrm>
+            <a:off x="5012661" y="3241357"/>
             <a:ext cx="1036320" cy="225552"/>
           </a:xfrm>
           <a:prstGeom prst="rect">
@@ -11888,7 +13336,7 @@
       </p:pic>
       <p:sp>
         <p:nvSpPr>
-          <p:cNvPr id="14" name="TextBox 13"/>
+          <p:cNvPr id="20" name="TextBox 19"/>
           <p:cNvSpPr txBox="1"/>
           <p:nvPr/>
         </p:nvSpPr>
@@ -11923,14 +13371,14 @@
       </p:sp>
       <p:sp>
         <p:nvSpPr>
-          <p:cNvPr id="15" name="TextBox 14"/>
+          <p:cNvPr id="21" name="TextBox 20"/>
           <p:cNvSpPr txBox="1"/>
           <p:nvPr/>
         </p:nvSpPr>
         <p:spPr>
           <a:xfrm>
             <a:off x="1874519" y="3735324"/>
-            <a:ext cx="8778425" cy="457200"/>
+            <a:ext cx="706881" cy="457200"/>
           </a:xfrm>
           <a:prstGeom prst="rect">
             <a:avLst/>
@@ -11951,14 +13399,73 @@
                 </a:solidFill>
                 <a:latin typeface="Lexend"/>
               </a:rPr>
-              <a:t>4.   1 ft = 12 in. A 1-ft square has what area in square inches?</a:t>
-            </a:r>
-          </a:p>
-        </p:txBody>
-      </p:sp>
-      <p:sp>
-        <p:nvSpPr>
-          <p:cNvPr id="16" name="TextBox 15"/>
+              <a:t>4.   </a:t>
+            </a:r>
+          </a:p>
+        </p:txBody>
+      </p:sp>
+      <p:pic>
+        <p:nvPicPr>
+          <p:cNvPr id="22" name="Picture 21" descr="a7e24ba549ecbc3a.png"/>
+          <p:cNvPicPr>
+            <a:picLocks noChangeAspect="1"/>
+          </p:cNvPicPr>
+          <p:nvPr/>
+        </p:nvPicPr>
+        <p:blipFill>
+          <a:blip r:embed="rId6"/>
+          <a:stretch>
+            <a:fillRect/>
+          </a:stretch>
+        </p:blipFill>
+        <p:spPr>
+          <a:xfrm>
+            <a:off x="2444241" y="3832669"/>
+            <a:ext cx="1347216" cy="240791"/>
+          </a:xfrm>
+          <a:prstGeom prst="rect">
+            <a:avLst/>
+          </a:prstGeom>
+        </p:spPr>
+      </p:pic>
+      <p:sp>
+        <p:nvSpPr>
+          <p:cNvPr id="23" name="TextBox 22"/>
+          <p:cNvSpPr txBox="1"/>
+          <p:nvPr/>
+        </p:nvSpPr>
+        <p:spPr>
+          <a:xfrm>
+            <a:off x="3791457" y="3735324"/>
+            <a:ext cx="6844254" cy="457200"/>
+          </a:xfrm>
+          <a:prstGeom prst="rect">
+            <a:avLst/>
+          </a:prstGeom>
+          <a:noFill/>
+        </p:spPr>
+        <p:txBody>
+          <a:bodyPr wrap="none" lIns="45720" rIns="45720" tIns="18288" bIns="18288" anchor="ctr">
+            <a:noAutofit/>
+          </a:bodyPr>
+          <a:lstStyle/>
+          <a:p>
+            <a:pPr algn="l"/>
+            <a:r>
+              <a:rPr sz="2180" b="0" i="0">
+                <a:solidFill>
+                  <a:srgbClr val="1A1A1A"/>
+                </a:solidFill>
+                <a:latin typeface="Lexend"/>
+              </a:rPr>
+              <a:t>. A 1-ft square has what area in square inches?</a:t>
+            </a:r>
+          </a:p>
+        </p:txBody>
+      </p:sp>
+      <p:sp>
+        <p:nvSpPr>
+          <p:cNvPr id="24" name="TextBox 23"/>
           <p:cNvSpPr txBox="1"/>
           <p:nvPr/>
         </p:nvSpPr>
@@ -12228,16 +13735,40 @@
           </a:p>
         </p:txBody>
       </p:sp>
-      <p:sp>
-        <p:nvSpPr>
-          <p:cNvPr id="8" name="TextBox 7"/>
-          <p:cNvSpPr txBox="1"/>
-          <p:nvPr/>
-        </p:nvSpPr>
-        <p:spPr>
-          <a:xfrm>
-            <a:off x="1234440" y="1851660"/>
-            <a:ext cx="9659011" cy="457200"/>
+      <p:pic>
+        <p:nvPicPr>
+          <p:cNvPr id="8" name="Picture 7" descr="0d647df019511e64.png"/>
+          <p:cNvPicPr>
+            <a:picLocks noChangeAspect="1"/>
+          </p:cNvPicPr>
+          <p:nvPr/>
+        </p:nvPicPr>
+        <p:blipFill>
+          <a:blip r:embed="rId2"/>
+          <a:stretch>
+            <a:fillRect/>
+          </a:stretch>
+        </p:blipFill>
+        <p:spPr>
+          <a:xfrm>
+            <a:off x="1234440" y="1962911"/>
+            <a:ext cx="1935480" cy="304800"/>
+          </a:xfrm>
+          <a:prstGeom prst="rect">
+            <a:avLst/>
+          </a:prstGeom>
+        </p:spPr>
+      </p:pic>
+      <p:sp>
+        <p:nvSpPr>
+          <p:cNvPr id="9" name="TextBox 8"/>
+          <p:cNvSpPr txBox="1"/>
+          <p:nvPr/>
+        </p:nvSpPr>
+        <p:spPr>
+          <a:xfrm>
+            <a:off x="3169920" y="1851660"/>
+            <a:ext cx="280301" cy="457200"/>
           </a:xfrm>
           <a:prstGeom prst="rect">
             <a:avLst/>
@@ -12258,20 +13789,55 @@
                 </a:solidFill>
                 <a:latin typeface="Lexend"/>
               </a:rPr>
-              <a:t>1 gal = 3.785 L. A 20-gal fish tank, bought for $45, is being filled.</a:t>
-            </a:r>
-          </a:p>
-        </p:txBody>
-      </p:sp>
-      <p:sp>
-        <p:nvSpPr>
-          <p:cNvPr id="9" name="TextBox 8"/>
-          <p:cNvSpPr txBox="1"/>
-          <p:nvPr/>
-        </p:nvSpPr>
-        <p:spPr>
-          <a:xfrm>
-            <a:off x="1234440" y="2487168"/>
+              <a:t>.</a:t>
+            </a:r>
+          </a:p>
+        </p:txBody>
+      </p:sp>
+      <p:sp>
+        <p:nvSpPr>
+          <p:cNvPr id="10" name="TextBox 9"/>
+          <p:cNvSpPr txBox="1"/>
+          <p:nvPr/>
+        </p:nvSpPr>
+        <p:spPr>
+          <a:xfrm>
+            <a:off x="1234440" y="2464308"/>
+            <a:ext cx="7433242" cy="457200"/>
+          </a:xfrm>
+          <a:prstGeom prst="rect">
+            <a:avLst/>
+          </a:prstGeom>
+          <a:noFill/>
+        </p:spPr>
+        <p:txBody>
+          <a:bodyPr wrap="none" lIns="45720" rIns="45720" tIns="18288" bIns="18288" anchor="ctr">
+            <a:noAutofit/>
+          </a:bodyPr>
+          <a:lstStyle/>
+          <a:p>
+            <a:pPr algn="l"/>
+            <a:r>
+              <a:rPr sz="2280" b="0" i="0">
+                <a:solidFill>
+                  <a:srgbClr val="1A1A1A"/>
+                </a:solidFill>
+                <a:latin typeface="Lexend"/>
+              </a:rPr>
+              <a:t>A 20-gal fish tank, bought for $45, is being filled.</a:t>
+            </a:r>
+          </a:p>
+        </p:txBody>
+      </p:sp>
+      <p:sp>
+        <p:nvSpPr>
+          <p:cNvPr id="11" name="TextBox 10"/>
+          <p:cNvSpPr txBox="1"/>
+          <p:nvPr/>
+        </p:nvSpPr>
+        <p:spPr>
+          <a:xfrm>
+            <a:off x="1234440" y="3099816"/>
             <a:ext cx="10058400" cy="429370"/>
           </a:xfrm>
           <a:prstGeom prst="rect">
@@ -12300,7 +13866,7 @@
       </p:sp>
       <p:sp>
         <p:nvSpPr>
-          <p:cNvPr id="10" name="TextBox 9"/>
+          <p:cNvPr id="12" name="TextBox 11"/>
           <p:cNvSpPr txBox="1"/>
           <p:nvPr/>
         </p:nvSpPr>
@@ -12561,79 +14127,9 @@
           </a:p>
         </p:txBody>
       </p:sp>
-      <p:sp>
-        <p:nvSpPr>
-          <p:cNvPr id="8" name="TextBox 7"/>
-          <p:cNvSpPr txBox="1"/>
-          <p:nvPr/>
-        </p:nvSpPr>
-        <p:spPr>
-          <a:xfrm>
-            <a:off x="1234440" y="1851660"/>
-            <a:ext cx="9659011" cy="457200"/>
-          </a:xfrm>
-          <a:prstGeom prst="rect">
-            <a:avLst/>
-          </a:prstGeom>
-          <a:noFill/>
-        </p:spPr>
-        <p:txBody>
-          <a:bodyPr wrap="none" lIns="45720" rIns="45720" tIns="18288" bIns="18288" anchor="ctr">
-            <a:noAutofit/>
-          </a:bodyPr>
-          <a:lstStyle/>
-          <a:p>
-            <a:pPr algn="l"/>
-            <a:r>
-              <a:rPr sz="2280" b="0" i="0">
-                <a:solidFill>
-                  <a:srgbClr val="1A1A1A"/>
-                </a:solidFill>
-                <a:latin typeface="Lexend"/>
-              </a:rPr>
-              <a:t>1 gal = 3.785 L. A 20-gal fish tank, bought for $45, is being filled.</a:t>
-            </a:r>
-          </a:p>
-        </p:txBody>
-      </p:sp>
-      <p:sp>
-        <p:nvSpPr>
-          <p:cNvPr id="9" name="TextBox 8"/>
-          <p:cNvSpPr txBox="1"/>
-          <p:nvPr/>
-        </p:nvSpPr>
-        <p:spPr>
-          <a:xfrm>
-            <a:off x="1234440" y="2487168"/>
-            <a:ext cx="10058400" cy="429370"/>
-          </a:xfrm>
-          <a:prstGeom prst="rect">
-            <a:avLst/>
-          </a:prstGeom>
-          <a:noFill/>
-        </p:spPr>
-        <p:txBody>
-          <a:bodyPr wrap="square" lIns="45720" rIns="45720" tIns="18288" bIns="18288" anchor="t">
-            <a:spAutoFit/>
-          </a:bodyPr>
-          <a:lstStyle/>
-          <a:p>
-            <a:pPr algn="l"/>
-            <a:r>
-              <a:rPr sz="2280" b="1" i="0">
-                <a:solidFill>
-                  <a:srgbClr val="1A1A1A"/>
-                </a:solidFill>
-                <a:latin typeface="Lexend"/>
-              </a:rPr>
-              <a:t>How many liters does it hold?</a:t>
-            </a:r>
-          </a:p>
-        </p:txBody>
-      </p:sp>
       <p:pic>
         <p:nvPicPr>
-          <p:cNvPr id="10" name="Picture 9" descr="fd66d022f8b74996.png"/>
+          <p:cNvPr id="8" name="Picture 7" descr="118ca277248594bf.png"/>
           <p:cNvPicPr>
             <a:picLocks noChangeAspect="1"/>
           </p:cNvPicPr>
@@ -12647,7 +14143,136 @@
         </p:blipFill>
         <p:spPr>
           <a:xfrm>
-            <a:off x="4878323" y="3224386"/>
+            <a:off x="1234440" y="1962911"/>
+            <a:ext cx="1935480" cy="304800"/>
+          </a:xfrm>
+          <a:prstGeom prst="rect">
+            <a:avLst/>
+          </a:prstGeom>
+        </p:spPr>
+      </p:pic>
+      <p:sp>
+        <p:nvSpPr>
+          <p:cNvPr id="9" name="TextBox 8"/>
+          <p:cNvSpPr txBox="1"/>
+          <p:nvPr/>
+        </p:nvSpPr>
+        <p:spPr>
+          <a:xfrm>
+            <a:off x="3169920" y="1851660"/>
+            <a:ext cx="280301" cy="457200"/>
+          </a:xfrm>
+          <a:prstGeom prst="rect">
+            <a:avLst/>
+          </a:prstGeom>
+          <a:noFill/>
+        </p:spPr>
+        <p:txBody>
+          <a:bodyPr wrap="none" lIns="45720" rIns="45720" tIns="18288" bIns="18288" anchor="ctr">
+            <a:noAutofit/>
+          </a:bodyPr>
+          <a:lstStyle/>
+          <a:p>
+            <a:pPr algn="l"/>
+            <a:r>
+              <a:rPr sz="2280" b="0" i="0">
+                <a:solidFill>
+                  <a:srgbClr val="1A1A1A"/>
+                </a:solidFill>
+                <a:latin typeface="Lexend"/>
+              </a:rPr>
+              <a:t>.</a:t>
+            </a:r>
+          </a:p>
+        </p:txBody>
+      </p:sp>
+      <p:sp>
+        <p:nvSpPr>
+          <p:cNvPr id="10" name="TextBox 9"/>
+          <p:cNvSpPr txBox="1"/>
+          <p:nvPr/>
+        </p:nvSpPr>
+        <p:spPr>
+          <a:xfrm>
+            <a:off x="1234440" y="2464308"/>
+            <a:ext cx="7433242" cy="457200"/>
+          </a:xfrm>
+          <a:prstGeom prst="rect">
+            <a:avLst/>
+          </a:prstGeom>
+          <a:noFill/>
+        </p:spPr>
+        <p:txBody>
+          <a:bodyPr wrap="none" lIns="45720" rIns="45720" tIns="18288" bIns="18288" anchor="ctr">
+            <a:noAutofit/>
+          </a:bodyPr>
+          <a:lstStyle/>
+          <a:p>
+            <a:pPr algn="l"/>
+            <a:r>
+              <a:rPr sz="2280" b="0" i="0">
+                <a:solidFill>
+                  <a:srgbClr val="1A1A1A"/>
+                </a:solidFill>
+                <a:latin typeface="Lexend"/>
+              </a:rPr>
+              <a:t>A 20-gal fish tank, bought for $45, is being filled.</a:t>
+            </a:r>
+          </a:p>
+        </p:txBody>
+      </p:sp>
+      <p:sp>
+        <p:nvSpPr>
+          <p:cNvPr id="11" name="TextBox 10"/>
+          <p:cNvSpPr txBox="1"/>
+          <p:nvPr/>
+        </p:nvSpPr>
+        <p:spPr>
+          <a:xfrm>
+            <a:off x="1234440" y="3099816"/>
+            <a:ext cx="10058400" cy="429370"/>
+          </a:xfrm>
+          <a:prstGeom prst="rect">
+            <a:avLst/>
+          </a:prstGeom>
+          <a:noFill/>
+        </p:spPr>
+        <p:txBody>
+          <a:bodyPr wrap="square" lIns="45720" rIns="45720" tIns="18288" bIns="18288" anchor="t">
+            <a:spAutoFit/>
+          </a:bodyPr>
+          <a:lstStyle/>
+          <a:p>
+            <a:pPr algn="l"/>
+            <a:r>
+              <a:rPr sz="2280" b="1" i="0">
+                <a:solidFill>
+                  <a:srgbClr val="1A1A1A"/>
+                </a:solidFill>
+                <a:latin typeface="Lexend"/>
+              </a:rPr>
+              <a:t>How many liters does it hold?</a:t>
+            </a:r>
+          </a:p>
+        </p:txBody>
+      </p:sp>
+      <p:pic>
+        <p:nvPicPr>
+          <p:cNvPr id="12" name="Picture 11" descr="fd66d022f8b74996.png"/>
+          <p:cNvPicPr>
+            <a:picLocks noChangeAspect="1"/>
+          </p:cNvPicPr>
+          <p:nvPr/>
+        </p:nvPicPr>
+        <p:blipFill>
+          <a:blip r:embed="rId3"/>
+          <a:stretch>
+            <a:fillRect/>
+          </a:stretch>
+        </p:blipFill>
+        <p:spPr>
+          <a:xfrm>
+            <a:off x="4878323" y="3854750"/>
             <a:ext cx="2517648" cy="252984"/>
           </a:xfrm>
           <a:prstGeom prst="rect">
@@ -12657,7 +14282,7 @@
       </p:pic>
       <p:sp>
         <p:nvSpPr>
-          <p:cNvPr id="11" name="TextBox 10"/>
+          <p:cNvPr id="13" name="TextBox 12"/>
           <p:cNvSpPr txBox="1"/>
           <p:nvPr/>
         </p:nvSpPr>
@@ -12918,15 +14543,286 @@
           </a:p>
         </p:txBody>
       </p:sp>
-      <p:sp>
-        <p:nvSpPr>
-          <p:cNvPr id="8" name="TextBox 7"/>
-          <p:cNvSpPr txBox="1"/>
-          <p:nvPr/>
-        </p:nvSpPr>
-        <p:spPr>
-          <a:xfrm>
-            <a:off x="1234440" y="1874519"/>
+      <p:pic>
+        <p:nvPicPr>
+          <p:cNvPr id="8" name="Picture 7" descr="a7e24ba549ecbc3a.png"/>
+          <p:cNvPicPr>
+            <a:picLocks noChangeAspect="1"/>
+          </p:cNvPicPr>
+          <p:nvPr/>
+        </p:nvPicPr>
+        <p:blipFill>
+          <a:blip r:embed="rId2"/>
+          <a:stretch>
+            <a:fillRect/>
+          </a:stretch>
+        </p:blipFill>
+        <p:spPr>
+          <a:xfrm>
+            <a:off x="1234440" y="1953768"/>
+            <a:ext cx="1347216" cy="240791"/>
+          </a:xfrm>
+          <a:prstGeom prst="rect">
+            <a:avLst/>
+          </a:prstGeom>
+        </p:spPr>
+      </p:pic>
+      <p:sp>
+        <p:nvSpPr>
+          <p:cNvPr id="9" name="TextBox 8"/>
+          <p:cNvSpPr txBox="1"/>
+          <p:nvPr/>
+        </p:nvSpPr>
+        <p:spPr>
+          <a:xfrm>
+            <a:off x="2581656" y="1851660"/>
+            <a:ext cx="280301" cy="457200"/>
+          </a:xfrm>
+          <a:prstGeom prst="rect">
+            <a:avLst/>
+          </a:prstGeom>
+          <a:noFill/>
+        </p:spPr>
+        <p:txBody>
+          <a:bodyPr wrap="none" lIns="45720" rIns="45720" tIns="18288" bIns="18288" anchor="ctr">
+            <a:noAutofit/>
+          </a:bodyPr>
+          <a:lstStyle/>
+          <a:p>
+            <a:pPr algn="l"/>
+            <a:r>
+              <a:rPr sz="2280" b="0" i="0">
+                <a:solidFill>
+                  <a:srgbClr val="1A1A1A"/>
+                </a:solidFill>
+                <a:latin typeface="Lexend"/>
+              </a:rPr>
+              <a:t>.</a:t>
+            </a:r>
+          </a:p>
+        </p:txBody>
+      </p:sp>
+      <p:sp>
+        <p:nvSpPr>
+          <p:cNvPr id="10" name="TextBox 9"/>
+          <p:cNvSpPr txBox="1"/>
+          <p:nvPr/>
+        </p:nvSpPr>
+        <p:spPr>
+          <a:xfrm>
+            <a:off x="1234440" y="2464308"/>
+            <a:ext cx="1815268" cy="457200"/>
+          </a:xfrm>
+          <a:prstGeom prst="rect">
+            <a:avLst/>
+          </a:prstGeom>
+          <a:noFill/>
+        </p:spPr>
+        <p:txBody>
+          <a:bodyPr wrap="none" lIns="45720" rIns="45720" tIns="18288" bIns="18288" anchor="ctr">
+            <a:noAutofit/>
+          </a:bodyPr>
+          <a:lstStyle/>
+          <a:p>
+            <a:pPr algn="l"/>
+            <a:r>
+              <a:rPr sz="2280" b="0" i="0">
+                <a:solidFill>
+                  <a:srgbClr val="1A1A1A"/>
+                </a:solidFill>
+                <a:latin typeface="Lexend"/>
+              </a:rPr>
+              <a:t>Priya says </a:t>
+            </a:r>
+          </a:p>
+        </p:txBody>
+      </p:sp>
+      <p:pic>
+        <p:nvPicPr>
+          <p:cNvPr id="11" name="Picture 10" descr="2153689eab6c373c.png"/>
+          <p:cNvPicPr>
+            <a:picLocks noChangeAspect="1"/>
+          </p:cNvPicPr>
+          <p:nvPr/>
+        </p:nvPicPr>
+        <p:blipFill>
+          <a:blip r:embed="rId3"/>
+          <a:stretch>
+            <a:fillRect/>
+          </a:stretch>
+        </p:blipFill>
+        <p:spPr>
+          <a:xfrm>
+            <a:off x="2912548" y="2538984"/>
+            <a:ext cx="560832" cy="268224"/>
+          </a:xfrm>
+          <a:prstGeom prst="rect">
+            <a:avLst/>
+          </a:prstGeom>
+        </p:spPr>
+      </p:pic>
+      <p:sp>
+        <p:nvSpPr>
+          <p:cNvPr id="12" name="TextBox 11"/>
+          <p:cNvSpPr txBox="1"/>
+          <p:nvPr/>
+        </p:nvSpPr>
+        <p:spPr>
+          <a:xfrm>
+            <a:off x="3473380" y="2464308"/>
+            <a:ext cx="614511" cy="457200"/>
+          </a:xfrm>
+          <a:prstGeom prst="rect">
+            <a:avLst/>
+          </a:prstGeom>
+          <a:noFill/>
+        </p:spPr>
+        <p:txBody>
+          <a:bodyPr wrap="none" lIns="45720" rIns="45720" tIns="18288" bIns="18288" anchor="ctr">
+            <a:noAutofit/>
+          </a:bodyPr>
+          <a:lstStyle/>
+          <a:p>
+            <a:pPr algn="l"/>
+            <a:r>
+              <a:rPr sz="2280" b="0" i="0">
+                <a:solidFill>
+                  <a:srgbClr val="1A1A1A"/>
+                </a:solidFill>
+                <a:latin typeface="Lexend"/>
+              </a:rPr>
+              <a:t> is </a:t>
+            </a:r>
+          </a:p>
+        </p:txBody>
+      </p:sp>
+      <p:pic>
+        <p:nvPicPr>
+          <p:cNvPr id="13" name="Picture 12" descr="146ce481013c058e.png"/>
+          <p:cNvPicPr>
+            <a:picLocks noChangeAspect="1"/>
+          </p:cNvPicPr>
+          <p:nvPr/>
+        </p:nvPicPr>
+        <p:blipFill>
+          <a:blip r:embed="rId4"/>
+          <a:stretch>
+            <a:fillRect/>
+          </a:stretch>
+        </p:blipFill>
+        <p:spPr>
+          <a:xfrm>
+            <a:off x="3950732" y="2538984"/>
+            <a:ext cx="783336" cy="268224"/>
+          </a:xfrm>
+          <a:prstGeom prst="rect">
+            <a:avLst/>
+          </a:prstGeom>
+        </p:spPr>
+      </p:pic>
+      <p:sp>
+        <p:nvSpPr>
+          <p:cNvPr id="14" name="TextBox 13"/>
+          <p:cNvSpPr txBox="1"/>
+          <p:nvPr/>
+        </p:nvSpPr>
+        <p:spPr>
+          <a:xfrm>
+            <a:off x="4734068" y="2464308"/>
+            <a:ext cx="1705314" cy="457200"/>
+          </a:xfrm>
+          <a:prstGeom prst="rect">
+            <a:avLst/>
+          </a:prstGeom>
+          <a:noFill/>
+        </p:spPr>
+        <p:txBody>
+          <a:bodyPr wrap="none" lIns="45720" rIns="45720" tIns="18288" bIns="18288" anchor="ctr">
+            <a:noAutofit/>
+          </a:bodyPr>
+          <a:lstStyle/>
+          <a:p>
+            <a:pPr algn="l"/>
+            <a:r>
+              <a:rPr sz="2280" b="0" i="0">
+                <a:solidFill>
+                  <a:srgbClr val="1A1A1A"/>
+                </a:solidFill>
+                <a:latin typeface="Lexend"/>
+              </a:rPr>
+              <a:t>, because </a:t>
+            </a:r>
+          </a:p>
+        </p:txBody>
+      </p:sp>
+      <p:pic>
+        <p:nvPicPr>
+          <p:cNvPr id="15" name="Picture 14" descr="be501a9f3fe0d87d.png"/>
+          <p:cNvPicPr>
+            <a:picLocks noChangeAspect="1"/>
+          </p:cNvPicPr>
+          <p:nvPr/>
+        </p:nvPicPr>
+        <p:blipFill>
+          <a:blip r:embed="rId5"/>
+          <a:stretch>
+            <a:fillRect/>
+          </a:stretch>
+        </p:blipFill>
+        <p:spPr>
+          <a:xfrm>
+            <a:off x="6302222" y="2584704"/>
+            <a:ext cx="1399032" cy="222504"/>
+          </a:xfrm>
+          <a:prstGeom prst="rect">
+            <a:avLst/>
+          </a:prstGeom>
+        </p:spPr>
+      </p:pic>
+      <p:sp>
+        <p:nvSpPr>
+          <p:cNvPr id="16" name="TextBox 15"/>
+          <p:cNvSpPr txBox="1"/>
+          <p:nvPr/>
+        </p:nvSpPr>
+        <p:spPr>
+          <a:xfrm>
+            <a:off x="7701254" y="2464308"/>
+            <a:ext cx="280301" cy="457200"/>
+          </a:xfrm>
+          <a:prstGeom prst="rect">
+            <a:avLst/>
+          </a:prstGeom>
+          <a:noFill/>
+        </p:spPr>
+        <p:txBody>
+          <a:bodyPr wrap="none" lIns="45720" rIns="45720" tIns="18288" bIns="18288" anchor="ctr">
+            <a:noAutofit/>
+          </a:bodyPr>
+          <a:lstStyle/>
+          <a:p>
+            <a:pPr algn="l"/>
+            <a:r>
+              <a:rPr sz="2280" b="0" i="0">
+                <a:solidFill>
+                  <a:srgbClr val="1A1A1A"/>
+                </a:solidFill>
+                <a:latin typeface="Lexend"/>
+              </a:rPr>
+              <a:t>.</a:t>
+            </a:r>
+          </a:p>
+        </p:txBody>
+      </p:sp>
+      <p:sp>
+        <p:nvSpPr>
+          <p:cNvPr id="17" name="TextBox 16"/>
+          <p:cNvSpPr txBox="1"/>
+          <p:nvPr/>
+        </p:nvSpPr>
+        <p:spPr>
+          <a:xfrm>
+            <a:off x="1234440" y="3099816"/>
             <a:ext cx="10058400" cy="429370"/>
           </a:xfrm>
           <a:prstGeom prst="rect">
@@ -12942,83 +14838,12 @@
           <a:p>
             <a:pPr algn="l"/>
             <a:r>
-              <a:rPr sz="2280" b="0" i="0">
+              <a:rPr sz="2280" b="1" i="0">
                 <a:solidFill>
                   <a:srgbClr val="1A1A1A"/>
                 </a:solidFill>
                 <a:latin typeface="Lexend"/>
               </a:rPr>
-              <a:t>1 ft = 12 in. Priya says 2 ft</a:t>
-            </a:r>
-            <a:r>
-              <a:rPr sz="2280" b="0" i="0" baseline="30000">
-                <a:solidFill>
-                  <a:srgbClr val="1A1A1A"/>
-                </a:solidFill>
-                <a:latin typeface="Lexend"/>
-              </a:rPr>
-              <a:t>3</a:t>
-            </a:r>
-            <a:r>
-              <a:rPr sz="2280" b="0" i="0">
-                <a:solidFill>
-                  <a:srgbClr val="1A1A1A"/>
-                </a:solidFill>
-                <a:latin typeface="Lexend"/>
-              </a:rPr>
-              <a:t> is 24 in</a:t>
-            </a:r>
-            <a:r>
-              <a:rPr sz="2280" b="0" i="0" baseline="30000">
-                <a:solidFill>
-                  <a:srgbClr val="1A1A1A"/>
-                </a:solidFill>
-                <a:latin typeface="Lexend"/>
-              </a:rPr>
-              <a:t>3</a:t>
-            </a:r>
-            <a:r>
-              <a:rPr sz="2280" b="0" i="0">
-                <a:solidFill>
-                  <a:srgbClr val="1A1A1A"/>
-                </a:solidFill>
-                <a:latin typeface="Lexend"/>
-              </a:rPr>
-              <a:t>, because 2 × 12 = 24.</a:t>
-            </a:r>
-          </a:p>
-        </p:txBody>
-      </p:sp>
-      <p:sp>
-        <p:nvSpPr>
-          <p:cNvPr id="9" name="TextBox 8"/>
-          <p:cNvSpPr txBox="1"/>
-          <p:nvPr/>
-        </p:nvSpPr>
-        <p:spPr>
-          <a:xfrm>
-            <a:off x="1234440" y="2413618"/>
-            <a:ext cx="10058400" cy="429370"/>
-          </a:xfrm>
-          <a:prstGeom prst="rect">
-            <a:avLst/>
-          </a:prstGeom>
-          <a:noFill/>
-        </p:spPr>
-        <p:txBody>
-          <a:bodyPr wrap="square" lIns="45720" rIns="45720" tIns="18288" bIns="18288" anchor="t">
-            <a:spAutoFit/>
-          </a:bodyPr>
-          <a:lstStyle/>
-          <a:p>
-            <a:pPr algn="l"/>
-            <a:r>
-              <a:rPr sz="2280" b="1" i="0">
-                <a:solidFill>
-                  <a:srgbClr val="1A1A1A"/>
-                </a:solidFill>
-                <a:latin typeface="Lexend"/>
-              </a:rPr>
               <a:t>Name the error and fix it.</a:t>
             </a:r>
           </a:p>
@@ -13026,7 +14851,7 @@
       </p:sp>
       <p:sp>
         <p:nvSpPr>
-          <p:cNvPr id="10" name="TextBox 9"/>
+          <p:cNvPr id="18" name="TextBox 17"/>
           <p:cNvSpPr txBox="1"/>
           <p:nvPr/>
         </p:nvSpPr>
@@ -13287,115 +15112,9 @@
           </a:p>
         </p:txBody>
       </p:sp>
-      <p:sp>
-        <p:nvSpPr>
-          <p:cNvPr id="8" name="TextBox 7"/>
-          <p:cNvSpPr txBox="1"/>
-          <p:nvPr/>
-        </p:nvSpPr>
-        <p:spPr>
-          <a:xfrm>
-            <a:off x="1234440" y="1874519"/>
-            <a:ext cx="10058400" cy="429370"/>
-          </a:xfrm>
-          <a:prstGeom prst="rect">
-            <a:avLst/>
-          </a:prstGeom>
-          <a:noFill/>
-        </p:spPr>
-        <p:txBody>
-          <a:bodyPr wrap="square" lIns="45720" rIns="45720" tIns="18288" bIns="18288" anchor="t">
-            <a:spAutoFit/>
-          </a:bodyPr>
-          <a:lstStyle/>
-          <a:p>
-            <a:pPr algn="l"/>
-            <a:r>
-              <a:rPr sz="2280" b="0" i="0">
-                <a:solidFill>
-                  <a:srgbClr val="1A1A1A"/>
-                </a:solidFill>
-                <a:latin typeface="Lexend"/>
-              </a:rPr>
-              <a:t>1 ft = 12 in. Priya says 2 ft</a:t>
-            </a:r>
-            <a:r>
-              <a:rPr sz="2280" b="0" i="0" baseline="30000">
-                <a:solidFill>
-                  <a:srgbClr val="1A1A1A"/>
-                </a:solidFill>
-                <a:latin typeface="Lexend"/>
-              </a:rPr>
-              <a:t>3</a:t>
-            </a:r>
-            <a:r>
-              <a:rPr sz="2280" b="0" i="0">
-                <a:solidFill>
-                  <a:srgbClr val="1A1A1A"/>
-                </a:solidFill>
-                <a:latin typeface="Lexend"/>
-              </a:rPr>
-              <a:t> is 24 in</a:t>
-            </a:r>
-            <a:r>
-              <a:rPr sz="2280" b="0" i="0" baseline="30000">
-                <a:solidFill>
-                  <a:srgbClr val="1A1A1A"/>
-                </a:solidFill>
-                <a:latin typeface="Lexend"/>
-              </a:rPr>
-              <a:t>3</a:t>
-            </a:r>
-            <a:r>
-              <a:rPr sz="2280" b="0" i="0">
-                <a:solidFill>
-                  <a:srgbClr val="1A1A1A"/>
-                </a:solidFill>
-                <a:latin typeface="Lexend"/>
-              </a:rPr>
-              <a:t>, because 2 × 12 = 24.</a:t>
-            </a:r>
-          </a:p>
-        </p:txBody>
-      </p:sp>
-      <p:sp>
-        <p:nvSpPr>
-          <p:cNvPr id="9" name="TextBox 8"/>
-          <p:cNvSpPr txBox="1"/>
-          <p:nvPr/>
-        </p:nvSpPr>
-        <p:spPr>
-          <a:xfrm>
-            <a:off x="1234440" y="2413618"/>
-            <a:ext cx="10058400" cy="429370"/>
-          </a:xfrm>
-          <a:prstGeom prst="rect">
-            <a:avLst/>
-          </a:prstGeom>
-          <a:noFill/>
-        </p:spPr>
-        <p:txBody>
-          <a:bodyPr wrap="square" lIns="45720" rIns="45720" tIns="18288" bIns="18288" anchor="t">
-            <a:spAutoFit/>
-          </a:bodyPr>
-          <a:lstStyle/>
-          <a:p>
-            <a:pPr algn="l"/>
-            <a:r>
-              <a:rPr sz="2280" b="1" i="0">
-                <a:solidFill>
-                  <a:srgbClr val="1A1A1A"/>
-                </a:solidFill>
-                <a:latin typeface="Lexend"/>
-              </a:rPr>
-              <a:t>Name the error and fix it.</a:t>
-            </a:r>
-          </a:p>
-        </p:txBody>
-      </p:sp>
       <p:pic>
         <p:nvPicPr>
-          <p:cNvPr id="10" name="Picture 9" descr="a3ccc6ff8a3d380e.png"/>
+          <p:cNvPr id="8" name="Picture 7" descr="f2542c0ca55f8587.png"/>
           <p:cNvPicPr>
             <a:picLocks noChangeAspect="1"/>
           </p:cNvPicPr>
@@ -13409,7 +15128,313 @@
         </p:blipFill>
         <p:spPr>
           <a:xfrm>
-            <a:off x="3710939" y="3094448"/>
+            <a:off x="1234440" y="1953768"/>
+            <a:ext cx="1347216" cy="240791"/>
+          </a:xfrm>
+          <a:prstGeom prst="rect">
+            <a:avLst/>
+          </a:prstGeom>
+        </p:spPr>
+      </p:pic>
+      <p:sp>
+        <p:nvSpPr>
+          <p:cNvPr id="9" name="TextBox 8"/>
+          <p:cNvSpPr txBox="1"/>
+          <p:nvPr/>
+        </p:nvSpPr>
+        <p:spPr>
+          <a:xfrm>
+            <a:off x="2581656" y="1851660"/>
+            <a:ext cx="280301" cy="457200"/>
+          </a:xfrm>
+          <a:prstGeom prst="rect">
+            <a:avLst/>
+          </a:prstGeom>
+          <a:noFill/>
+        </p:spPr>
+        <p:txBody>
+          <a:bodyPr wrap="none" lIns="45720" rIns="45720" tIns="18288" bIns="18288" anchor="ctr">
+            <a:noAutofit/>
+          </a:bodyPr>
+          <a:lstStyle/>
+          <a:p>
+            <a:pPr algn="l"/>
+            <a:r>
+              <a:rPr sz="2280" b="0" i="0">
+                <a:solidFill>
+                  <a:srgbClr val="1A1A1A"/>
+                </a:solidFill>
+                <a:latin typeface="Lexend"/>
+              </a:rPr>
+              <a:t>.</a:t>
+            </a:r>
+          </a:p>
+        </p:txBody>
+      </p:sp>
+      <p:sp>
+        <p:nvSpPr>
+          <p:cNvPr id="10" name="TextBox 9"/>
+          <p:cNvSpPr txBox="1"/>
+          <p:nvPr/>
+        </p:nvSpPr>
+        <p:spPr>
+          <a:xfrm>
+            <a:off x="1234440" y="2464308"/>
+            <a:ext cx="1815268" cy="457200"/>
+          </a:xfrm>
+          <a:prstGeom prst="rect">
+            <a:avLst/>
+          </a:prstGeom>
+          <a:noFill/>
+        </p:spPr>
+        <p:txBody>
+          <a:bodyPr wrap="none" lIns="45720" rIns="45720" tIns="18288" bIns="18288" anchor="ctr">
+            <a:noAutofit/>
+          </a:bodyPr>
+          <a:lstStyle/>
+          <a:p>
+            <a:pPr algn="l"/>
+            <a:r>
+              <a:rPr sz="2280" b="0" i="0">
+                <a:solidFill>
+                  <a:srgbClr val="1A1A1A"/>
+                </a:solidFill>
+                <a:latin typeface="Lexend"/>
+              </a:rPr>
+              <a:t>Priya says </a:t>
+            </a:r>
+          </a:p>
+        </p:txBody>
+      </p:sp>
+      <p:pic>
+        <p:nvPicPr>
+          <p:cNvPr id="11" name="Picture 10" descr="a93cf3a68f39c808.png"/>
+          <p:cNvPicPr>
+            <a:picLocks noChangeAspect="1"/>
+          </p:cNvPicPr>
+          <p:nvPr/>
+        </p:nvPicPr>
+        <p:blipFill>
+          <a:blip r:embed="rId3"/>
+          <a:stretch>
+            <a:fillRect/>
+          </a:stretch>
+        </p:blipFill>
+        <p:spPr>
+          <a:xfrm>
+            <a:off x="2912548" y="2538984"/>
+            <a:ext cx="560832" cy="268224"/>
+          </a:xfrm>
+          <a:prstGeom prst="rect">
+            <a:avLst/>
+          </a:prstGeom>
+        </p:spPr>
+      </p:pic>
+      <p:sp>
+        <p:nvSpPr>
+          <p:cNvPr id="12" name="TextBox 11"/>
+          <p:cNvSpPr txBox="1"/>
+          <p:nvPr/>
+        </p:nvSpPr>
+        <p:spPr>
+          <a:xfrm>
+            <a:off x="3473380" y="2464308"/>
+            <a:ext cx="614511" cy="457200"/>
+          </a:xfrm>
+          <a:prstGeom prst="rect">
+            <a:avLst/>
+          </a:prstGeom>
+          <a:noFill/>
+        </p:spPr>
+        <p:txBody>
+          <a:bodyPr wrap="none" lIns="45720" rIns="45720" tIns="18288" bIns="18288" anchor="ctr">
+            <a:noAutofit/>
+          </a:bodyPr>
+          <a:lstStyle/>
+          <a:p>
+            <a:pPr algn="l"/>
+            <a:r>
+              <a:rPr sz="2280" b="0" i="0">
+                <a:solidFill>
+                  <a:srgbClr val="1A1A1A"/>
+                </a:solidFill>
+                <a:latin typeface="Lexend"/>
+              </a:rPr>
+              <a:t> is </a:t>
+            </a:r>
+          </a:p>
+        </p:txBody>
+      </p:sp>
+      <p:pic>
+        <p:nvPicPr>
+          <p:cNvPr id="13" name="Picture 12" descr="db71148f8587025f.png"/>
+          <p:cNvPicPr>
+            <a:picLocks noChangeAspect="1"/>
+          </p:cNvPicPr>
+          <p:nvPr/>
+        </p:nvPicPr>
+        <p:blipFill>
+          <a:blip r:embed="rId4"/>
+          <a:stretch>
+            <a:fillRect/>
+          </a:stretch>
+        </p:blipFill>
+        <p:spPr>
+          <a:xfrm>
+            <a:off x="3950732" y="2538984"/>
+            <a:ext cx="786384" cy="268224"/>
+          </a:xfrm>
+          <a:prstGeom prst="rect">
+            <a:avLst/>
+          </a:prstGeom>
+        </p:spPr>
+      </p:pic>
+      <p:sp>
+        <p:nvSpPr>
+          <p:cNvPr id="14" name="TextBox 13"/>
+          <p:cNvSpPr txBox="1"/>
+          <p:nvPr/>
+        </p:nvSpPr>
+        <p:spPr>
+          <a:xfrm>
+            <a:off x="4737116" y="2464308"/>
+            <a:ext cx="1705314" cy="457200"/>
+          </a:xfrm>
+          <a:prstGeom prst="rect">
+            <a:avLst/>
+          </a:prstGeom>
+          <a:noFill/>
+        </p:spPr>
+        <p:txBody>
+          <a:bodyPr wrap="none" lIns="45720" rIns="45720" tIns="18288" bIns="18288" anchor="ctr">
+            <a:noAutofit/>
+          </a:bodyPr>
+          <a:lstStyle/>
+          <a:p>
+            <a:pPr algn="l"/>
+            <a:r>
+              <a:rPr sz="2280" b="0" i="0">
+                <a:solidFill>
+                  <a:srgbClr val="1A1A1A"/>
+                </a:solidFill>
+                <a:latin typeface="Lexend"/>
+              </a:rPr>
+              <a:t>, because </a:t>
+            </a:r>
+          </a:p>
+        </p:txBody>
+      </p:sp>
+      <p:pic>
+        <p:nvPicPr>
+          <p:cNvPr id="15" name="Picture 14" descr="b2ab879000df8962.png"/>
+          <p:cNvPicPr>
+            <a:picLocks noChangeAspect="1"/>
+          </p:cNvPicPr>
+          <p:nvPr/>
+        </p:nvPicPr>
+        <p:blipFill>
+          <a:blip r:embed="rId5"/>
+          <a:stretch>
+            <a:fillRect/>
+          </a:stretch>
+        </p:blipFill>
+        <p:spPr>
+          <a:xfrm>
+            <a:off x="6305270" y="2584704"/>
+            <a:ext cx="1402080" cy="222504"/>
+          </a:xfrm>
+          <a:prstGeom prst="rect">
+            <a:avLst/>
+          </a:prstGeom>
+        </p:spPr>
+      </p:pic>
+      <p:sp>
+        <p:nvSpPr>
+          <p:cNvPr id="16" name="TextBox 15"/>
+          <p:cNvSpPr txBox="1"/>
+          <p:nvPr/>
+        </p:nvSpPr>
+        <p:spPr>
+          <a:xfrm>
+            <a:off x="7707350" y="2464308"/>
+            <a:ext cx="280301" cy="457200"/>
+          </a:xfrm>
+          <a:prstGeom prst="rect">
+            <a:avLst/>
+          </a:prstGeom>
+          <a:noFill/>
+        </p:spPr>
+        <p:txBody>
+          <a:bodyPr wrap="none" lIns="45720" rIns="45720" tIns="18288" bIns="18288" anchor="ctr">
+            <a:noAutofit/>
+          </a:bodyPr>
+          <a:lstStyle/>
+          <a:p>
+            <a:pPr algn="l"/>
+            <a:r>
+              <a:rPr sz="2280" b="0" i="0">
+                <a:solidFill>
+                  <a:srgbClr val="1A1A1A"/>
+                </a:solidFill>
+                <a:latin typeface="Lexend"/>
+              </a:rPr>
+              <a:t>.</a:t>
+            </a:r>
+          </a:p>
+        </p:txBody>
+      </p:sp>
+      <p:sp>
+        <p:nvSpPr>
+          <p:cNvPr id="17" name="TextBox 16"/>
+          <p:cNvSpPr txBox="1"/>
+          <p:nvPr/>
+        </p:nvSpPr>
+        <p:spPr>
+          <a:xfrm>
+            <a:off x="1234440" y="3099816"/>
+            <a:ext cx="10058400" cy="429370"/>
+          </a:xfrm>
+          <a:prstGeom prst="rect">
+            <a:avLst/>
+          </a:prstGeom>
+          <a:noFill/>
+        </p:spPr>
+        <p:txBody>
+          <a:bodyPr wrap="square" lIns="45720" rIns="45720" tIns="18288" bIns="18288" anchor="t">
+            <a:spAutoFit/>
+          </a:bodyPr>
+          <a:lstStyle/>
+          <a:p>
+            <a:pPr algn="l"/>
+            <a:r>
+              <a:rPr sz="2280" b="1" i="0">
+                <a:solidFill>
+                  <a:srgbClr val="1A1A1A"/>
+                </a:solidFill>
+                <a:latin typeface="Lexend"/>
+              </a:rPr>
+              <a:t>Name the error and fix it.</a:t>
+            </a:r>
+          </a:p>
+        </p:txBody>
+      </p:sp>
+      <p:pic>
+        <p:nvPicPr>
+          <p:cNvPr id="18" name="Picture 17" descr="a3ccc6ff8a3d380e.png"/>
+          <p:cNvPicPr>
+            <a:picLocks noChangeAspect="1"/>
+          </p:cNvPicPr>
+          <p:nvPr/>
+        </p:nvPicPr>
+        <p:blipFill>
+          <a:blip r:embed="rId6"/>
+          <a:stretch>
+            <a:fillRect/>
+          </a:stretch>
+        </p:blipFill>
+        <p:spPr>
+          <a:xfrm>
+            <a:off x="3710939" y="3799886"/>
             <a:ext cx="4849368" cy="365760"/>
           </a:xfrm>
           <a:prstGeom prst="rect">
@@ -13419,7 +15444,7 @@
       </p:pic>
       <p:sp>
         <p:nvSpPr>
-          <p:cNvPr id="11" name="TextBox 10"/>
+          <p:cNvPr id="19" name="TextBox 18"/>
           <p:cNvSpPr txBox="1"/>
           <p:nvPr/>
         </p:nvSpPr>
@@ -13742,23 +15767,23 @@
         </p:nvSpPr>
         <p:spPr>
           <a:xfrm>
-            <a:off x="960120" y="1572768"/>
-            <a:ext cx="548640" cy="356616"/>
-          </a:xfrm>
-          <a:prstGeom prst="rect">
-            <a:avLst/>
-          </a:prstGeom>
-          <a:noFill/>
-        </p:spPr>
-        <p:txBody>
-          <a:bodyPr wrap="square" lIns="45720" rIns="45720" tIns="18288" bIns="18288" anchor="t">
+            <a:off x="960120" y="1495043"/>
+            <a:ext cx="548640" cy="457200"/>
+          </a:xfrm>
+          <a:prstGeom prst="rect">
+            <a:avLst/>
+          </a:prstGeom>
+          <a:noFill/>
+        </p:spPr>
+        <p:txBody>
+          <a:bodyPr wrap="square" lIns="45720" rIns="45720" tIns="18288" bIns="18288" anchor="ctr">
             <a:spAutoFit/>
           </a:bodyPr>
           <a:lstStyle/>
           <a:p>
             <a:pPr algn="l"/>
             <a:r>
-              <a:rPr sz="1810" b="1" i="0">
+              <a:rPr sz="2180" b="1" i="0">
                 <a:solidFill>
                   <a:srgbClr val="0B5394"/>
                 </a:solidFill>
@@ -13769,423 +15794,743 @@
           </a:p>
         </p:txBody>
       </p:sp>
-      <p:sp>
-        <p:nvSpPr>
-          <p:cNvPr id="9" name="TextBox 8"/>
-          <p:cNvSpPr txBox="1"/>
-          <p:nvPr/>
-        </p:nvSpPr>
-        <p:spPr>
-          <a:xfrm>
-            <a:off x="1554480" y="1572768"/>
-            <a:ext cx="9829800" cy="411480"/>
-          </a:xfrm>
-          <a:prstGeom prst="rect">
-            <a:avLst/>
-          </a:prstGeom>
-          <a:noFill/>
-        </p:spPr>
-        <p:txBody>
-          <a:bodyPr wrap="square" lIns="45720" rIns="45720" tIns="18288" bIns="18288" anchor="t">
+      <p:pic>
+        <p:nvPicPr>
+          <p:cNvPr id="9" name="Picture 8" descr="86539a90126a0911.png"/>
+          <p:cNvPicPr>
+            <a:picLocks noChangeAspect="1"/>
+          </p:cNvPicPr>
+          <p:nvPr/>
+        </p:nvPicPr>
+        <p:blipFill>
+          <a:blip r:embed="rId2"/>
+          <a:stretch>
+            <a:fillRect/>
+          </a:stretch>
+        </p:blipFill>
+        <p:spPr>
+          <a:xfrm>
+            <a:off x="1627632" y="1571244"/>
+            <a:ext cx="1987296" cy="304800"/>
+          </a:xfrm>
+          <a:prstGeom prst="rect">
+            <a:avLst/>
+          </a:prstGeom>
+        </p:spPr>
+      </p:pic>
+      <p:sp>
+        <p:nvSpPr>
+          <p:cNvPr id="10" name="TextBox 9"/>
+          <p:cNvSpPr txBox="1"/>
+          <p:nvPr/>
+        </p:nvSpPr>
+        <p:spPr>
+          <a:xfrm>
+            <a:off x="3614928" y="1495044"/>
+            <a:ext cx="4575123" cy="457200"/>
+          </a:xfrm>
+          <a:prstGeom prst="rect">
+            <a:avLst/>
+          </a:prstGeom>
+          <a:noFill/>
+        </p:spPr>
+        <p:txBody>
+          <a:bodyPr wrap="none" lIns="45720" rIns="45720" tIns="18288" bIns="18288" anchor="ctr">
+            <a:noAutofit/>
+          </a:bodyPr>
+          <a:lstStyle/>
+          <a:p>
+            <a:pPr algn="l"/>
+            <a:r>
+              <a:rPr sz="2180" b="0" i="0">
+                <a:solidFill>
+                  <a:srgbClr val="1A1A1A"/>
+                </a:solidFill>
+                <a:latin typeface="Lexend"/>
+              </a:rPr>
+              <a:t>. How many kilograms is 30 lb?</a:t>
+            </a:r>
+          </a:p>
+        </p:txBody>
+      </p:sp>
+      <p:sp>
+        <p:nvSpPr>
+          <p:cNvPr id="11" name="TextBox 10"/>
+          <p:cNvSpPr txBox="1"/>
+          <p:nvPr/>
+        </p:nvSpPr>
+        <p:spPr>
+          <a:xfrm>
+            <a:off x="960120" y="2089403"/>
+            <a:ext cx="548640" cy="457200"/>
+          </a:xfrm>
+          <a:prstGeom prst="rect">
+            <a:avLst/>
+          </a:prstGeom>
+          <a:noFill/>
+        </p:spPr>
+        <p:txBody>
+          <a:bodyPr wrap="square" lIns="45720" rIns="45720" tIns="18288" bIns="18288" anchor="ctr">
             <a:spAutoFit/>
           </a:bodyPr>
           <a:lstStyle/>
           <a:p>
             <a:pPr algn="l"/>
             <a:r>
-              <a:rPr sz="1810" b="0" i="0">
+              <a:rPr sz="2180" b="1" i="0">
+                <a:solidFill>
+                  <a:srgbClr val="0B5394"/>
+                </a:solidFill>
+                <a:latin typeface="Lexend"/>
+              </a:rPr>
+              <a:t>2.</a:t>
+            </a:r>
+          </a:p>
+        </p:txBody>
+      </p:sp>
+      <p:pic>
+        <p:nvPicPr>
+          <p:cNvPr id="12" name="Picture 11" descr="d7de33d50f52caf2.png"/>
+          <p:cNvPicPr>
+            <a:picLocks noChangeAspect="1"/>
+          </p:cNvPicPr>
+          <p:nvPr/>
+        </p:nvPicPr>
+        <p:blipFill>
+          <a:blip r:embed="rId3"/>
+          <a:stretch>
+            <a:fillRect/>
+          </a:stretch>
+        </p:blipFill>
+        <p:spPr>
+          <a:xfrm>
+            <a:off x="1627632" y="2165604"/>
+            <a:ext cx="1965960" cy="304800"/>
+          </a:xfrm>
+          <a:prstGeom prst="rect">
+            <a:avLst/>
+          </a:prstGeom>
+        </p:spPr>
+      </p:pic>
+      <p:sp>
+        <p:nvSpPr>
+          <p:cNvPr id="13" name="TextBox 12"/>
+          <p:cNvSpPr txBox="1"/>
+          <p:nvPr/>
+        </p:nvSpPr>
+        <p:spPr>
+          <a:xfrm>
+            <a:off x="3593592" y="2089403"/>
+            <a:ext cx="4307405" cy="457200"/>
+          </a:xfrm>
+          <a:prstGeom prst="rect">
+            <a:avLst/>
+          </a:prstGeom>
+          <a:noFill/>
+        </p:spPr>
+        <p:txBody>
+          <a:bodyPr wrap="none" lIns="45720" rIns="45720" tIns="18288" bIns="18288" anchor="ctr">
+            <a:noAutofit/>
+          </a:bodyPr>
+          <a:lstStyle/>
+          <a:p>
+            <a:pPr algn="l"/>
+            <a:r>
+              <a:rPr sz="2180" b="0" i="0">
                 <a:solidFill>
                   <a:srgbClr val="1A1A1A"/>
                 </a:solidFill>
                 <a:latin typeface="Lexend"/>
               </a:rPr>
-              <a:t>1 lb = 0.454 kg. How many kilograms is 30 lb?</a:t>
-            </a:r>
-          </a:p>
-        </p:txBody>
-      </p:sp>
-      <p:sp>
-        <p:nvSpPr>
-          <p:cNvPr id="10" name="TextBox 9"/>
-          <p:cNvSpPr txBox="1"/>
-          <p:nvPr/>
-        </p:nvSpPr>
-        <p:spPr>
-          <a:xfrm>
-            <a:off x="960120" y="2075688"/>
-            <a:ext cx="548640" cy="356616"/>
-          </a:xfrm>
-          <a:prstGeom prst="rect">
-            <a:avLst/>
-          </a:prstGeom>
-          <a:noFill/>
-        </p:spPr>
-        <p:txBody>
-          <a:bodyPr wrap="square" lIns="45720" rIns="45720" tIns="18288" bIns="18288" anchor="t">
+              <a:t>. How many pounds is 25 kg?</a:t>
+            </a:r>
+          </a:p>
+        </p:txBody>
+      </p:sp>
+      <p:sp>
+        <p:nvSpPr>
+          <p:cNvPr id="14" name="TextBox 13"/>
+          <p:cNvSpPr txBox="1"/>
+          <p:nvPr/>
+        </p:nvSpPr>
+        <p:spPr>
+          <a:xfrm>
+            <a:off x="960120" y="2683763"/>
+            <a:ext cx="548640" cy="457200"/>
+          </a:xfrm>
+          <a:prstGeom prst="rect">
+            <a:avLst/>
+          </a:prstGeom>
+          <a:noFill/>
+        </p:spPr>
+        <p:txBody>
+          <a:bodyPr wrap="square" lIns="45720" rIns="45720" tIns="18288" bIns="18288" anchor="ctr">
             <a:spAutoFit/>
           </a:bodyPr>
           <a:lstStyle/>
           <a:p>
             <a:pPr algn="l"/>
             <a:r>
-              <a:rPr sz="1810" b="1" i="0">
+              <a:rPr sz="2180" b="1" i="0">
                 <a:solidFill>
                   <a:srgbClr val="0B5394"/>
                 </a:solidFill>
                 <a:latin typeface="Lexend"/>
               </a:rPr>
-              <a:t>2.</a:t>
-            </a:r>
-          </a:p>
-        </p:txBody>
-      </p:sp>
-      <p:sp>
-        <p:nvSpPr>
-          <p:cNvPr id="11" name="TextBox 10"/>
-          <p:cNvSpPr txBox="1"/>
-          <p:nvPr/>
-        </p:nvSpPr>
-        <p:spPr>
-          <a:xfrm>
-            <a:off x="1554480" y="2075688"/>
-            <a:ext cx="9829800" cy="411480"/>
-          </a:xfrm>
-          <a:prstGeom prst="rect">
-            <a:avLst/>
-          </a:prstGeom>
-          <a:noFill/>
-        </p:spPr>
-        <p:txBody>
-          <a:bodyPr wrap="square" lIns="45720" rIns="45720" tIns="18288" bIns="18288" anchor="t">
+              <a:t>3.</a:t>
+            </a:r>
+          </a:p>
+        </p:txBody>
+      </p:sp>
+      <p:pic>
+        <p:nvPicPr>
+          <p:cNvPr id="15" name="Picture 14" descr="0d647df019511e64.png"/>
+          <p:cNvPicPr>
+            <a:picLocks noChangeAspect="1"/>
+          </p:cNvPicPr>
+          <p:nvPr/>
+        </p:nvPicPr>
+        <p:blipFill>
+          <a:blip r:embed="rId4"/>
+          <a:stretch>
+            <a:fillRect/>
+          </a:stretch>
+        </p:blipFill>
+        <p:spPr>
+          <a:xfrm>
+            <a:off x="1627632" y="2759963"/>
+            <a:ext cx="1935480" cy="304800"/>
+          </a:xfrm>
+          <a:prstGeom prst="rect">
+            <a:avLst/>
+          </a:prstGeom>
+        </p:spPr>
+      </p:pic>
+      <p:sp>
+        <p:nvSpPr>
+          <p:cNvPr id="16" name="TextBox 15"/>
+          <p:cNvSpPr txBox="1"/>
+          <p:nvPr/>
+        </p:nvSpPr>
+        <p:spPr>
+          <a:xfrm>
+            <a:off x="3563112" y="2683763"/>
+            <a:ext cx="3893964" cy="457200"/>
+          </a:xfrm>
+          <a:prstGeom prst="rect">
+            <a:avLst/>
+          </a:prstGeom>
+          <a:noFill/>
+        </p:spPr>
+        <p:txBody>
+          <a:bodyPr wrap="none" lIns="45720" rIns="45720" tIns="18288" bIns="18288" anchor="ctr">
+            <a:noAutofit/>
+          </a:bodyPr>
+          <a:lstStyle/>
+          <a:p>
+            <a:pPr algn="l"/>
+            <a:r>
+              <a:rPr sz="2180" b="0" i="0">
+                <a:solidFill>
+                  <a:srgbClr val="1A1A1A"/>
+                </a:solidFill>
+                <a:latin typeface="Lexend"/>
+              </a:rPr>
+              <a:t>. How many liters is 6 gal?</a:t>
+            </a:r>
+          </a:p>
+        </p:txBody>
+      </p:sp>
+      <p:sp>
+        <p:nvSpPr>
+          <p:cNvPr id="17" name="TextBox 16"/>
+          <p:cNvSpPr txBox="1"/>
+          <p:nvPr/>
+        </p:nvSpPr>
+        <p:spPr>
+          <a:xfrm>
+            <a:off x="960120" y="3278123"/>
+            <a:ext cx="548640" cy="457200"/>
+          </a:xfrm>
+          <a:prstGeom prst="rect">
+            <a:avLst/>
+          </a:prstGeom>
+          <a:noFill/>
+        </p:spPr>
+        <p:txBody>
+          <a:bodyPr wrap="square" lIns="45720" rIns="45720" tIns="18288" bIns="18288" anchor="ctr">
             <a:spAutoFit/>
           </a:bodyPr>
           <a:lstStyle/>
           <a:p>
             <a:pPr algn="l"/>
             <a:r>
-              <a:rPr sz="1810" b="0" i="0">
+              <a:rPr sz="2180" b="1" i="0">
+                <a:solidFill>
+                  <a:srgbClr val="0B5394"/>
+                </a:solidFill>
+                <a:latin typeface="Lexend"/>
+              </a:rPr>
+              <a:t>4.</a:t>
+            </a:r>
+          </a:p>
+        </p:txBody>
+      </p:sp>
+      <p:pic>
+        <p:nvPicPr>
+          <p:cNvPr id="18" name="Picture 17" descr="a7e24ba549ecbc3a.png"/>
+          <p:cNvPicPr>
+            <a:picLocks noChangeAspect="1"/>
+          </p:cNvPicPr>
+          <p:nvPr/>
+        </p:nvPicPr>
+        <p:blipFill>
+          <a:blip r:embed="rId5"/>
+          <a:stretch>
+            <a:fillRect/>
+          </a:stretch>
+        </p:blipFill>
+        <p:spPr>
+          <a:xfrm>
+            <a:off x="1627632" y="3386327"/>
+            <a:ext cx="1347216" cy="240791"/>
+          </a:xfrm>
+          <a:prstGeom prst="rect">
+            <a:avLst/>
+          </a:prstGeom>
+        </p:spPr>
+      </p:pic>
+      <p:sp>
+        <p:nvSpPr>
+          <p:cNvPr id="19" name="TextBox 18"/>
+          <p:cNvSpPr txBox="1"/>
+          <p:nvPr/>
+        </p:nvSpPr>
+        <p:spPr>
+          <a:xfrm>
+            <a:off x="2974848" y="3278123"/>
+            <a:ext cx="4307056" cy="457200"/>
+          </a:xfrm>
+          <a:prstGeom prst="rect">
+            <a:avLst/>
+          </a:prstGeom>
+          <a:noFill/>
+        </p:spPr>
+        <p:txBody>
+          <a:bodyPr wrap="none" lIns="45720" rIns="45720" tIns="18288" bIns="18288" anchor="ctr">
+            <a:noAutofit/>
+          </a:bodyPr>
+          <a:lstStyle/>
+          <a:p>
+            <a:pPr algn="l"/>
+            <a:r>
+              <a:rPr sz="2180" b="0" i="0">
                 <a:solidFill>
                   <a:srgbClr val="1A1A1A"/>
                 </a:solidFill>
                 <a:latin typeface="Lexend"/>
               </a:rPr>
-              <a:t>1 kg = 2.204 lb. How many pounds is 25 kg?</a:t>
-            </a:r>
-          </a:p>
-        </p:txBody>
-      </p:sp>
-      <p:sp>
-        <p:nvSpPr>
-          <p:cNvPr id="12" name="TextBox 11"/>
-          <p:cNvSpPr txBox="1"/>
-          <p:nvPr/>
-        </p:nvSpPr>
-        <p:spPr>
-          <a:xfrm>
-            <a:off x="960120" y="2578608"/>
-            <a:ext cx="548640" cy="356616"/>
-          </a:xfrm>
-          <a:prstGeom prst="rect">
-            <a:avLst/>
-          </a:prstGeom>
-          <a:noFill/>
-        </p:spPr>
-        <p:txBody>
-          <a:bodyPr wrap="square" lIns="45720" rIns="45720" tIns="18288" bIns="18288" anchor="t">
+              <a:t>. How many square inches is </a:t>
+            </a:r>
+          </a:p>
+        </p:txBody>
+      </p:sp>
+      <p:pic>
+        <p:nvPicPr>
+          <p:cNvPr id="20" name="Picture 19" descr="fd3f0498ea874b60.png"/>
+          <p:cNvPicPr>
+            <a:picLocks noChangeAspect="1"/>
+          </p:cNvPicPr>
+          <p:nvPr/>
+        </p:nvPicPr>
+        <p:blipFill>
+          <a:blip r:embed="rId6"/>
+          <a:stretch>
+            <a:fillRect/>
+          </a:stretch>
+        </p:blipFill>
+        <p:spPr>
+          <a:xfrm>
+            <a:off x="7144744" y="3369563"/>
+            <a:ext cx="573024" cy="274320"/>
+          </a:xfrm>
+          <a:prstGeom prst="rect">
+            <a:avLst/>
+          </a:prstGeom>
+        </p:spPr>
+      </p:pic>
+      <p:sp>
+        <p:nvSpPr>
+          <p:cNvPr id="21" name="TextBox 20"/>
+          <p:cNvSpPr txBox="1"/>
+          <p:nvPr/>
+        </p:nvSpPr>
+        <p:spPr>
+          <a:xfrm>
+            <a:off x="7717768" y="3278123"/>
+            <a:ext cx="360631" cy="457200"/>
+          </a:xfrm>
+          <a:prstGeom prst="rect">
+            <a:avLst/>
+          </a:prstGeom>
+          <a:noFill/>
+        </p:spPr>
+        <p:txBody>
+          <a:bodyPr wrap="none" lIns="45720" rIns="45720" tIns="18288" bIns="18288" anchor="ctr">
+            <a:noAutofit/>
+          </a:bodyPr>
+          <a:lstStyle/>
+          <a:p>
+            <a:pPr algn="l"/>
+            <a:r>
+              <a:rPr sz="2180" b="0" i="0">
+                <a:solidFill>
+                  <a:srgbClr val="1A1A1A"/>
+                </a:solidFill>
+                <a:latin typeface="Lexend"/>
+              </a:rPr>
+              <a:t>?</a:t>
+            </a:r>
+          </a:p>
+        </p:txBody>
+      </p:sp>
+      <p:sp>
+        <p:nvSpPr>
+          <p:cNvPr id="22" name="TextBox 21"/>
+          <p:cNvSpPr txBox="1"/>
+          <p:nvPr/>
+        </p:nvSpPr>
+        <p:spPr>
+          <a:xfrm>
+            <a:off x="960120" y="3872483"/>
+            <a:ext cx="548640" cy="457200"/>
+          </a:xfrm>
+          <a:prstGeom prst="rect">
+            <a:avLst/>
+          </a:prstGeom>
+          <a:noFill/>
+        </p:spPr>
+        <p:txBody>
+          <a:bodyPr wrap="square" lIns="45720" rIns="45720" tIns="18288" bIns="18288" anchor="ctr">
             <a:spAutoFit/>
           </a:bodyPr>
           <a:lstStyle/>
           <a:p>
             <a:pPr algn="l"/>
             <a:r>
-              <a:rPr sz="1810" b="1" i="0">
+              <a:rPr sz="2180" b="1" i="0">
                 <a:solidFill>
                   <a:srgbClr val="0B5394"/>
                 </a:solidFill>
                 <a:latin typeface="Lexend"/>
               </a:rPr>
-              <a:t>3.</a:t>
-            </a:r>
-          </a:p>
-        </p:txBody>
-      </p:sp>
-      <p:sp>
-        <p:nvSpPr>
-          <p:cNvPr id="13" name="TextBox 12"/>
-          <p:cNvSpPr txBox="1"/>
-          <p:nvPr/>
-        </p:nvSpPr>
-        <p:spPr>
-          <a:xfrm>
-            <a:off x="1554480" y="2578608"/>
-            <a:ext cx="9829800" cy="411480"/>
-          </a:xfrm>
-          <a:prstGeom prst="rect">
-            <a:avLst/>
-          </a:prstGeom>
-          <a:noFill/>
-        </p:spPr>
-        <p:txBody>
-          <a:bodyPr wrap="square" lIns="45720" rIns="45720" tIns="18288" bIns="18288" anchor="t">
+              <a:t>5.</a:t>
+            </a:r>
+          </a:p>
+        </p:txBody>
+      </p:sp>
+      <p:pic>
+        <p:nvPicPr>
+          <p:cNvPr id="23" name="Picture 22" descr="53fb1d19ce360046.png"/>
+          <p:cNvPicPr>
+            <a:picLocks noChangeAspect="1"/>
+          </p:cNvPicPr>
+          <p:nvPr/>
+        </p:nvPicPr>
+        <p:blipFill>
+          <a:blip r:embed="rId7"/>
+          <a:stretch>
+            <a:fillRect/>
+          </a:stretch>
+        </p:blipFill>
+        <p:spPr>
+          <a:xfrm>
+            <a:off x="1627632" y="3983736"/>
+            <a:ext cx="1493520" cy="234696"/>
+          </a:xfrm>
+          <a:prstGeom prst="rect">
+            <a:avLst/>
+          </a:prstGeom>
+        </p:spPr>
+      </p:pic>
+      <p:sp>
+        <p:nvSpPr>
+          <p:cNvPr id="24" name="TextBox 23"/>
+          <p:cNvSpPr txBox="1"/>
+          <p:nvPr/>
+        </p:nvSpPr>
+        <p:spPr>
+          <a:xfrm>
+            <a:off x="3121152" y="3872483"/>
+            <a:ext cx="922743" cy="457200"/>
+          </a:xfrm>
+          <a:prstGeom prst="rect">
+            <a:avLst/>
+          </a:prstGeom>
+          <a:noFill/>
+        </p:spPr>
+        <p:txBody>
+          <a:bodyPr wrap="none" lIns="45720" rIns="45720" tIns="18288" bIns="18288" anchor="ctr">
+            <a:noAutofit/>
+          </a:bodyPr>
+          <a:lstStyle/>
+          <a:p>
+            <a:pPr algn="l"/>
+            <a:r>
+              <a:rPr sz="2180" b="0" i="0">
+                <a:solidFill>
+                  <a:srgbClr val="1A1A1A"/>
+                </a:solidFill>
+                <a:latin typeface="Lexend"/>
+              </a:rPr>
+              <a:t> and </a:t>
+            </a:r>
+          </a:p>
+        </p:txBody>
+      </p:sp>
+      <p:pic>
+        <p:nvPicPr>
+          <p:cNvPr id="25" name="Picture 24" descr="aae6846e2fca6d95.png"/>
+          <p:cNvPicPr>
+            <a:picLocks noChangeAspect="1"/>
+          </p:cNvPicPr>
+          <p:nvPr/>
+        </p:nvPicPr>
+        <p:blipFill>
+          <a:blip r:embed="rId8"/>
+          <a:stretch>
+            <a:fillRect/>
+          </a:stretch>
+        </p:blipFill>
+        <p:spPr>
+          <a:xfrm>
+            <a:off x="3906735" y="3988307"/>
+            <a:ext cx="1484376" cy="225552"/>
+          </a:xfrm>
+          <a:prstGeom prst="rect">
+            <a:avLst/>
+          </a:prstGeom>
+        </p:spPr>
+      </p:pic>
+      <p:sp>
+        <p:nvSpPr>
+          <p:cNvPr id="26" name="TextBox 25"/>
+          <p:cNvSpPr txBox="1"/>
+          <p:nvPr/>
+        </p:nvSpPr>
+        <p:spPr>
+          <a:xfrm>
+            <a:off x="5391111" y="3872483"/>
+            <a:ext cx="4209041" cy="457200"/>
+          </a:xfrm>
+          <a:prstGeom prst="rect">
+            <a:avLst/>
+          </a:prstGeom>
+          <a:noFill/>
+        </p:spPr>
+        <p:txBody>
+          <a:bodyPr wrap="none" lIns="45720" rIns="45720" tIns="18288" bIns="18288" anchor="ctr">
+            <a:noAutofit/>
+          </a:bodyPr>
+          <a:lstStyle/>
+          <a:p>
+            <a:pPr algn="l"/>
+            <a:r>
+              <a:rPr sz="2180" b="0" i="0">
+                <a:solidFill>
+                  <a:srgbClr val="1A1A1A"/>
+                </a:solidFill>
+                <a:latin typeface="Lexend"/>
+              </a:rPr>
+              <a:t>. How many liters is 24 fl oz?</a:t>
+            </a:r>
+          </a:p>
+        </p:txBody>
+      </p:sp>
+      <p:sp>
+        <p:nvSpPr>
+          <p:cNvPr id="27" name="TextBox 26"/>
+          <p:cNvSpPr txBox="1"/>
+          <p:nvPr/>
+        </p:nvSpPr>
+        <p:spPr>
+          <a:xfrm>
+            <a:off x="960120" y="4466844"/>
+            <a:ext cx="548640" cy="457200"/>
+          </a:xfrm>
+          <a:prstGeom prst="rect">
+            <a:avLst/>
+          </a:prstGeom>
+          <a:noFill/>
+        </p:spPr>
+        <p:txBody>
+          <a:bodyPr wrap="square" lIns="45720" rIns="45720" tIns="18288" bIns="18288" anchor="ctr">
             <a:spAutoFit/>
           </a:bodyPr>
           <a:lstStyle/>
           <a:p>
             <a:pPr algn="l"/>
             <a:r>
-              <a:rPr sz="1810" b="0" i="0">
+              <a:rPr sz="2180" b="1" i="0">
+                <a:solidFill>
+                  <a:srgbClr val="0B5394"/>
+                </a:solidFill>
+                <a:latin typeface="Lexend"/>
+              </a:rPr>
+              <a:t>6.</a:t>
+            </a:r>
+          </a:p>
+        </p:txBody>
+      </p:sp>
+      <p:pic>
+        <p:nvPicPr>
+          <p:cNvPr id="28" name="Picture 27" descr="c79700df5a23d6de.png"/>
+          <p:cNvPicPr>
+            <a:picLocks noChangeAspect="1"/>
+          </p:cNvPicPr>
+          <p:nvPr/>
+        </p:nvPicPr>
+        <p:blipFill>
+          <a:blip r:embed="rId9"/>
+          <a:stretch>
+            <a:fillRect/>
+          </a:stretch>
+        </p:blipFill>
+        <p:spPr>
+          <a:xfrm>
+            <a:off x="1627632" y="4578096"/>
+            <a:ext cx="1828800" cy="234696"/>
+          </a:xfrm>
+          <a:prstGeom prst="rect">
+            <a:avLst/>
+          </a:prstGeom>
+        </p:spPr>
+      </p:pic>
+      <p:sp>
+        <p:nvSpPr>
+          <p:cNvPr id="29" name="TextBox 28"/>
+          <p:cNvSpPr txBox="1"/>
+          <p:nvPr/>
+        </p:nvSpPr>
+        <p:spPr>
+          <a:xfrm>
+            <a:off x="3456432" y="4466844"/>
+            <a:ext cx="4391233" cy="457200"/>
+          </a:xfrm>
+          <a:prstGeom prst="rect">
+            <a:avLst/>
+          </a:prstGeom>
+          <a:noFill/>
+        </p:spPr>
+        <p:txBody>
+          <a:bodyPr wrap="none" lIns="45720" rIns="45720" tIns="18288" bIns="18288" anchor="ctr">
+            <a:noAutofit/>
+          </a:bodyPr>
+          <a:lstStyle/>
+          <a:p>
+            <a:pPr algn="l"/>
+            <a:r>
+              <a:rPr sz="2180" b="0" i="0">
                 <a:solidFill>
                   <a:srgbClr val="1A1A1A"/>
                 </a:solidFill>
                 <a:latin typeface="Lexend"/>
               </a:rPr>
-              <a:t>1 gal = 3.785 L. How many liters is 6 gal?</a:t>
-            </a:r>
-          </a:p>
-        </p:txBody>
-      </p:sp>
-      <p:sp>
-        <p:nvSpPr>
-          <p:cNvPr id="14" name="TextBox 13"/>
-          <p:cNvSpPr txBox="1"/>
-          <p:nvPr/>
-        </p:nvSpPr>
-        <p:spPr>
-          <a:xfrm>
-            <a:off x="960120" y="3081528"/>
-            <a:ext cx="548640" cy="356616"/>
-          </a:xfrm>
-          <a:prstGeom prst="rect">
-            <a:avLst/>
-          </a:prstGeom>
-          <a:noFill/>
-        </p:spPr>
-        <p:txBody>
-          <a:bodyPr wrap="square" lIns="45720" rIns="45720" tIns="18288" bIns="18288" anchor="t">
-            <a:spAutoFit/>
-          </a:bodyPr>
-          <a:lstStyle/>
-          <a:p>
-            <a:pPr algn="l"/>
-            <a:r>
-              <a:rPr sz="1810" b="1" i="0">
-                <a:solidFill>
-                  <a:srgbClr val="0B5394"/>
-                </a:solidFill>
-                <a:latin typeface="Lexend"/>
-              </a:rPr>
-              <a:t>4.</a:t>
-            </a:r>
-          </a:p>
-        </p:txBody>
-      </p:sp>
-      <p:sp>
-        <p:nvSpPr>
-          <p:cNvPr id="15" name="TextBox 14"/>
-          <p:cNvSpPr txBox="1"/>
-          <p:nvPr/>
-        </p:nvSpPr>
-        <p:spPr>
-          <a:xfrm>
-            <a:off x="1554480" y="3081528"/>
-            <a:ext cx="9829800" cy="411480"/>
-          </a:xfrm>
-          <a:prstGeom prst="rect">
-            <a:avLst/>
-          </a:prstGeom>
-          <a:noFill/>
-        </p:spPr>
-        <p:txBody>
-          <a:bodyPr wrap="square" lIns="45720" rIns="45720" tIns="18288" bIns="18288" anchor="t">
-            <a:spAutoFit/>
-          </a:bodyPr>
-          <a:lstStyle/>
-          <a:p>
-            <a:pPr algn="l"/>
-            <a:r>
-              <a:rPr sz="1810" b="0" i="0">
+              <a:t>. How many square meters is </a:t>
+            </a:r>
+          </a:p>
+        </p:txBody>
+      </p:sp>
+      <p:pic>
+        <p:nvPicPr>
+          <p:cNvPr id="30" name="Picture 29" descr="aa3a1dcc642825fd.png"/>
+          <p:cNvPicPr>
+            <a:picLocks noChangeAspect="1"/>
+          </p:cNvPicPr>
+          <p:nvPr/>
+        </p:nvPicPr>
+        <p:blipFill>
+          <a:blip r:embed="rId10"/>
+          <a:stretch>
+            <a:fillRect/>
+          </a:stretch>
+        </p:blipFill>
+        <p:spPr>
+          <a:xfrm>
+            <a:off x="7710505" y="4556760"/>
+            <a:ext cx="758952" cy="277368"/>
+          </a:xfrm>
+          <a:prstGeom prst="rect">
+            <a:avLst/>
+          </a:prstGeom>
+        </p:spPr>
+      </p:pic>
+      <p:sp>
+        <p:nvSpPr>
+          <p:cNvPr id="31" name="TextBox 30"/>
+          <p:cNvSpPr txBox="1"/>
+          <p:nvPr/>
+        </p:nvSpPr>
+        <p:spPr>
+          <a:xfrm>
+            <a:off x="8469457" y="4466844"/>
+            <a:ext cx="2533795" cy="457200"/>
+          </a:xfrm>
+          <a:prstGeom prst="rect">
+            <a:avLst/>
+          </a:prstGeom>
+          <a:noFill/>
+        </p:spPr>
+        <p:txBody>
+          <a:bodyPr wrap="none" lIns="45720" rIns="45720" tIns="18288" bIns="18288" anchor="ctr">
+            <a:noAutofit/>
+          </a:bodyPr>
+          <a:lstStyle/>
+          <a:p>
+            <a:pPr algn="l"/>
+            <a:r>
+              <a:rPr sz="2180" b="0" i="0">
                 <a:solidFill>
                   <a:srgbClr val="1A1A1A"/>
                 </a:solidFill>
                 <a:latin typeface="Lexend"/>
               </a:rPr>
-              <a:t>1 ft = 12 in. How many square inches is 9 ft</a:t>
-            </a:r>
-            <a:r>
-              <a:rPr sz="1810" b="0" i="0" baseline="30000">
+              <a:t>? (Round to two </a:t>
+            </a:r>
+          </a:p>
+        </p:txBody>
+      </p:sp>
+      <p:sp>
+        <p:nvSpPr>
+          <p:cNvPr id="32" name="TextBox 31"/>
+          <p:cNvSpPr txBox="1"/>
+          <p:nvPr/>
+        </p:nvSpPr>
+        <p:spPr>
+          <a:xfrm>
+            <a:off x="1554480" y="4905756"/>
+            <a:ext cx="1298267" cy="457200"/>
+          </a:xfrm>
+          <a:prstGeom prst="rect">
+            <a:avLst/>
+          </a:prstGeom>
+          <a:noFill/>
+        </p:spPr>
+        <p:txBody>
+          <a:bodyPr wrap="none" lIns="45720" rIns="45720" tIns="18288" bIns="18288" anchor="ctr">
+            <a:noAutofit/>
+          </a:bodyPr>
+          <a:lstStyle/>
+          <a:p>
+            <a:pPr algn="l"/>
+            <a:r>
+              <a:rPr sz="2180" b="0" i="0">
                 <a:solidFill>
                   <a:srgbClr val="1A1A1A"/>
                 </a:solidFill>
                 <a:latin typeface="Lexend"/>
               </a:rPr>
-              <a:t>2</a:t>
-            </a:r>
-            <a:r>
-              <a:rPr sz="1810" b="0" i="0">
-                <a:solidFill>
-                  <a:srgbClr val="1A1A1A"/>
-                </a:solidFill>
-                <a:latin typeface="Lexend"/>
-              </a:rPr>
-              <a:t>?</a:t>
-            </a:r>
-          </a:p>
-        </p:txBody>
-      </p:sp>
-      <p:sp>
-        <p:nvSpPr>
-          <p:cNvPr id="16" name="TextBox 15"/>
-          <p:cNvSpPr txBox="1"/>
-          <p:nvPr/>
-        </p:nvSpPr>
-        <p:spPr>
-          <a:xfrm>
-            <a:off x="960120" y="3584448"/>
-            <a:ext cx="548640" cy="356616"/>
-          </a:xfrm>
-          <a:prstGeom prst="rect">
-            <a:avLst/>
-          </a:prstGeom>
-          <a:noFill/>
-        </p:spPr>
-        <p:txBody>
-          <a:bodyPr wrap="square" lIns="45720" rIns="45720" tIns="18288" bIns="18288" anchor="t">
-            <a:spAutoFit/>
-          </a:bodyPr>
-          <a:lstStyle/>
-          <a:p>
-            <a:pPr algn="l"/>
-            <a:r>
-              <a:rPr sz="1810" b="1" i="0">
-                <a:solidFill>
-                  <a:srgbClr val="0B5394"/>
-                </a:solidFill>
-                <a:latin typeface="Lexend"/>
-              </a:rPr>
-              <a:t>5.</a:t>
-            </a:r>
-          </a:p>
-        </p:txBody>
-      </p:sp>
-      <p:sp>
-        <p:nvSpPr>
-          <p:cNvPr id="17" name="TextBox 16"/>
-          <p:cNvSpPr txBox="1"/>
-          <p:nvPr/>
-        </p:nvSpPr>
-        <p:spPr>
-          <a:xfrm>
-            <a:off x="1554480" y="3584448"/>
-            <a:ext cx="9829800" cy="411480"/>
-          </a:xfrm>
-          <a:prstGeom prst="rect">
-            <a:avLst/>
-          </a:prstGeom>
-          <a:noFill/>
-        </p:spPr>
-        <p:txBody>
-          <a:bodyPr wrap="square" lIns="45720" rIns="45720" tIns="18288" bIns="18288" anchor="t">
-            <a:spAutoFit/>
-          </a:bodyPr>
-          <a:lstStyle/>
-          <a:p>
-            <a:pPr algn="l"/>
-            <a:r>
-              <a:rPr sz="1810" b="0" i="0">
-                <a:solidFill>
-                  <a:srgbClr val="1A1A1A"/>
-                </a:solidFill>
-                <a:latin typeface="Lexend"/>
-              </a:rPr>
-              <a:t>1 c = 8 fl oz and 1 c = 0.24 L. How many liters is 24 fl oz?</a:t>
-            </a:r>
-          </a:p>
-        </p:txBody>
-      </p:sp>
-      <p:sp>
-        <p:nvSpPr>
-          <p:cNvPr id="18" name="TextBox 17"/>
-          <p:cNvSpPr txBox="1"/>
-          <p:nvPr/>
-        </p:nvSpPr>
-        <p:spPr>
-          <a:xfrm>
-            <a:off x="960120" y="4087368"/>
-            <a:ext cx="548640" cy="356616"/>
-          </a:xfrm>
-          <a:prstGeom prst="rect">
-            <a:avLst/>
-          </a:prstGeom>
-          <a:noFill/>
-        </p:spPr>
-        <p:txBody>
-          <a:bodyPr wrap="square" lIns="45720" rIns="45720" tIns="18288" bIns="18288" anchor="t">
-            <a:spAutoFit/>
-          </a:bodyPr>
-          <a:lstStyle/>
-          <a:p>
-            <a:pPr algn="l"/>
-            <a:r>
-              <a:rPr sz="1810" b="1" i="0">
-                <a:solidFill>
-                  <a:srgbClr val="0B5394"/>
-                </a:solidFill>
-                <a:latin typeface="Lexend"/>
-              </a:rPr>
-              <a:t>6.</a:t>
-            </a:r>
-          </a:p>
-        </p:txBody>
-      </p:sp>
-      <p:sp>
-        <p:nvSpPr>
-          <p:cNvPr id="19" name="TextBox 18"/>
-          <p:cNvSpPr txBox="1"/>
-          <p:nvPr/>
-        </p:nvSpPr>
-        <p:spPr>
-          <a:xfrm>
-            <a:off x="1554480" y="4087368"/>
-            <a:ext cx="9829800" cy="411480"/>
-          </a:xfrm>
-          <a:prstGeom prst="rect">
-            <a:avLst/>
-          </a:prstGeom>
-          <a:noFill/>
-        </p:spPr>
-        <p:txBody>
-          <a:bodyPr wrap="square" lIns="45720" rIns="45720" tIns="18288" bIns="18288" anchor="t">
-            <a:spAutoFit/>
-          </a:bodyPr>
-          <a:lstStyle/>
-          <a:p>
-            <a:pPr algn="l"/>
-            <a:r>
-              <a:rPr sz="1810" b="0" i="0">
-                <a:solidFill>
-                  <a:srgbClr val="1A1A1A"/>
-                </a:solidFill>
-                <a:latin typeface="Lexend"/>
-              </a:rPr>
-              <a:t>1 ft = 0.305 m. How many square meters is 30 ft</a:t>
-            </a:r>
-            <a:r>
-              <a:rPr sz="1810" b="0" i="0" baseline="30000">
-                <a:solidFill>
-                  <a:srgbClr val="1A1A1A"/>
-                </a:solidFill>
-                <a:latin typeface="Lexend"/>
-              </a:rPr>
-              <a:t>2</a:t>
-            </a:r>
-            <a:r>
-              <a:rPr sz="1810" b="0" i="0">
-                <a:solidFill>
-                  <a:srgbClr val="1A1A1A"/>
-                </a:solidFill>
-                <a:latin typeface="Lexend"/>
-              </a:rPr>
-              <a:t>? (Round to two places.)</a:t>
+              <a:t>places.)</a:t>
             </a:r>
           </a:p>
         </p:txBody>
@@ -15005,7 +17350,7 @@
         <p:spPr>
           <a:xfrm>
             <a:off x="777240" y="1463040"/>
-            <a:ext cx="10607040" cy="393589"/>
+            <a:ext cx="10607040" cy="357808"/>
           </a:xfrm>
           <a:prstGeom prst="rect">
             <a:avLst/>
@@ -15020,7 +17365,7 @@
           <a:p>
             <a:pPr algn="l"/>
             <a:r>
-              <a:rPr sz="2090" b="1" i="0">
+              <a:rPr sz="1900" b="1" i="0">
                 <a:solidFill>
                   <a:srgbClr val="0B5394"/>
                 </a:solidFill>
@@ -15039,8 +17384,8 @@
         </p:nvSpPr>
         <p:spPr>
           <a:xfrm>
-            <a:off x="1143000" y="1856629"/>
-            <a:ext cx="10241280" cy="357808"/>
+            <a:off x="1143000" y="1820848"/>
+            <a:ext cx="10241280" cy="322027"/>
           </a:xfrm>
           <a:prstGeom prst="rect">
             <a:avLst/>
@@ -15055,7 +17400,7 @@
           <a:p>
             <a:pPr algn="l"/>
             <a:r>
-              <a:rPr sz="1900" b="0" i="0">
+              <a:rPr sz="1710" b="0" i="0">
                 <a:solidFill>
                   <a:srgbClr val="1A1A1A"/>
                 </a:solidFill>
@@ -15074,8 +17419,8 @@
         </p:nvSpPr>
         <p:spPr>
           <a:xfrm>
-            <a:off x="777240" y="2452182"/>
-            <a:ext cx="10607040" cy="393589"/>
+            <a:off x="777240" y="2380620"/>
+            <a:ext cx="10607040" cy="357808"/>
           </a:xfrm>
           <a:prstGeom prst="rect">
             <a:avLst/>
@@ -15090,7 +17435,7 @@
           <a:p>
             <a:pPr algn="l"/>
             <a:r>
-              <a:rPr sz="2090" b="1" i="0">
+              <a:rPr sz="1900" b="1" i="0">
                 <a:solidFill>
                   <a:srgbClr val="0B5394"/>
                 </a:solidFill>
@@ -15109,8 +17454,126 @@
         </p:nvSpPr>
         <p:spPr>
           <a:xfrm>
-            <a:off x="1143000" y="2845771"/>
-            <a:ext cx="10241280" cy="357808"/>
+            <a:off x="1143000" y="2715569"/>
+            <a:ext cx="1291773" cy="457200"/>
+          </a:xfrm>
+          <a:prstGeom prst="rect">
+            <a:avLst/>
+          </a:prstGeom>
+          <a:noFill/>
+        </p:spPr>
+        <p:txBody>
+          <a:bodyPr wrap="none" lIns="45720" rIns="45720" tIns="18288" bIns="18288" anchor="ctr">
+            <a:noAutofit/>
+          </a:bodyPr>
+          <a:lstStyle/>
+          <a:p>
+            <a:pPr algn="l"/>
+            <a:r>
+              <a:rPr sz="1710" b="0" i="0">
+                <a:solidFill>
+                  <a:srgbClr val="1A1A1A"/>
+                </a:solidFill>
+                <a:latin typeface="Lexend"/>
+              </a:rPr>
+              <a:t>a weight: </a:t>
+            </a:r>
+          </a:p>
+        </p:txBody>
+      </p:sp>
+      <p:pic>
+        <p:nvPicPr>
+          <p:cNvPr id="12" name="Picture 11" descr="74807a5fc79ce2f9.png"/>
+          <p:cNvPicPr>
+            <a:picLocks noChangeAspect="1"/>
+          </p:cNvPicPr>
+          <p:nvPr/>
+        </p:nvPicPr>
+        <p:blipFill>
+          <a:blip r:embed="rId2"/>
+          <a:stretch>
+            <a:fillRect/>
+          </a:stretch>
+        </p:blipFill>
+        <p:spPr>
+          <a:xfrm>
+            <a:off x="2297613" y="2746430"/>
+            <a:ext cx="1792224" cy="289560"/>
+          </a:xfrm>
+          <a:prstGeom prst="rect">
+            <a:avLst/>
+          </a:prstGeom>
+        </p:spPr>
+      </p:pic>
+      <p:sp>
+        <p:nvSpPr>
+          <p:cNvPr id="13" name="TextBox 12"/>
+          <p:cNvSpPr txBox="1"/>
+          <p:nvPr/>
+        </p:nvSpPr>
+        <p:spPr>
+          <a:xfrm>
+            <a:off x="4089837" y="2715569"/>
+            <a:ext cx="336202" cy="457200"/>
+          </a:xfrm>
+          <a:prstGeom prst="rect">
+            <a:avLst/>
+          </a:prstGeom>
+          <a:noFill/>
+        </p:spPr>
+        <p:txBody>
+          <a:bodyPr wrap="none" lIns="45720" rIns="45720" tIns="18288" bIns="18288" anchor="ctr">
+            <a:noAutofit/>
+          </a:bodyPr>
+          <a:lstStyle/>
+          <a:p>
+            <a:pPr algn="l"/>
+            <a:r>
+              <a:rPr sz="1710" b="0" i="0">
+                <a:solidFill>
+                  <a:srgbClr val="1A1A1A"/>
+                </a:solidFill>
+                <a:latin typeface="Lexend"/>
+              </a:rPr>
+              <a:t>, </a:t>
+            </a:r>
+          </a:p>
+        </p:txBody>
+      </p:sp>
+      <p:pic>
+        <p:nvPicPr>
+          <p:cNvPr id="14" name="Picture 13" descr="f9a4b27b19922618.png"/>
+          <p:cNvPicPr>
+            <a:picLocks noChangeAspect="1"/>
+          </p:cNvPicPr>
+          <p:nvPr/>
+        </p:nvPicPr>
+        <p:blipFill>
+          <a:blip r:embed="rId3"/>
+          <a:stretch>
+            <a:fillRect/>
+          </a:stretch>
+        </p:blipFill>
+        <p:spPr>
+          <a:xfrm>
+            <a:off x="4288880" y="2758622"/>
+            <a:ext cx="2234184" cy="362712"/>
+          </a:xfrm>
+          <a:prstGeom prst="rect">
+            <a:avLst/>
+          </a:prstGeom>
+        </p:spPr>
+      </p:pic>
+      <p:sp>
+        <p:nvSpPr>
+          <p:cNvPr id="15" name="TextBox 14"/>
+          <p:cNvSpPr txBox="1"/>
+          <p:nvPr/>
+        </p:nvSpPr>
+        <p:spPr>
+          <a:xfrm>
+            <a:off x="777240" y="3351077"/>
+            <a:ext cx="10607040" cy="357808"/>
           </a:xfrm>
           <a:prstGeom prst="rect">
             <a:avLst/>
@@ -15125,27 +17588,121 @@
           <a:p>
             <a:pPr algn="l"/>
             <a:r>
-              <a:rPr sz="1900" b="0" i="0">
+              <a:rPr sz="1900" b="1" i="0">
+                <a:solidFill>
+                  <a:srgbClr val="0B5394"/>
+                </a:solidFill>
+                <a:latin typeface="Lexend"/>
+              </a:rPr>
+              <a:t>fluid ounce (fl oz)</a:t>
+            </a:r>
+          </a:p>
+        </p:txBody>
+      </p:sp>
+      <p:sp>
+        <p:nvSpPr>
+          <p:cNvPr id="16" name="TextBox 15"/>
+          <p:cNvSpPr txBox="1"/>
+          <p:nvPr/>
+        </p:nvSpPr>
+        <p:spPr>
+          <a:xfrm>
+            <a:off x="1143000" y="3686025"/>
+            <a:ext cx="1350272" cy="457200"/>
+          </a:xfrm>
+          <a:prstGeom prst="rect">
+            <a:avLst/>
+          </a:prstGeom>
+          <a:noFill/>
+        </p:spPr>
+        <p:txBody>
+          <a:bodyPr wrap="none" lIns="45720" rIns="45720" tIns="18288" bIns="18288" anchor="ctr">
+            <a:noAutofit/>
+          </a:bodyPr>
+          <a:lstStyle/>
+          <a:p>
+            <a:pPr algn="l"/>
+            <a:r>
+              <a:rPr sz="1710" b="0" i="0">
                 <a:solidFill>
                   <a:srgbClr val="1A1A1A"/>
                 </a:solidFill>
                 <a:latin typeface="Lexend"/>
               </a:rPr>
-              <a:t>a weight: 1 lb = 16 oz, 1 oz = 28.35 g</a:t>
-            </a:r>
-          </a:p>
-        </p:txBody>
-      </p:sp>
-      <p:sp>
-        <p:nvSpPr>
-          <p:cNvPr id="12" name="TextBox 11"/>
-          <p:cNvSpPr txBox="1"/>
-          <p:nvPr/>
-        </p:nvSpPr>
-        <p:spPr>
-          <a:xfrm>
-            <a:off x="777240" y="3441324"/>
-            <a:ext cx="10607040" cy="393589"/>
+              <a:t>a volume: </a:t>
+            </a:r>
+          </a:p>
+        </p:txBody>
+      </p:sp>
+      <p:pic>
+        <p:nvPicPr>
+          <p:cNvPr id="17" name="Picture 16" descr="ae0de4c5e0776520.png"/>
+          <p:cNvPicPr>
+            <a:picLocks noChangeAspect="1"/>
+          </p:cNvPicPr>
+          <p:nvPr/>
+        </p:nvPicPr>
+        <p:blipFill>
+          <a:blip r:embed="rId4"/>
+          <a:stretch>
+            <a:fillRect/>
+          </a:stretch>
+        </p:blipFill>
+        <p:spPr>
+          <a:xfrm>
+            <a:off x="2356112" y="3716886"/>
+            <a:ext cx="1831848" cy="289560"/>
+          </a:xfrm>
+          <a:prstGeom prst="rect">
+            <a:avLst/>
+          </a:prstGeom>
+        </p:spPr>
+      </p:pic>
+      <p:sp>
+        <p:nvSpPr>
+          <p:cNvPr id="18" name="TextBox 17"/>
+          <p:cNvSpPr txBox="1"/>
+          <p:nvPr/>
+        </p:nvSpPr>
+        <p:spPr>
+          <a:xfrm>
+            <a:off x="4187960" y="3686025"/>
+            <a:ext cx="3976443" cy="457200"/>
+          </a:xfrm>
+          <a:prstGeom prst="rect">
+            <a:avLst/>
+          </a:prstGeom>
+          <a:noFill/>
+        </p:spPr>
+        <p:txBody>
+          <a:bodyPr wrap="none" lIns="45720" rIns="45720" tIns="18288" bIns="18288" anchor="ctr">
+            <a:noAutofit/>
+          </a:bodyPr>
+          <a:lstStyle/>
+          <a:p>
+            <a:pPr algn="l"/>
+            <a:r>
+              <a:rPr sz="1710" b="0" i="0">
+                <a:solidFill>
+                  <a:srgbClr val="1A1A1A"/>
+                </a:solidFill>
+                <a:latin typeface="Lexend"/>
+              </a:rPr>
+              <a:t> — not the same unit as the ounce</a:t>
+            </a:r>
+          </a:p>
+        </p:txBody>
+      </p:sp>
+      <p:sp>
+        <p:nvSpPr>
+          <p:cNvPr id="19" name="TextBox 18"/>
+          <p:cNvSpPr txBox="1"/>
+          <p:nvPr/>
+        </p:nvSpPr>
+        <p:spPr>
+          <a:xfrm>
+            <a:off x="777240" y="4321533"/>
+            <a:ext cx="10607040" cy="357808"/>
           </a:xfrm>
           <a:prstGeom prst="rect">
             <a:avLst/>
@@ -15160,27 +17717,204 @@
           <a:p>
             <a:pPr algn="l"/>
             <a:r>
-              <a:rPr sz="2090" b="1" i="0">
+              <a:rPr sz="1900" b="1" i="0">
                 <a:solidFill>
                   <a:srgbClr val="0B5394"/>
                 </a:solidFill>
                 <a:latin typeface="Lexend"/>
               </a:rPr>
-              <a:t>fluid ounce (fl oz)</a:t>
-            </a:r>
-          </a:p>
-        </p:txBody>
-      </p:sp>
-      <p:sp>
-        <p:nvSpPr>
-          <p:cNvPr id="13" name="TextBox 12"/>
-          <p:cNvSpPr txBox="1"/>
-          <p:nvPr/>
-        </p:nvSpPr>
-        <p:spPr>
-          <a:xfrm>
-            <a:off x="1143000" y="3834914"/>
-            <a:ext cx="10241280" cy="357808"/>
+              <a:t>square units</a:t>
+            </a:r>
+          </a:p>
+        </p:txBody>
+      </p:sp>
+      <p:pic>
+        <p:nvPicPr>
+          <p:cNvPr id="20" name="Picture 19" descr="6bd260b1d893cf5b.png"/>
+          <p:cNvPicPr>
+            <a:picLocks noChangeAspect="1"/>
+          </p:cNvPicPr>
+          <p:nvPr/>
+        </p:nvPicPr>
+        <p:blipFill>
+          <a:blip r:embed="rId5"/>
+          <a:stretch>
+            <a:fillRect/>
+          </a:stretch>
+        </p:blipFill>
+        <p:spPr>
+          <a:xfrm>
+            <a:off x="1143000" y="4679342"/>
+            <a:ext cx="399288" cy="304800"/>
+          </a:xfrm>
+          <a:prstGeom prst="rect">
+            <a:avLst/>
+          </a:prstGeom>
+        </p:spPr>
+      </p:pic>
+      <p:sp>
+        <p:nvSpPr>
+          <p:cNvPr id="21" name="TextBox 20"/>
+          <p:cNvSpPr txBox="1"/>
+          <p:nvPr/>
+        </p:nvSpPr>
+        <p:spPr>
+          <a:xfrm>
+            <a:off x="1542287" y="4656482"/>
+            <a:ext cx="336202" cy="457200"/>
+          </a:xfrm>
+          <a:prstGeom prst="rect">
+            <a:avLst/>
+          </a:prstGeom>
+          <a:noFill/>
+        </p:spPr>
+        <p:txBody>
+          <a:bodyPr wrap="none" lIns="45720" rIns="45720" tIns="18288" bIns="18288" anchor="ctr">
+            <a:noAutofit/>
+          </a:bodyPr>
+          <a:lstStyle/>
+          <a:p>
+            <a:pPr algn="l"/>
+            <a:r>
+              <a:rPr sz="1710" b="0" i="0">
+                <a:solidFill>
+                  <a:srgbClr val="1A1A1A"/>
+                </a:solidFill>
+                <a:latin typeface="Lexend"/>
+              </a:rPr>
+              <a:t>, </a:t>
+            </a:r>
+          </a:p>
+        </p:txBody>
+      </p:sp>
+      <p:pic>
+        <p:nvPicPr>
+          <p:cNvPr id="22" name="Picture 21" descr="b894db2784ec4b12.png"/>
+          <p:cNvPicPr>
+            <a:picLocks noChangeAspect="1"/>
+          </p:cNvPicPr>
+          <p:nvPr/>
+        </p:nvPicPr>
+        <p:blipFill>
+          <a:blip r:embed="rId6"/>
+          <a:stretch>
+            <a:fillRect/>
+          </a:stretch>
+        </p:blipFill>
+        <p:spPr>
+          <a:xfrm>
+            <a:off x="1741330" y="4679342"/>
+            <a:ext cx="661416" cy="304800"/>
+          </a:xfrm>
+          <a:prstGeom prst="rect">
+            <a:avLst/>
+          </a:prstGeom>
+        </p:spPr>
+      </p:pic>
+      <p:sp>
+        <p:nvSpPr>
+          <p:cNvPr id="23" name="TextBox 22"/>
+          <p:cNvSpPr txBox="1"/>
+          <p:nvPr/>
+        </p:nvSpPr>
+        <p:spPr>
+          <a:xfrm>
+            <a:off x="2402746" y="4656482"/>
+            <a:ext cx="336202" cy="457200"/>
+          </a:xfrm>
+          <a:prstGeom prst="rect">
+            <a:avLst/>
+          </a:prstGeom>
+          <a:noFill/>
+        </p:spPr>
+        <p:txBody>
+          <a:bodyPr wrap="none" lIns="45720" rIns="45720" tIns="18288" bIns="18288" anchor="ctr">
+            <a:noAutofit/>
+          </a:bodyPr>
+          <a:lstStyle/>
+          <a:p>
+            <a:pPr algn="l"/>
+            <a:r>
+              <a:rPr sz="1710" b="0" i="0">
+                <a:solidFill>
+                  <a:srgbClr val="1A1A1A"/>
+                </a:solidFill>
+                <a:latin typeface="Lexend"/>
+              </a:rPr>
+              <a:t>, </a:t>
+            </a:r>
+          </a:p>
+        </p:txBody>
+      </p:sp>
+      <p:pic>
+        <p:nvPicPr>
+          <p:cNvPr id="24" name="Picture 23" descr="9bb1e36bc0b83fd9.png"/>
+          <p:cNvPicPr>
+            <a:picLocks noChangeAspect="1"/>
+          </p:cNvPicPr>
+          <p:nvPr/>
+        </p:nvPicPr>
+        <p:blipFill>
+          <a:blip r:embed="rId7"/>
+          <a:stretch>
+            <a:fillRect/>
+          </a:stretch>
+        </p:blipFill>
+        <p:spPr>
+          <a:xfrm>
+            <a:off x="2601789" y="4679342"/>
+            <a:ext cx="445008" cy="301752"/>
+          </a:xfrm>
+          <a:prstGeom prst="rect">
+            <a:avLst/>
+          </a:prstGeom>
+        </p:spPr>
+      </p:pic>
+      <p:sp>
+        <p:nvSpPr>
+          <p:cNvPr id="25" name="TextBox 24"/>
+          <p:cNvSpPr txBox="1"/>
+          <p:nvPr/>
+        </p:nvSpPr>
+        <p:spPr>
+          <a:xfrm>
+            <a:off x="3046797" y="4656482"/>
+            <a:ext cx="4736083" cy="457200"/>
+          </a:xfrm>
+          <a:prstGeom prst="rect">
+            <a:avLst/>
+          </a:prstGeom>
+          <a:noFill/>
+        </p:spPr>
+        <p:txBody>
+          <a:bodyPr wrap="none" lIns="45720" rIns="45720" tIns="18288" bIns="18288" anchor="ctr">
+            <a:noAutofit/>
+          </a:bodyPr>
+          <a:lstStyle/>
+          <a:p>
+            <a:pPr algn="l"/>
+            <a:r>
+              <a:rPr sz="1710" b="0" i="0">
+                <a:solidFill>
+                  <a:srgbClr val="1A1A1A"/>
+                </a:solidFill>
+                <a:latin typeface="Lexend"/>
+              </a:rPr>
+              <a:t> — an area; the length ratio is used twice</a:t>
+            </a:r>
+          </a:p>
+        </p:txBody>
+      </p:sp>
+      <p:sp>
+        <p:nvSpPr>
+          <p:cNvPr id="26" name="TextBox 25"/>
+          <p:cNvSpPr txBox="1"/>
+          <p:nvPr/>
+        </p:nvSpPr>
+        <p:spPr>
+          <a:xfrm>
+            <a:off x="777240" y="5291990"/>
+            <a:ext cx="10607040" cy="357808"/>
           </a:xfrm>
           <a:prstGeom prst="rect">
             <a:avLst/>
@@ -15195,237 +17929,125 @@
           <a:p>
             <a:pPr algn="l"/>
             <a:r>
-              <a:rPr sz="1900" b="0" i="0">
+              <a:rPr sz="1900" b="1" i="0">
+                <a:solidFill>
+                  <a:srgbClr val="0B5394"/>
+                </a:solidFill>
+                <a:latin typeface="Lexend"/>
+              </a:rPr>
+              <a:t>cubic units</a:t>
+            </a:r>
+          </a:p>
+        </p:txBody>
+      </p:sp>
+      <p:pic>
+        <p:nvPicPr>
+          <p:cNvPr id="27" name="Picture 26" descr="e179aa5248dda237.png"/>
+          <p:cNvPicPr>
+            <a:picLocks noChangeAspect="1"/>
+          </p:cNvPicPr>
+          <p:nvPr/>
+        </p:nvPicPr>
+        <p:blipFill>
+          <a:blip r:embed="rId8"/>
+          <a:stretch>
+            <a:fillRect/>
+          </a:stretch>
+        </p:blipFill>
+        <p:spPr>
+          <a:xfrm>
+            <a:off x="1143000" y="5649799"/>
+            <a:ext cx="399288" cy="301752"/>
+          </a:xfrm>
+          <a:prstGeom prst="rect">
+            <a:avLst/>
+          </a:prstGeom>
+        </p:spPr>
+      </p:pic>
+      <p:sp>
+        <p:nvSpPr>
+          <p:cNvPr id="28" name="TextBox 27"/>
+          <p:cNvSpPr txBox="1"/>
+          <p:nvPr/>
+        </p:nvSpPr>
+        <p:spPr>
+          <a:xfrm>
+            <a:off x="1542287" y="5626939"/>
+            <a:ext cx="336202" cy="457200"/>
+          </a:xfrm>
+          <a:prstGeom prst="rect">
+            <a:avLst/>
+          </a:prstGeom>
+          <a:noFill/>
+        </p:spPr>
+        <p:txBody>
+          <a:bodyPr wrap="none" lIns="45720" rIns="45720" tIns="18288" bIns="18288" anchor="ctr">
+            <a:noAutofit/>
+          </a:bodyPr>
+          <a:lstStyle/>
+          <a:p>
+            <a:pPr algn="l"/>
+            <a:r>
+              <a:rPr sz="1710" b="0" i="0">
                 <a:solidFill>
                   <a:srgbClr val="1A1A1A"/>
                 </a:solidFill>
                 <a:latin typeface="Lexend"/>
               </a:rPr>
-              <a:t>a volume: 1 c = 8 fl oz — not the same unit as the ounce</a:t>
-            </a:r>
-          </a:p>
-        </p:txBody>
-      </p:sp>
-      <p:sp>
-        <p:nvSpPr>
-          <p:cNvPr id="14" name="TextBox 13"/>
-          <p:cNvSpPr txBox="1"/>
-          <p:nvPr/>
-        </p:nvSpPr>
-        <p:spPr>
-          <a:xfrm>
-            <a:off x="777240" y="4430466"/>
-            <a:ext cx="10607040" cy="393589"/>
-          </a:xfrm>
-          <a:prstGeom prst="rect">
-            <a:avLst/>
-          </a:prstGeom>
-          <a:noFill/>
-        </p:spPr>
-        <p:txBody>
-          <a:bodyPr wrap="square" lIns="45720" rIns="45720" tIns="18288" bIns="18288" anchor="t">
-            <a:spAutoFit/>
-          </a:bodyPr>
-          <a:lstStyle/>
-          <a:p>
-            <a:pPr algn="l"/>
-            <a:r>
-              <a:rPr sz="2090" b="1" i="0">
-                <a:solidFill>
-                  <a:srgbClr val="0B5394"/>
-                </a:solidFill>
-                <a:latin typeface="Lexend"/>
-              </a:rPr>
-              <a:t>square units</a:t>
-            </a:r>
-          </a:p>
-        </p:txBody>
-      </p:sp>
-      <p:sp>
-        <p:nvSpPr>
-          <p:cNvPr id="15" name="TextBox 14"/>
-          <p:cNvSpPr txBox="1"/>
-          <p:nvPr/>
-        </p:nvSpPr>
-        <p:spPr>
-          <a:xfrm>
-            <a:off x="1143000" y="4824056"/>
-            <a:ext cx="10241280" cy="357808"/>
-          </a:xfrm>
-          <a:prstGeom prst="rect">
-            <a:avLst/>
-          </a:prstGeom>
-          <a:noFill/>
-        </p:spPr>
-        <p:txBody>
-          <a:bodyPr wrap="square" lIns="45720" rIns="45720" tIns="18288" bIns="18288" anchor="t">
-            <a:spAutoFit/>
-          </a:bodyPr>
-          <a:lstStyle/>
-          <a:p>
-            <a:pPr algn="l"/>
-            <a:r>
-              <a:rPr sz="1900" b="0" i="0">
-                <a:solidFill>
-                  <a:srgbClr val="1A1A1A"/>
-                </a:solidFill>
-                <a:latin typeface="Lexend"/>
-              </a:rPr>
-              <a:t>ft</a:t>
-            </a:r>
-            <a:r>
-              <a:rPr sz="1900" b="0" i="0" baseline="30000">
-                <a:solidFill>
-                  <a:srgbClr val="1A1A1A"/>
-                </a:solidFill>
-                <a:latin typeface="Lexend"/>
-              </a:rPr>
-              <a:t>2</a:t>
-            </a:r>
-            <a:r>
-              <a:rPr sz="1900" b="0" i="0">
-                <a:solidFill>
-                  <a:srgbClr val="1A1A1A"/>
-                </a:solidFill>
-                <a:latin typeface="Lexend"/>
-              </a:rPr>
-              <a:t>, cm</a:t>
-            </a:r>
-            <a:r>
-              <a:rPr sz="1900" b="0" i="0" baseline="30000">
-                <a:solidFill>
-                  <a:srgbClr val="1A1A1A"/>
-                </a:solidFill>
-                <a:latin typeface="Lexend"/>
-              </a:rPr>
-              <a:t>2</a:t>
-            </a:r>
-            <a:r>
-              <a:rPr sz="1900" b="0" i="0">
-                <a:solidFill>
-                  <a:srgbClr val="1A1A1A"/>
-                </a:solidFill>
-                <a:latin typeface="Lexend"/>
-              </a:rPr>
-              <a:t>, m</a:t>
-            </a:r>
-            <a:r>
-              <a:rPr sz="1900" b="0" i="0" baseline="30000">
-                <a:solidFill>
-                  <a:srgbClr val="1A1A1A"/>
-                </a:solidFill>
-                <a:latin typeface="Lexend"/>
-              </a:rPr>
-              <a:t>2</a:t>
-            </a:r>
-            <a:r>
-              <a:rPr sz="1900" b="0" i="0">
-                <a:solidFill>
-                  <a:srgbClr val="1A1A1A"/>
-                </a:solidFill>
-                <a:latin typeface="Lexend"/>
-              </a:rPr>
-              <a:t> — an area; the length ratio is used twice</a:t>
-            </a:r>
-          </a:p>
-        </p:txBody>
-      </p:sp>
-      <p:sp>
-        <p:nvSpPr>
-          <p:cNvPr id="16" name="TextBox 15"/>
-          <p:cNvSpPr txBox="1"/>
-          <p:nvPr/>
-        </p:nvSpPr>
-        <p:spPr>
-          <a:xfrm>
-            <a:off x="777240" y="5419609"/>
-            <a:ext cx="10607040" cy="393589"/>
-          </a:xfrm>
-          <a:prstGeom prst="rect">
-            <a:avLst/>
-          </a:prstGeom>
-          <a:noFill/>
-        </p:spPr>
-        <p:txBody>
-          <a:bodyPr wrap="square" lIns="45720" rIns="45720" tIns="18288" bIns="18288" anchor="t">
-            <a:spAutoFit/>
-          </a:bodyPr>
-          <a:lstStyle/>
-          <a:p>
-            <a:pPr algn="l"/>
-            <a:r>
-              <a:rPr sz="2090" b="1" i="0">
-                <a:solidFill>
-                  <a:srgbClr val="0B5394"/>
-                </a:solidFill>
-                <a:latin typeface="Lexend"/>
-              </a:rPr>
-              <a:t>cubic units</a:t>
-            </a:r>
-          </a:p>
-        </p:txBody>
-      </p:sp>
-      <p:sp>
-        <p:nvSpPr>
-          <p:cNvPr id="17" name="TextBox 16"/>
-          <p:cNvSpPr txBox="1"/>
-          <p:nvPr/>
-        </p:nvSpPr>
-        <p:spPr>
-          <a:xfrm>
-            <a:off x="1143000" y="5813198"/>
-            <a:ext cx="10241280" cy="357808"/>
-          </a:xfrm>
-          <a:prstGeom prst="rect">
-            <a:avLst/>
-          </a:prstGeom>
-          <a:noFill/>
-        </p:spPr>
-        <p:txBody>
-          <a:bodyPr wrap="square" lIns="45720" rIns="45720" tIns="18288" bIns="18288" anchor="t">
-            <a:spAutoFit/>
-          </a:bodyPr>
-          <a:lstStyle/>
-          <a:p>
-            <a:pPr algn="l"/>
-            <a:r>
-              <a:rPr sz="1900" b="0" i="0">
-                <a:solidFill>
-                  <a:srgbClr val="1A1A1A"/>
-                </a:solidFill>
-                <a:latin typeface="Lexend"/>
-              </a:rPr>
-              <a:t>ft</a:t>
-            </a:r>
-            <a:r>
-              <a:rPr sz="1900" b="0" i="0" baseline="30000">
-                <a:solidFill>
-                  <a:srgbClr val="1A1A1A"/>
-                </a:solidFill>
-                <a:latin typeface="Lexend"/>
-              </a:rPr>
-              <a:t>3</a:t>
-            </a:r>
-            <a:r>
-              <a:rPr sz="1900" b="0" i="0">
-                <a:solidFill>
-                  <a:srgbClr val="1A1A1A"/>
-                </a:solidFill>
-                <a:latin typeface="Lexend"/>
-              </a:rPr>
-              <a:t>, in</a:t>
-            </a:r>
-            <a:r>
-              <a:rPr sz="1900" b="0" i="0" baseline="30000">
-                <a:solidFill>
-                  <a:srgbClr val="1A1A1A"/>
-                </a:solidFill>
-                <a:latin typeface="Lexend"/>
-              </a:rPr>
-              <a:t>3</a:t>
-            </a:r>
-            <a:r>
-              <a:rPr sz="1900" b="0" i="0">
+              <a:t>, </a:t>
+            </a:r>
+          </a:p>
+        </p:txBody>
+      </p:sp>
+      <p:pic>
+        <p:nvPicPr>
+          <p:cNvPr id="29" name="Picture 28" descr="7280d534979a8526.png"/>
+          <p:cNvPicPr>
+            <a:picLocks noChangeAspect="1"/>
+          </p:cNvPicPr>
+          <p:nvPr/>
+        </p:nvPicPr>
+        <p:blipFill>
+          <a:blip r:embed="rId9"/>
+          <a:stretch>
+            <a:fillRect/>
+          </a:stretch>
+        </p:blipFill>
+        <p:spPr>
+          <a:xfrm>
+            <a:off x="1741330" y="5649799"/>
+            <a:ext cx="426720" cy="298704"/>
+          </a:xfrm>
+          <a:prstGeom prst="rect">
+            <a:avLst/>
+          </a:prstGeom>
+        </p:spPr>
+      </p:pic>
+      <p:sp>
+        <p:nvSpPr>
+          <p:cNvPr id="30" name="TextBox 29"/>
+          <p:cNvSpPr txBox="1"/>
+          <p:nvPr/>
+        </p:nvSpPr>
+        <p:spPr>
+          <a:xfrm>
+            <a:off x="2168050" y="5626939"/>
+            <a:ext cx="5560168" cy="457200"/>
+          </a:xfrm>
+          <a:prstGeom prst="rect">
+            <a:avLst/>
+          </a:prstGeom>
+          <a:noFill/>
+        </p:spPr>
+        <p:txBody>
+          <a:bodyPr wrap="none" lIns="45720" rIns="45720" tIns="18288" bIns="18288" anchor="ctr">
+            <a:noAutofit/>
+          </a:bodyPr>
+          <a:lstStyle/>
+          <a:p>
+            <a:pPr algn="l"/>
+            <a:r>
+              <a:rPr sz="1710" b="0" i="0">
                 <a:solidFill>
                   <a:srgbClr val="1A1A1A"/>
                 </a:solidFill>
@@ -15750,7 +18372,7 @@
         </p:blipFill>
         <p:spPr>
           <a:xfrm>
-            <a:off x="1984247" y="2011680"/>
+            <a:off x="1984247" y="2029968"/>
             <a:ext cx="8193024" cy="374904"/>
           </a:xfrm>
           <a:prstGeom prst="rect">
@@ -16096,7 +18718,7 @@
         </p:blipFill>
         <p:spPr>
           <a:xfrm>
-            <a:off x="2602992" y="4472933"/>
+            <a:off x="2602992" y="4437881"/>
             <a:ext cx="6955536" cy="341376"/>
           </a:xfrm>
           <a:prstGeom prst="rect">
@@ -16120,7 +18742,7 @@
         </p:blipFill>
         <p:spPr>
           <a:xfrm>
-            <a:off x="2423160" y="5125205"/>
+            <a:off x="2423160" y="5123681"/>
             <a:ext cx="7315200" cy="408432"/>
           </a:xfrm>
           <a:prstGeom prst="rect">
@@ -16442,7 +19064,7 @@
         </p:blipFill>
         <p:spPr>
           <a:xfrm>
-            <a:off x="2700528" y="2054352"/>
+            <a:off x="2700528" y="2039493"/>
             <a:ext cx="6760464" cy="289560"/>
           </a:xfrm>
           <a:prstGeom prst="rect">
@@ -16713,29 +19335,53 @@
           </a:p>
         </p:txBody>
       </p:sp>
-      <p:sp>
-        <p:nvSpPr>
-          <p:cNvPr id="8" name="TextBox 7"/>
-          <p:cNvSpPr txBox="1"/>
-          <p:nvPr/>
-        </p:nvSpPr>
-        <p:spPr>
-          <a:xfrm>
-            <a:off x="777240" y="2103120"/>
-            <a:ext cx="10607040" cy="429370"/>
-          </a:xfrm>
-          <a:prstGeom prst="rect">
-            <a:avLst/>
-          </a:prstGeom>
-          <a:noFill/>
-        </p:spPr>
-        <p:txBody>
-          <a:bodyPr wrap="square" lIns="45720" rIns="45720" tIns="18288" bIns="18288" anchor="t">
-            <a:spAutoFit/>
-          </a:bodyPr>
-          <a:lstStyle/>
-          <a:p>
-            <a:pPr algn="ctr"/>
+      <p:pic>
+        <p:nvPicPr>
+          <p:cNvPr id="8" name="Picture 7" descr="86539a90126a0911.png"/>
+          <p:cNvPicPr>
+            <a:picLocks noChangeAspect="1"/>
+          </p:cNvPicPr>
+          <p:nvPr/>
+        </p:nvPicPr>
+        <p:blipFill>
+          <a:blip r:embed="rId2"/>
+          <a:stretch>
+            <a:fillRect/>
+          </a:stretch>
+        </p:blipFill>
+        <p:spPr>
+          <a:xfrm>
+            <a:off x="3219450" y="2191512"/>
+            <a:ext cx="1987296" cy="304800"/>
+          </a:xfrm>
+          <a:prstGeom prst="rect">
+            <a:avLst/>
+          </a:prstGeom>
+        </p:spPr>
+      </p:pic>
+      <p:sp>
+        <p:nvSpPr>
+          <p:cNvPr id="9" name="TextBox 8"/>
+          <p:cNvSpPr txBox="1"/>
+          <p:nvPr/>
+        </p:nvSpPr>
+        <p:spPr>
+          <a:xfrm>
+            <a:off x="5206746" y="2080260"/>
+            <a:ext cx="3872483" cy="457200"/>
+          </a:xfrm>
+          <a:prstGeom prst="rect">
+            <a:avLst/>
+          </a:prstGeom>
+          <a:noFill/>
+        </p:spPr>
+        <p:txBody>
+          <a:bodyPr wrap="none" lIns="45720" rIns="45720" tIns="18288" bIns="18288" anchor="ctr">
+            <a:noAutofit/>
+          </a:bodyPr>
+          <a:lstStyle/>
+          <a:p>
+            <a:pPr algn="l"/>
             <a:r>
               <a:rPr sz="2280" b="0" i="0">
                 <a:solidFill>
@@ -16743,20 +19389,20 @@
                 </a:solidFill>
                 <a:latin typeface="Lexend"/>
               </a:rPr>
-              <a:t>1 lb = 0.454 kg. A suitcase weighs 70 lb.</a:t>
-            </a:r>
-          </a:p>
-        </p:txBody>
-      </p:sp>
-      <p:sp>
-        <p:nvSpPr>
-          <p:cNvPr id="9" name="TextBox 8"/>
-          <p:cNvSpPr txBox="1"/>
-          <p:nvPr/>
-        </p:nvSpPr>
-        <p:spPr>
-          <a:xfrm>
-            <a:off x="777240" y="2825098"/>
+              <a:t>. A suitcase weighs 70 lb.</a:t>
+            </a:r>
+          </a:p>
+        </p:txBody>
+      </p:sp>
+      <p:sp>
+        <p:nvSpPr>
+          <p:cNvPr id="10" name="TextBox 9"/>
+          <p:cNvSpPr txBox="1"/>
+          <p:nvPr/>
+        </p:nvSpPr>
+        <p:spPr>
+          <a:xfrm>
+            <a:off x="777240" y="2971800"/>
             <a:ext cx="10607040" cy="429370"/>
           </a:xfrm>
           <a:prstGeom prst="rect">

--- a/a7/build/out/u5/A7 5.08 Converting Mass, Area and Volume - Slides.pptx
+++ b/a7/build/out/u5/A7 5.08 Converting Mass, Area and Volume - Slides.pptx
@@ -3667,7 +3667,7 @@
       </p:sp>
       <p:pic>
         <p:nvPicPr>
-          <p:cNvPr id="8" name="Picture 7" descr="86539a90126a0911.png"/>
+          <p:cNvPr id="8" name="Picture 7" descr="b889ac44668791a2.png"/>
           <p:cNvPicPr>
             <a:picLocks noChangeAspect="1"/>
           </p:cNvPicPr>
@@ -3681,8 +3681,8 @@
         </p:blipFill>
         <p:spPr>
           <a:xfrm>
-            <a:off x="3442131" y="1688592"/>
-            <a:ext cx="1987296" cy="304800"/>
+            <a:off x="3443941" y="1689925"/>
+            <a:ext cx="1983676" cy="304609"/>
           </a:xfrm>
           <a:prstGeom prst="rect">
             <a:avLst/>
@@ -3697,7 +3697,7 @@
         </p:nvSpPr>
         <p:spPr>
           <a:xfrm>
-            <a:off x="5429427" y="1577340"/>
+            <a:off x="5427618" y="1577340"/>
             <a:ext cx="3427120" cy="457200"/>
           </a:xfrm>
           <a:prstGeom prst="rect">
@@ -3989,7 +3989,7 @@
       </p:sp>
       <p:pic>
         <p:nvPicPr>
-          <p:cNvPr id="8" name="Picture 7" descr="b10388bb53fbdadc.png"/>
+          <p:cNvPr id="8" name="Picture 7" descr="c5f90b4ff337bc90.png"/>
           <p:cNvPicPr>
             <a:picLocks noChangeAspect="1"/>
           </p:cNvPicPr>
@@ -4003,8 +4003,8 @@
         </p:blipFill>
         <p:spPr>
           <a:xfrm>
-            <a:off x="3443655" y="1688592"/>
-            <a:ext cx="1984248" cy="304800"/>
+            <a:off x="3443941" y="1689925"/>
+            <a:ext cx="1983676" cy="304609"/>
           </a:xfrm>
           <a:prstGeom prst="rect">
             <a:avLst/>
@@ -4019,7 +4019,7 @@
         </p:nvSpPr>
         <p:spPr>
           <a:xfrm>
-            <a:off x="5427903" y="1577340"/>
+            <a:off x="5427618" y="1577340"/>
             <a:ext cx="3427120" cy="457200"/>
           </a:xfrm>
           <a:prstGeom prst="rect">
@@ -4370,7 +4370,7 @@
       </p:sp>
       <p:pic>
         <p:nvPicPr>
-          <p:cNvPr id="8" name="Picture 7" descr="a7e24ba549ecbc3a.png"/>
+          <p:cNvPr id="8" name="Picture 7" descr="419008846420ef41.png"/>
           <p:cNvPicPr>
             <a:picLocks noChangeAspect="1"/>
           </p:cNvPicPr>
@@ -4384,8 +4384,8 @@
         </p:blipFill>
         <p:spPr>
           <a:xfrm>
-            <a:off x="3789429" y="2182368"/>
-            <a:ext cx="1347216" cy="240791"/>
+            <a:off x="3792668" y="2177986"/>
+            <a:ext cx="1342262" cy="245173"/>
           </a:xfrm>
           <a:prstGeom prst="rect">
             <a:avLst/>
@@ -4400,7 +4400,7 @@
         </p:nvSpPr>
         <p:spPr>
           <a:xfrm>
-            <a:off x="5136645" y="2080260"/>
+            <a:off x="5134931" y="2080260"/>
             <a:ext cx="1528218" cy="457200"/>
           </a:xfrm>
           <a:prstGeom prst="rect">
@@ -4429,7 +4429,7 @@
       </p:sp>
       <p:pic>
         <p:nvPicPr>
-          <p:cNvPr id="10" name="Picture 9" descr="8ba99cdd4ae998bf.png"/>
+          <p:cNvPr id="10" name="Picture 9" descr="040327706b658f5f.png"/>
           <p:cNvPicPr>
             <a:picLocks noChangeAspect="1"/>
           </p:cNvPicPr>
@@ -4443,8 +4443,8 @@
         </p:blipFill>
         <p:spPr>
           <a:xfrm>
-            <a:off x="6527703" y="2148840"/>
-            <a:ext cx="576072" cy="277368"/>
+            <a:off x="6525989" y="2148268"/>
+            <a:ext cx="574548" cy="277368"/>
           </a:xfrm>
           <a:prstGeom prst="rect">
             <a:avLst/>
@@ -4459,7 +4459,7 @@
         </p:nvSpPr>
         <p:spPr>
           <a:xfrm>
-            <a:off x="7103775" y="2080260"/>
+            <a:off x="7100537" y="2080260"/>
             <a:ext cx="1405474" cy="457200"/>
           </a:xfrm>
           <a:prstGeom prst="rect">
@@ -5071,7 +5071,7 @@
       </p:sp>
       <p:pic>
         <p:nvPicPr>
-          <p:cNvPr id="8" name="Picture 7" descr="85d78c8d2e33f8ba.png"/>
+          <p:cNvPr id="8" name="Picture 7" descr="df721e6687ccce4d.png"/>
           <p:cNvPicPr>
             <a:picLocks noChangeAspect="1"/>
           </p:cNvPicPr>
@@ -5085,8 +5085,8 @@
         </p:blipFill>
         <p:spPr>
           <a:xfrm>
-            <a:off x="3580725" y="1688592"/>
-            <a:ext cx="1304544" cy="304800"/>
+            <a:off x="3581678" y="1689925"/>
+            <a:ext cx="1302639" cy="304609"/>
           </a:xfrm>
           <a:prstGeom prst="rect">
             <a:avLst/>
@@ -5101,7 +5101,7 @@
         </p:nvSpPr>
         <p:spPr>
           <a:xfrm>
-            <a:off x="4885269" y="1577340"/>
+            <a:off x="4884317" y="1577340"/>
             <a:ext cx="1851137" cy="457200"/>
           </a:xfrm>
           <a:prstGeom prst="rect">
@@ -5130,7 +5130,7 @@
       </p:sp>
       <p:pic>
         <p:nvPicPr>
-          <p:cNvPr id="10" name="Picture 9" descr="b80bf23af7e2cccd.png"/>
+          <p:cNvPr id="10" name="Picture 9" descr="f6484183bcbd0a95.png"/>
           <p:cNvPicPr>
             <a:picLocks noChangeAspect="1"/>
           </p:cNvPicPr>
@@ -5144,8 +5144,8 @@
         </p:blipFill>
         <p:spPr>
           <a:xfrm>
-            <a:off x="6599247" y="1645920"/>
-            <a:ext cx="713232" cy="347472"/>
+            <a:off x="6598295" y="1647825"/>
+            <a:ext cx="713232" cy="346710"/>
           </a:xfrm>
           <a:prstGeom prst="rect">
             <a:avLst/>
@@ -5160,7 +5160,7 @@
         </p:nvSpPr>
         <p:spPr>
           <a:xfrm>
-            <a:off x="7312479" y="1577340"/>
+            <a:off x="7311527" y="1577340"/>
             <a:ext cx="1405474" cy="457200"/>
           </a:xfrm>
           <a:prstGeom prst="rect">
@@ -5452,7 +5452,7 @@
       </p:sp>
       <p:pic>
         <p:nvPicPr>
-          <p:cNvPr id="8" name="Picture 7" descr="eb837b0c98931562.png"/>
+          <p:cNvPr id="8" name="Picture 7" descr="155f3c6fd32ecb72.png"/>
           <p:cNvPicPr>
             <a:picLocks noChangeAspect="1"/>
           </p:cNvPicPr>
@@ -5466,8 +5466,8 @@
         </p:blipFill>
         <p:spPr>
           <a:xfrm>
-            <a:off x="3577677" y="1688592"/>
-            <a:ext cx="1307592" cy="304800"/>
+            <a:off x="3581678" y="1689925"/>
+            <a:ext cx="1302639" cy="304609"/>
           </a:xfrm>
           <a:prstGeom prst="rect">
             <a:avLst/>
@@ -5482,7 +5482,7 @@
         </p:nvSpPr>
         <p:spPr>
           <a:xfrm>
-            <a:off x="4885269" y="1577340"/>
+            <a:off x="4884317" y="1577340"/>
             <a:ext cx="1851137" cy="457200"/>
           </a:xfrm>
           <a:prstGeom prst="rect">
@@ -5511,7 +5511,7 @@
       </p:sp>
       <p:pic>
         <p:nvPicPr>
-          <p:cNvPr id="10" name="Picture 9" descr="e4af36b06ea23b40.png"/>
+          <p:cNvPr id="10" name="Picture 9" descr="3c99dfaaa214ad6a.png"/>
           <p:cNvPicPr>
             <a:picLocks noChangeAspect="1"/>
           </p:cNvPicPr>
@@ -5525,8 +5525,8 @@
         </p:blipFill>
         <p:spPr>
           <a:xfrm>
-            <a:off x="6599247" y="1645920"/>
-            <a:ext cx="716280" cy="347472"/>
+            <a:off x="6598295" y="1647825"/>
+            <a:ext cx="713232" cy="346710"/>
           </a:xfrm>
           <a:prstGeom prst="rect">
             <a:avLst/>
@@ -5541,7 +5541,7 @@
         </p:nvSpPr>
         <p:spPr>
           <a:xfrm>
-            <a:off x="7315527" y="1577340"/>
+            <a:off x="7311527" y="1577340"/>
             <a:ext cx="1405474" cy="457200"/>
           </a:xfrm>
           <a:prstGeom prst="rect">
@@ -5605,7 +5605,7 @@
       </p:sp>
       <p:pic>
         <p:nvPicPr>
-          <p:cNvPr id="13" name="Picture 12" descr="c9fe1cb570749efd.png"/>
+          <p:cNvPr id="13" name="Picture 12" descr="6a1d74e97a46e535.png"/>
           <p:cNvPicPr>
             <a:picLocks noChangeAspect="1"/>
           </p:cNvPicPr>
@@ -5619,8 +5619,8 @@
         </p:blipFill>
         <p:spPr>
           <a:xfrm>
-            <a:off x="3907711" y="2943398"/>
-            <a:ext cx="838200" cy="304800"/>
+            <a:off x="3873429" y="2912934"/>
+            <a:ext cx="906708" cy="335153"/>
           </a:xfrm>
           <a:prstGeom prst="rect">
             <a:avLst/>
@@ -5635,7 +5635,7 @@
         </p:nvSpPr>
         <p:spPr>
           <a:xfrm>
-            <a:off x="4745911" y="2875390"/>
+            <a:off x="4780138" y="2875390"/>
             <a:ext cx="3757832" cy="457200"/>
           </a:xfrm>
           <a:prstGeom prst="rect">
@@ -5696,7 +5696,7 @@
         </p:blipFill>
         <p:spPr>
           <a:xfrm>
-            <a:off x="3907711" y="3531662"/>
+            <a:off x="3873429" y="3531662"/>
             <a:ext cx="1402080" cy="252984"/>
           </a:xfrm>
           <a:prstGeom prst="rect">
@@ -5978,7 +5978,7 @@
       </p:sp>
       <p:pic>
         <p:nvPicPr>
-          <p:cNvPr id="8" name="Picture 7" descr="d7de33d50f52caf2.png"/>
+          <p:cNvPr id="8" name="Picture 7" descr="b20e69a494d39ec5.png"/>
           <p:cNvPicPr>
             <a:picLocks noChangeAspect="1"/>
           </p:cNvPicPr>
@@ -5992,8 +5992,8 @@
         </p:blipFill>
         <p:spPr>
           <a:xfrm>
-            <a:off x="1234440" y="1962911"/>
-            <a:ext cx="1965960" cy="304800"/>
+            <a:off x="1234440" y="1964245"/>
+            <a:ext cx="1963864" cy="304609"/>
           </a:xfrm>
           <a:prstGeom prst="rect">
             <a:avLst/>
@@ -6008,7 +6008,7 @@
         </p:nvSpPr>
         <p:spPr>
           <a:xfrm>
-            <a:off x="3200400" y="1851660"/>
+            <a:off x="3198304" y="1851660"/>
             <a:ext cx="3549313" cy="457200"/>
           </a:xfrm>
           <a:prstGeom prst="rect">
@@ -6335,7 +6335,7 @@
       </p:sp>
       <p:pic>
         <p:nvPicPr>
-          <p:cNvPr id="8" name="Picture 7" descr="e707e309a9336654.png"/>
+          <p:cNvPr id="8" name="Picture 7" descr="fd933339219d3a44.png"/>
           <p:cNvPicPr>
             <a:picLocks noChangeAspect="1"/>
           </p:cNvPicPr>
@@ -6349,8 +6349,8 @@
         </p:blipFill>
         <p:spPr>
           <a:xfrm>
-            <a:off x="1234440" y="1962911"/>
-            <a:ext cx="1965960" cy="304800"/>
+            <a:off x="1234440" y="1964245"/>
+            <a:ext cx="1963864" cy="304609"/>
           </a:xfrm>
           <a:prstGeom prst="rect">
             <a:avLst/>
@@ -6365,7 +6365,7 @@
         </p:nvSpPr>
         <p:spPr>
           <a:xfrm>
-            <a:off x="3200400" y="1851660"/>
+            <a:off x="3198304" y="1851660"/>
             <a:ext cx="3549313" cy="457200"/>
           </a:xfrm>
           <a:prstGeom prst="rect">
@@ -6716,7 +6716,7 @@
       </p:sp>
       <p:pic>
         <p:nvPicPr>
-          <p:cNvPr id="8" name="Picture 7" descr="0d647df019511e64.png"/>
+          <p:cNvPr id="8" name="Picture 7" descr="3b403895e0674b0a.png"/>
           <p:cNvPicPr>
             <a:picLocks noChangeAspect="1"/>
           </p:cNvPicPr>
@@ -6730,8 +6730,8 @@
         </p:blipFill>
         <p:spPr>
           <a:xfrm>
-            <a:off x="1234440" y="1962911"/>
-            <a:ext cx="1935480" cy="304800"/>
+            <a:off x="1234440" y="1964245"/>
+            <a:ext cx="1934146" cy="304609"/>
           </a:xfrm>
           <a:prstGeom prst="rect">
             <a:avLst/>
@@ -6746,7 +6746,7 @@
         </p:nvSpPr>
         <p:spPr>
           <a:xfrm>
-            <a:off x="3169920" y="1851660"/>
+            <a:off x="3168586" y="1851660"/>
             <a:ext cx="3361876" cy="457200"/>
           </a:xfrm>
           <a:prstGeom prst="rect">
@@ -7073,7 +7073,7 @@
       </p:sp>
       <p:pic>
         <p:nvPicPr>
-          <p:cNvPr id="8" name="Picture 7" descr="118ca277248594bf.png"/>
+          <p:cNvPr id="8" name="Picture 7" descr="10760bc6c58820eb.png"/>
           <p:cNvPicPr>
             <a:picLocks noChangeAspect="1"/>
           </p:cNvPicPr>
@@ -7087,8 +7087,8 @@
         </p:blipFill>
         <p:spPr>
           <a:xfrm>
-            <a:off x="1234440" y="1962911"/>
-            <a:ext cx="1935480" cy="304800"/>
+            <a:off x="1234440" y="1964245"/>
+            <a:ext cx="1934146" cy="304609"/>
           </a:xfrm>
           <a:prstGeom prst="rect">
             <a:avLst/>
@@ -7103,7 +7103,7 @@
         </p:nvSpPr>
         <p:spPr>
           <a:xfrm>
-            <a:off x="3169920" y="1851660"/>
+            <a:off x="3168586" y="1851660"/>
             <a:ext cx="3361876" cy="457200"/>
           </a:xfrm>
           <a:prstGeom prst="rect">
@@ -7489,7 +7489,7 @@
       </p:sp>
       <p:pic>
         <p:nvPicPr>
-          <p:cNvPr id="9" name="Picture 8" descr="88d2b26b87c7a8c9.png"/>
+          <p:cNvPr id="9" name="Picture 8" descr="23c46f257f02bce0.png"/>
           <p:cNvPicPr>
             <a:picLocks noChangeAspect="1"/>
           </p:cNvPicPr>
@@ -7503,8 +7503,8 @@
         </p:blipFill>
         <p:spPr>
           <a:xfrm>
-            <a:off x="2408921" y="1540573"/>
-            <a:ext cx="1847088" cy="243840"/>
+            <a:off x="2408921" y="1548106"/>
+            <a:ext cx="1768117" cy="234957"/>
           </a:xfrm>
           <a:prstGeom prst="rect">
             <a:avLst/>
@@ -7519,7 +7519,7 @@
         </p:nvSpPr>
         <p:spPr>
           <a:xfrm>
-            <a:off x="4256009" y="1440180"/>
+            <a:off x="4177039" y="1440180"/>
             <a:ext cx="4831351" cy="457200"/>
           </a:xfrm>
           <a:prstGeom prst="rect">
@@ -7583,7 +7583,7 @@
       </p:sp>
       <p:pic>
         <p:nvPicPr>
-          <p:cNvPr id="12" name="Picture 11" descr="15179f9c1b681126.png"/>
+          <p:cNvPr id="12" name="Picture 11" descr="4f88773a30225488.png"/>
           <p:cNvPicPr>
             <a:picLocks noChangeAspect="1"/>
           </p:cNvPicPr>
@@ -7597,8 +7597,8 @@
         </p:blipFill>
         <p:spPr>
           <a:xfrm>
-            <a:off x="4754136" y="2119693"/>
-            <a:ext cx="774192" cy="277368"/>
+            <a:off x="4754136" y="2129901"/>
+            <a:ext cx="740473" cy="265811"/>
           </a:xfrm>
           <a:prstGeom prst="rect">
             <a:avLst/>
@@ -7613,7 +7613,7 @@
         </p:nvSpPr>
         <p:spPr>
           <a:xfrm>
-            <a:off x="5528328" y="2052828"/>
+            <a:off x="5494609" y="2052828"/>
             <a:ext cx="2026935" cy="457200"/>
           </a:xfrm>
           <a:prstGeom prst="rect">
@@ -7642,7 +7642,7 @@
       </p:sp>
       <p:pic>
         <p:nvPicPr>
-          <p:cNvPr id="14" name="Picture 13" descr="0937735c0d6e3897.png"/>
+          <p:cNvPr id="14" name="Picture 13" descr="8058f93241672fda.png"/>
           <p:cNvPicPr>
             <a:picLocks noChangeAspect="1"/>
           </p:cNvPicPr>
@@ -7656,8 +7656,8 @@
         </p:blipFill>
         <p:spPr>
           <a:xfrm>
-            <a:off x="7418103" y="2162365"/>
-            <a:ext cx="603504" cy="234696"/>
+            <a:off x="7384384" y="2170247"/>
+            <a:ext cx="579088" cy="225464"/>
           </a:xfrm>
           <a:prstGeom prst="rect">
             <a:avLst/>
@@ -7672,7 +7672,7 @@
         </p:nvSpPr>
         <p:spPr>
           <a:xfrm>
-            <a:off x="8021607" y="2052828"/>
+            <a:off x="7963473" y="2052828"/>
             <a:ext cx="2738367" cy="457200"/>
           </a:xfrm>
           <a:prstGeom prst="rect">
@@ -7736,7 +7736,7 @@
       </p:sp>
       <p:pic>
         <p:nvPicPr>
-          <p:cNvPr id="17" name="Picture 16" descr="dd9d4cf5c31a1b9e.png"/>
+          <p:cNvPr id="17" name="Picture 16" descr="c261042202a19b4a.png"/>
           <p:cNvPicPr>
             <a:picLocks noChangeAspect="1"/>
           </p:cNvPicPr>
@@ -7750,8 +7750,8 @@
         </p:blipFill>
         <p:spPr>
           <a:xfrm>
-            <a:off x="5012661" y="2784157"/>
-            <a:ext cx="1036320" cy="225552"/>
+            <a:off x="5012661" y="2792388"/>
+            <a:ext cx="994417" cy="215971"/>
           </a:xfrm>
           <a:prstGeom prst="rect">
             <a:avLst/>
@@ -7795,7 +7795,7 @@
       </p:sp>
       <p:pic>
         <p:nvPicPr>
-          <p:cNvPr id="19" name="Picture 18" descr="a7e24ba549ecbc3a.png"/>
+          <p:cNvPr id="19" name="Picture 18" descr="419008846420ef41.png"/>
           <p:cNvPicPr>
             <a:picLocks noChangeAspect="1"/>
           </p:cNvPicPr>
@@ -7809,8 +7809,8 @@
         </p:blipFill>
         <p:spPr>
           <a:xfrm>
-            <a:off x="2444241" y="3375469"/>
-            <a:ext cx="1347216" cy="240791"/>
+            <a:off x="2444241" y="3381303"/>
+            <a:ext cx="1286335" cy="234957"/>
           </a:xfrm>
           <a:prstGeom prst="rect">
             <a:avLst/>
@@ -7825,7 +7825,7 @@
         </p:nvSpPr>
         <p:spPr>
           <a:xfrm>
-            <a:off x="3791457" y="3278124"/>
+            <a:off x="3730576" y="3278124"/>
             <a:ext cx="6844254" cy="457200"/>
           </a:xfrm>
           <a:prstGeom prst="rect">
@@ -8082,7 +8082,7 @@
       </p:sp>
       <p:pic>
         <p:nvPicPr>
-          <p:cNvPr id="8" name="Picture 7" descr="9ab9b6452f97f390.png"/>
+          <p:cNvPr id="8" name="Picture 7" descr="9d26edaed8467e38.png"/>
           <p:cNvPicPr>
             <a:picLocks noChangeAspect="1"/>
           </p:cNvPicPr>
@@ -8096,8 +8096,8 @@
         </p:blipFill>
         <p:spPr>
           <a:xfrm>
-            <a:off x="1234440" y="1962911"/>
-            <a:ext cx="1972056" cy="304800"/>
+            <a:off x="1234440" y="1964245"/>
+            <a:ext cx="1966341" cy="304609"/>
           </a:xfrm>
           <a:prstGeom prst="rect">
             <a:avLst/>
@@ -8112,7 +8112,7 @@
         </p:nvSpPr>
         <p:spPr>
           <a:xfrm>
-            <a:off x="3206496" y="1851660"/>
+            <a:off x="3200781" y="1851660"/>
             <a:ext cx="2972964" cy="457200"/>
           </a:xfrm>
           <a:prstGeom prst="rect">
@@ -8439,7 +8439,7 @@
       </p:sp>
       <p:pic>
         <p:nvPicPr>
-          <p:cNvPr id="8" name="Picture 7" descr="35b6bbccdafb35f4.png"/>
+          <p:cNvPr id="8" name="Picture 7" descr="9590217cf62aa025.png"/>
           <p:cNvPicPr>
             <a:picLocks noChangeAspect="1"/>
           </p:cNvPicPr>
@@ -8453,8 +8453,8 @@
         </p:blipFill>
         <p:spPr>
           <a:xfrm>
-            <a:off x="1234440" y="1962911"/>
-            <a:ext cx="1972056" cy="304800"/>
+            <a:off x="1234440" y="1964245"/>
+            <a:ext cx="1966341" cy="304609"/>
           </a:xfrm>
           <a:prstGeom prst="rect">
             <a:avLst/>
@@ -8469,7 +8469,7 @@
         </p:nvSpPr>
         <p:spPr>
           <a:xfrm>
-            <a:off x="3206496" y="1851660"/>
+            <a:off x="3200781" y="1851660"/>
             <a:ext cx="2972964" cy="457200"/>
           </a:xfrm>
           <a:prstGeom prst="rect">
@@ -8914,7 +8914,7 @@
       </p:sp>
       <p:pic>
         <p:nvPicPr>
-          <p:cNvPr id="11" name="Picture 10" descr="1bf4f9ec3810cb3c.png"/>
+          <p:cNvPr id="11" name="Picture 10" descr="6a387a3e299107ca.png"/>
           <p:cNvPicPr>
             <a:picLocks noChangeAspect="1"/>
           </p:cNvPicPr>
@@ -8928,8 +8928,8 @@
         </p:blipFill>
         <p:spPr>
           <a:xfrm>
-            <a:off x="4033426" y="2532888"/>
-            <a:ext cx="704088" cy="347472"/>
+            <a:off x="4033426" y="2534793"/>
+            <a:ext cx="700849" cy="346710"/>
           </a:xfrm>
           <a:prstGeom prst="rect">
             <a:avLst/>
@@ -8944,7 +8944,7 @@
         </p:nvSpPr>
         <p:spPr>
           <a:xfrm>
-            <a:off x="4737514" y="2464308"/>
+            <a:off x="4734275" y="2464308"/>
             <a:ext cx="1405474" cy="457200"/>
           </a:xfrm>
           <a:prstGeom prst="rect">
@@ -9601,7 +9601,7 @@
       </p:sp>
       <p:pic>
         <p:nvPicPr>
-          <p:cNvPr id="11" name="Picture 10" descr="116cfbe2b85a3e8f.png"/>
+          <p:cNvPr id="11" name="Picture 10" descr="6287286a7d407b52.png"/>
           <p:cNvPicPr>
             <a:picLocks noChangeAspect="1"/>
           </p:cNvPicPr>
@@ -9615,8 +9615,8 @@
         </p:blipFill>
         <p:spPr>
           <a:xfrm>
-            <a:off x="4033426" y="2532888"/>
-            <a:ext cx="707136" cy="347472"/>
+            <a:off x="4033426" y="2534793"/>
+            <a:ext cx="703326" cy="346710"/>
           </a:xfrm>
           <a:prstGeom prst="rect">
             <a:avLst/>
@@ -9631,7 +9631,7 @@
         </p:nvSpPr>
         <p:spPr>
           <a:xfrm>
-            <a:off x="4740562" y="2464308"/>
+            <a:off x="4736752" y="2464308"/>
             <a:ext cx="1405474" cy="457200"/>
           </a:xfrm>
           <a:prstGeom prst="rect">
@@ -9695,7 +9695,7 @@
       </p:sp>
       <p:pic>
         <p:nvPicPr>
-          <p:cNvPr id="14" name="Picture 13" descr="c9fe1cb570749efd.png"/>
+          <p:cNvPr id="14" name="Picture 13" descr="6a1d74e97a46e535.png"/>
           <p:cNvPicPr>
             <a:picLocks noChangeAspect="1"/>
           </p:cNvPicPr>
@@ -9709,8 +9709,8 @@
         </p:blipFill>
         <p:spPr>
           <a:xfrm>
-            <a:off x="3907711" y="3802934"/>
-            <a:ext cx="838200" cy="304800"/>
+            <a:off x="3873429" y="3772470"/>
+            <a:ext cx="906708" cy="335153"/>
           </a:xfrm>
           <a:prstGeom prst="rect">
             <a:avLst/>
@@ -9725,7 +9725,7 @@
         </p:nvSpPr>
         <p:spPr>
           <a:xfrm>
-            <a:off x="4745911" y="3734926"/>
+            <a:off x="4780138" y="3734926"/>
             <a:ext cx="3757832" cy="457200"/>
           </a:xfrm>
           <a:prstGeom prst="rect">
@@ -9786,7 +9786,7 @@
         </p:blipFill>
         <p:spPr>
           <a:xfrm>
-            <a:off x="3907711" y="4394246"/>
+            <a:off x="3873429" y="4394246"/>
             <a:ext cx="1353312" cy="249935"/>
           </a:xfrm>
           <a:prstGeom prst="rect">
@@ -10068,7 +10068,7 @@
       </p:sp>
       <p:pic>
         <p:nvPicPr>
-          <p:cNvPr id="8" name="Picture 7" descr="53fb1d19ce360046.png"/>
+          <p:cNvPr id="8" name="Picture 7" descr="ae0de4c5e0776520.png"/>
           <p:cNvPicPr>
             <a:picLocks noChangeAspect="1"/>
           </p:cNvPicPr>
@@ -10082,8 +10082,8 @@
         </p:blipFill>
         <p:spPr>
           <a:xfrm>
-            <a:off x="1234440" y="1965960"/>
-            <a:ext cx="1493520" cy="234696"/>
+            <a:off x="1234440" y="1964245"/>
+            <a:ext cx="1488376" cy="235267"/>
           </a:xfrm>
           <a:prstGeom prst="rect">
             <a:avLst/>
@@ -10098,7 +10098,7 @@
         </p:nvSpPr>
         <p:spPr>
           <a:xfrm>
-            <a:off x="2727960" y="1851660"/>
+            <a:off x="2722816" y="1851660"/>
             <a:ext cx="953666" cy="457200"/>
           </a:xfrm>
           <a:prstGeom prst="rect">
@@ -10127,7 +10127,7 @@
       </p:sp>
       <p:pic>
         <p:nvPicPr>
-          <p:cNvPr id="10" name="Picture 9" descr="aae6846e2fca6d95.png"/>
+          <p:cNvPr id="10" name="Picture 9" descr="ed1791ada6c756f0.png"/>
           <p:cNvPicPr>
             <a:picLocks noChangeAspect="1"/>
           </p:cNvPicPr>
@@ -10141,8 +10141,8 @@
         </p:blipFill>
         <p:spPr>
           <a:xfrm>
-            <a:off x="3544466" y="1975103"/>
-            <a:ext cx="1484376" cy="225552"/>
+            <a:off x="3539323" y="1974151"/>
+            <a:ext cx="1480947" cy="225361"/>
           </a:xfrm>
           <a:prstGeom prst="rect">
             <a:avLst/>
@@ -10157,7 +10157,7 @@
         </p:nvSpPr>
         <p:spPr>
           <a:xfrm>
-            <a:off x="5028842" y="1851660"/>
+            <a:off x="5020270" y="1851660"/>
             <a:ext cx="280301" cy="457200"/>
           </a:xfrm>
           <a:prstGeom prst="rect">
@@ -10519,7 +10519,7 @@
       </p:sp>
       <p:pic>
         <p:nvPicPr>
-          <p:cNvPr id="8" name="Picture 7" descr="bcdf2ce76b20063c.png"/>
+          <p:cNvPr id="8" name="Picture 7" descr="747b584da7b83072.png"/>
           <p:cNvPicPr>
             <a:picLocks noChangeAspect="1"/>
           </p:cNvPicPr>
@@ -10533,8 +10533,8 @@
         </p:blipFill>
         <p:spPr>
           <a:xfrm>
-            <a:off x="1234440" y="1965960"/>
-            <a:ext cx="1490472" cy="234696"/>
+            <a:off x="1234440" y="1964245"/>
+            <a:ext cx="1488376" cy="235267"/>
           </a:xfrm>
           <a:prstGeom prst="rect">
             <a:avLst/>
@@ -10549,7 +10549,7 @@
         </p:nvSpPr>
         <p:spPr>
           <a:xfrm>
-            <a:off x="2724912" y="1851660"/>
+            <a:off x="2722816" y="1851660"/>
             <a:ext cx="953666" cy="457200"/>
           </a:xfrm>
           <a:prstGeom prst="rect">
@@ -10578,7 +10578,7 @@
       </p:sp>
       <p:pic>
         <p:nvPicPr>
-          <p:cNvPr id="10" name="Picture 9" descr="5cfd257165b20456.png"/>
+          <p:cNvPr id="10" name="Picture 9" descr="97621f8b70045fa0.png"/>
           <p:cNvPicPr>
             <a:picLocks noChangeAspect="1"/>
           </p:cNvPicPr>
@@ -10592,8 +10592,8 @@
         </p:blipFill>
         <p:spPr>
           <a:xfrm>
-            <a:off x="3541418" y="1975103"/>
-            <a:ext cx="1481328" cy="225552"/>
+            <a:off x="3539323" y="1974151"/>
+            <a:ext cx="1480947" cy="225361"/>
           </a:xfrm>
           <a:prstGeom prst="rect">
             <a:avLst/>
@@ -10608,7 +10608,7 @@
         </p:nvSpPr>
         <p:spPr>
           <a:xfrm>
-            <a:off x="5022746" y="1851660"/>
+            <a:off x="5020270" y="1851660"/>
             <a:ext cx="280301" cy="457200"/>
           </a:xfrm>
           <a:prstGeom prst="rect">
@@ -11112,7 +11112,7 @@
       </p:sp>
       <p:pic>
         <p:nvPicPr>
-          <p:cNvPr id="11" name="Picture 10" descr="54aa35aeb0a18864.png"/>
+          <p:cNvPr id="11" name="Picture 10" descr="ff228dc4c8df40a5.png"/>
           <p:cNvPicPr>
             <a:picLocks noChangeAspect="1"/>
           </p:cNvPicPr>
@@ -11126,8 +11126,8 @@
         </p:blipFill>
         <p:spPr>
           <a:xfrm>
-            <a:off x="6510526" y="2532888"/>
-            <a:ext cx="585216" cy="274320"/>
+            <a:off x="6510526" y="2532316"/>
+            <a:ext cx="581977" cy="274891"/>
           </a:xfrm>
           <a:prstGeom prst="rect">
             <a:avLst/>
@@ -11142,7 +11142,7 @@
         </p:nvSpPr>
         <p:spPr>
           <a:xfrm>
-            <a:off x="7095742" y="2464308"/>
+            <a:off x="7092503" y="2464308"/>
             <a:ext cx="374819" cy="457200"/>
           </a:xfrm>
           <a:prstGeom prst="rect">
@@ -11764,7 +11764,7 @@
       </p:sp>
       <p:pic>
         <p:nvPicPr>
-          <p:cNvPr id="11" name="Picture 10" descr="e6f525412f578c85.png"/>
+          <p:cNvPr id="11" name="Picture 10" descr="dc0942f76508dbde.png"/>
           <p:cNvPicPr>
             <a:picLocks noChangeAspect="1"/>
           </p:cNvPicPr>
@@ -11778,8 +11778,8 @@
         </p:blipFill>
         <p:spPr>
           <a:xfrm>
-            <a:off x="6510526" y="2532888"/>
-            <a:ext cx="588264" cy="274320"/>
+            <a:off x="6510526" y="2532316"/>
+            <a:ext cx="581977" cy="274891"/>
           </a:xfrm>
           <a:prstGeom prst="rect">
             <a:avLst/>
@@ -11794,7 +11794,7 @@
         </p:nvSpPr>
         <p:spPr>
           <a:xfrm>
-            <a:off x="7098790" y="2464308"/>
+            <a:off x="7092503" y="2464308"/>
             <a:ext cx="374819" cy="457200"/>
           </a:xfrm>
           <a:prstGeom prst="rect">
@@ -12986,7 +12986,7 @@
       </p:sp>
       <p:pic>
         <p:nvPicPr>
-          <p:cNvPr id="9" name="Picture 8" descr="88d2b26b87c7a8c9.png"/>
+          <p:cNvPr id="9" name="Picture 8" descr="23c46f257f02bce0.png"/>
           <p:cNvPicPr>
             <a:picLocks noChangeAspect="1"/>
           </p:cNvPicPr>
@@ -13000,8 +13000,8 @@
         </p:blipFill>
         <p:spPr>
           <a:xfrm>
-            <a:off x="2408921" y="1540573"/>
-            <a:ext cx="1847088" cy="243840"/>
+            <a:off x="2408921" y="1548106"/>
+            <a:ext cx="1768117" cy="234957"/>
           </a:xfrm>
           <a:prstGeom prst="rect">
             <a:avLst/>
@@ -13016,7 +13016,7 @@
         </p:nvSpPr>
         <p:spPr>
           <a:xfrm>
-            <a:off x="4256009" y="1440180"/>
+            <a:off x="4177039" y="1440180"/>
             <a:ext cx="4831351" cy="457200"/>
           </a:xfrm>
           <a:prstGeom prst="rect">
@@ -13051,7 +13051,7 @@
         </p:nvSpPr>
         <p:spPr>
           <a:xfrm>
-            <a:off x="9498840" y="1440180"/>
+            <a:off x="9419870" y="1440180"/>
             <a:ext cx="1559241" cy="457200"/>
           </a:xfrm>
           <a:prstGeom prst="rect">
@@ -13115,7 +13115,7 @@
       </p:sp>
       <p:pic>
         <p:nvPicPr>
-          <p:cNvPr id="13" name="Picture 12" descr="15179f9c1b681126.png"/>
+          <p:cNvPr id="13" name="Picture 12" descr="4f88773a30225488.png"/>
           <p:cNvPicPr>
             <a:picLocks noChangeAspect="1"/>
           </p:cNvPicPr>
@@ -13129,8 +13129,8 @@
         </p:blipFill>
         <p:spPr>
           <a:xfrm>
-            <a:off x="4754136" y="2119693"/>
-            <a:ext cx="774192" cy="277368"/>
+            <a:off x="4754136" y="2129901"/>
+            <a:ext cx="740473" cy="265811"/>
           </a:xfrm>
           <a:prstGeom prst="rect">
             <a:avLst/>
@@ -13145,7 +13145,7 @@
         </p:nvSpPr>
         <p:spPr>
           <a:xfrm>
-            <a:off x="5528328" y="2052828"/>
+            <a:off x="5494609" y="2052828"/>
             <a:ext cx="2026935" cy="457200"/>
           </a:xfrm>
           <a:prstGeom prst="rect">
@@ -13174,7 +13174,7 @@
       </p:sp>
       <p:pic>
         <p:nvPicPr>
-          <p:cNvPr id="15" name="Picture 14" descr="0937735c0d6e3897.png"/>
+          <p:cNvPr id="15" name="Picture 14" descr="8058f93241672fda.png"/>
           <p:cNvPicPr>
             <a:picLocks noChangeAspect="1"/>
           </p:cNvPicPr>
@@ -13188,8 +13188,8 @@
         </p:blipFill>
         <p:spPr>
           <a:xfrm>
-            <a:off x="7418103" y="2162365"/>
-            <a:ext cx="603504" cy="234696"/>
+            <a:off x="7384384" y="2170247"/>
+            <a:ext cx="579088" cy="225464"/>
           </a:xfrm>
           <a:prstGeom prst="rect">
             <a:avLst/>
@@ -13204,7 +13204,7 @@
         </p:nvSpPr>
         <p:spPr>
           <a:xfrm>
-            <a:off x="8021607" y="2052828"/>
+            <a:off x="7963473" y="2052828"/>
             <a:ext cx="2738367" cy="457200"/>
           </a:xfrm>
           <a:prstGeom prst="rect">
@@ -13312,7 +13312,7 @@
       </p:sp>
       <p:pic>
         <p:nvPicPr>
-          <p:cNvPr id="19" name="Picture 18" descr="dd9d4cf5c31a1b9e.png"/>
+          <p:cNvPr id="19" name="Picture 18" descr="c261042202a19b4a.png"/>
           <p:cNvPicPr>
             <a:picLocks noChangeAspect="1"/>
           </p:cNvPicPr>
@@ -13326,8 +13326,8 @@
         </p:blipFill>
         <p:spPr>
           <a:xfrm>
-            <a:off x="5012661" y="3241357"/>
-            <a:ext cx="1036320" cy="225552"/>
+            <a:off x="5012661" y="3249588"/>
+            <a:ext cx="994417" cy="215971"/>
           </a:xfrm>
           <a:prstGeom prst="rect">
             <a:avLst/>
@@ -13342,7 +13342,7 @@
         </p:nvSpPr>
         <p:spPr>
           <a:xfrm>
-            <a:off x="6597621" y="3122676"/>
+            <a:off x="6555719" y="3122676"/>
             <a:ext cx="744448" cy="457200"/>
           </a:xfrm>
           <a:prstGeom prst="rect">
@@ -13406,7 +13406,7 @@
       </p:sp>
       <p:pic>
         <p:nvPicPr>
-          <p:cNvPr id="22" name="Picture 21" descr="a7e24ba549ecbc3a.png"/>
+          <p:cNvPr id="22" name="Picture 21" descr="419008846420ef41.png"/>
           <p:cNvPicPr>
             <a:picLocks noChangeAspect="1"/>
           </p:cNvPicPr>
@@ -13420,8 +13420,8 @@
         </p:blipFill>
         <p:spPr>
           <a:xfrm>
-            <a:off x="2444241" y="3832669"/>
-            <a:ext cx="1347216" cy="240791"/>
+            <a:off x="2444241" y="3838503"/>
+            <a:ext cx="1286335" cy="234957"/>
           </a:xfrm>
           <a:prstGeom prst="rect">
             <a:avLst/>
@@ -13436,7 +13436,7 @@
         </p:nvSpPr>
         <p:spPr>
           <a:xfrm>
-            <a:off x="3791457" y="3735324"/>
+            <a:off x="3730576" y="3735324"/>
             <a:ext cx="6844254" cy="457200"/>
           </a:xfrm>
           <a:prstGeom prst="rect">
@@ -14639,7 +14639,7 @@
       </p:sp>
       <p:pic>
         <p:nvPicPr>
-          <p:cNvPr id="11" name="Picture 10" descr="2153689eab6c373c.png"/>
+          <p:cNvPr id="11" name="Picture 10" descr="8f2e55c8bb5bdd8e.png"/>
           <p:cNvPicPr>
             <a:picLocks noChangeAspect="1"/>
           </p:cNvPicPr>
@@ -14653,8 +14653,8 @@
         </p:blipFill>
         <p:spPr>
           <a:xfrm>
-            <a:off x="2912548" y="2538984"/>
-            <a:ext cx="560832" cy="268224"/>
+            <a:off x="2912548" y="2532316"/>
+            <a:ext cx="559689" cy="274891"/>
           </a:xfrm>
           <a:prstGeom prst="rect">
             <a:avLst/>
@@ -14669,7 +14669,7 @@
         </p:nvSpPr>
         <p:spPr>
           <a:xfrm>
-            <a:off x="3473380" y="2464308"/>
+            <a:off x="3472237" y="2464308"/>
             <a:ext cx="614511" cy="457200"/>
           </a:xfrm>
           <a:prstGeom prst="rect">
@@ -14698,7 +14698,7 @@
       </p:sp>
       <p:pic>
         <p:nvPicPr>
-          <p:cNvPr id="13" name="Picture 12" descr="146ce481013c058e.png"/>
+          <p:cNvPr id="13" name="Picture 12" descr="fb5b0e70f63b0edd.png"/>
           <p:cNvPicPr>
             <a:picLocks noChangeAspect="1"/>
           </p:cNvPicPr>
@@ -14712,8 +14712,8 @@
         </p:blipFill>
         <p:spPr>
           <a:xfrm>
-            <a:off x="3950732" y="2538984"/>
-            <a:ext cx="783336" cy="268224"/>
+            <a:off x="3949589" y="2534793"/>
+            <a:ext cx="785050" cy="272415"/>
           </a:xfrm>
           <a:prstGeom prst="rect">
             <a:avLst/>
@@ -14728,7 +14728,7 @@
         </p:nvSpPr>
         <p:spPr>
           <a:xfrm>
-            <a:off x="4734068" y="2464308"/>
+            <a:off x="4734639" y="2464308"/>
             <a:ext cx="1705314" cy="457200"/>
           </a:xfrm>
           <a:prstGeom prst="rect">
@@ -14757,7 +14757,7 @@
       </p:sp>
       <p:pic>
         <p:nvPicPr>
-          <p:cNvPr id="15" name="Picture 14" descr="be501a9f3fe0d87d.png"/>
+          <p:cNvPr id="15" name="Picture 14" descr="941bdd639930e1fa.png"/>
           <p:cNvPicPr>
             <a:picLocks noChangeAspect="1"/>
           </p:cNvPicPr>
@@ -14771,8 +14771,8 @@
         </p:blipFill>
         <p:spPr>
           <a:xfrm>
-            <a:off x="6302222" y="2584704"/>
-            <a:ext cx="1399032" cy="222504"/>
+            <a:off x="6302794" y="2584323"/>
+            <a:ext cx="1399222" cy="222885"/>
           </a:xfrm>
           <a:prstGeom prst="rect">
             <a:avLst/>
@@ -14787,7 +14787,7 @@
         </p:nvSpPr>
         <p:spPr>
           <a:xfrm>
-            <a:off x="7701254" y="2464308"/>
+            <a:off x="7702016" y="2464308"/>
             <a:ext cx="280301" cy="457200"/>
           </a:xfrm>
           <a:prstGeom prst="rect">
@@ -15208,7 +15208,7 @@
       </p:sp>
       <p:pic>
         <p:nvPicPr>
-          <p:cNvPr id="11" name="Picture 10" descr="a93cf3a68f39c808.png"/>
+          <p:cNvPr id="11" name="Picture 10" descr="7b97a516d29415e7.png"/>
           <p:cNvPicPr>
             <a:picLocks noChangeAspect="1"/>
           </p:cNvPicPr>
@@ -15222,8 +15222,8 @@
         </p:blipFill>
         <p:spPr>
           <a:xfrm>
-            <a:off x="2912548" y="2538984"/>
-            <a:ext cx="560832" cy="268224"/>
+            <a:off x="2912548" y="2532316"/>
+            <a:ext cx="562165" cy="274891"/>
           </a:xfrm>
           <a:prstGeom prst="rect">
             <a:avLst/>
@@ -15238,7 +15238,7 @@
         </p:nvSpPr>
         <p:spPr>
           <a:xfrm>
-            <a:off x="3473380" y="2464308"/>
+            <a:off x="3474714" y="2464308"/>
             <a:ext cx="614511" cy="457200"/>
           </a:xfrm>
           <a:prstGeom prst="rect">
@@ -15267,7 +15267,7 @@
       </p:sp>
       <p:pic>
         <p:nvPicPr>
-          <p:cNvPr id="13" name="Picture 12" descr="db71148f8587025f.png"/>
+          <p:cNvPr id="13" name="Picture 12" descr="f7559e20e57a5dd9.png"/>
           <p:cNvPicPr>
             <a:picLocks noChangeAspect="1"/>
           </p:cNvPicPr>
@@ -15281,8 +15281,8 @@
         </p:blipFill>
         <p:spPr>
           <a:xfrm>
-            <a:off x="3950732" y="2538984"/>
-            <a:ext cx="786384" cy="268224"/>
+            <a:off x="3952065" y="2534793"/>
+            <a:ext cx="787527" cy="272415"/>
           </a:xfrm>
           <a:prstGeom prst="rect">
             <a:avLst/>
@@ -15297,7 +15297,7 @@
         </p:nvSpPr>
         <p:spPr>
           <a:xfrm>
-            <a:off x="4737116" y="2464308"/>
+            <a:off x="4739592" y="2464308"/>
             <a:ext cx="1705314" cy="457200"/>
           </a:xfrm>
           <a:prstGeom prst="rect">
@@ -15326,7 +15326,7 @@
       </p:sp>
       <p:pic>
         <p:nvPicPr>
-          <p:cNvPr id="15" name="Picture 14" descr="b2ab879000df8962.png"/>
+          <p:cNvPr id="15" name="Picture 14" descr="cf3a2a0005dd5180.png"/>
           <p:cNvPicPr>
             <a:picLocks noChangeAspect="1"/>
           </p:cNvPicPr>
@@ -15340,8 +15340,8 @@
         </p:blipFill>
         <p:spPr>
           <a:xfrm>
-            <a:off x="6305270" y="2584704"/>
-            <a:ext cx="1402080" cy="222504"/>
+            <a:off x="6307747" y="2584323"/>
+            <a:ext cx="1404175" cy="222885"/>
           </a:xfrm>
           <a:prstGeom prst="rect">
             <a:avLst/>
@@ -15356,7 +15356,7 @@
         </p:nvSpPr>
         <p:spPr>
           <a:xfrm>
-            <a:off x="7707350" y="2464308"/>
+            <a:off x="7711922" y="2464308"/>
             <a:ext cx="280301" cy="457200"/>
           </a:xfrm>
           <a:prstGeom prst="rect">
@@ -17497,8 +17497,8 @@
         </p:blipFill>
         <p:spPr>
           <a:xfrm>
-            <a:off x="2297613" y="2746430"/>
-            <a:ext cx="1792224" cy="289560"/>
+            <a:off x="2297613" y="2857158"/>
+            <a:ext cx="1092136" cy="176450"/>
           </a:xfrm>
           <a:prstGeom prst="rect">
             <a:avLst/>
@@ -17513,7 +17513,7 @@
         </p:nvSpPr>
         <p:spPr>
           <a:xfrm>
-            <a:off x="4089837" y="2715569"/>
+            <a:off x="3389749" y="2715569"/>
             <a:ext cx="336202" cy="457200"/>
           </a:xfrm>
           <a:prstGeom prst="rect">
@@ -17556,8 +17556,8 @@
         </p:blipFill>
         <p:spPr>
           <a:xfrm>
-            <a:off x="4288880" y="2758622"/>
-            <a:ext cx="2234184" cy="362712"/>
+            <a:off x="3588792" y="2864587"/>
+            <a:ext cx="1361455" cy="221027"/>
           </a:xfrm>
           <a:prstGeom prst="rect">
             <a:avLst/>
@@ -17650,8 +17650,8 @@
         </p:blipFill>
         <p:spPr>
           <a:xfrm>
-            <a:off x="2356112" y="3716886"/>
-            <a:ext cx="1831848" cy="289560"/>
+            <a:off x="2356112" y="3827615"/>
+            <a:ext cx="1116282" cy="176450"/>
           </a:xfrm>
           <a:prstGeom prst="rect">
             <a:avLst/>
@@ -17666,7 +17666,7 @@
         </p:nvSpPr>
         <p:spPr>
           <a:xfrm>
-            <a:off x="4187960" y="3686025"/>
+            <a:off x="3472394" y="3686025"/>
             <a:ext cx="3976443" cy="457200"/>
           </a:xfrm>
           <a:prstGeom prst="rect">
@@ -17744,8 +17744,8 @@
         </p:blipFill>
         <p:spPr>
           <a:xfrm>
-            <a:off x="1143000" y="4679342"/>
-            <a:ext cx="399288" cy="304800"/>
+            <a:off x="1143000" y="4785070"/>
+            <a:ext cx="243316" cy="185737"/>
           </a:xfrm>
           <a:prstGeom prst="rect">
             <a:avLst/>
@@ -17760,7 +17760,7 @@
         </p:nvSpPr>
         <p:spPr>
           <a:xfrm>
-            <a:off x="1542287" y="4656482"/>
+            <a:off x="1386316" y="4656482"/>
             <a:ext cx="336202" cy="457200"/>
           </a:xfrm>
           <a:prstGeom prst="rect">
@@ -17803,8 +17803,8 @@
         </p:blipFill>
         <p:spPr>
           <a:xfrm>
-            <a:off x="1741330" y="4679342"/>
-            <a:ext cx="661416" cy="304800"/>
+            <a:off x="1585358" y="4788784"/>
+            <a:ext cx="403050" cy="185737"/>
           </a:xfrm>
           <a:prstGeom prst="rect">
             <a:avLst/>
@@ -17819,7 +17819,7 @@
         </p:nvSpPr>
         <p:spPr>
           <a:xfrm>
-            <a:off x="2402746" y="4656482"/>
+            <a:off x="1988409" y="4656482"/>
             <a:ext cx="336202" cy="457200"/>
           </a:xfrm>
           <a:prstGeom prst="rect">
@@ -17862,8 +17862,8 @@
         </p:blipFill>
         <p:spPr>
           <a:xfrm>
-            <a:off x="2601789" y="4679342"/>
-            <a:ext cx="445008" cy="301752"/>
+            <a:off x="2187451" y="4786927"/>
+            <a:ext cx="271176" cy="183880"/>
           </a:xfrm>
           <a:prstGeom prst="rect">
             <a:avLst/>
@@ -17878,7 +17878,7 @@
         </p:nvSpPr>
         <p:spPr>
           <a:xfrm>
-            <a:off x="3046797" y="4656482"/>
+            <a:off x="2458628" y="4656482"/>
             <a:ext cx="4736083" cy="457200"/>
           </a:xfrm>
           <a:prstGeom prst="rect">
@@ -17956,8 +17956,8 @@
         </p:blipFill>
         <p:spPr>
           <a:xfrm>
-            <a:off x="1143000" y="5649799"/>
-            <a:ext cx="399288" cy="301752"/>
+            <a:off x="1143000" y="5757384"/>
+            <a:ext cx="243316" cy="183880"/>
           </a:xfrm>
           <a:prstGeom prst="rect">
             <a:avLst/>
@@ -17972,7 +17972,7 @@
         </p:nvSpPr>
         <p:spPr>
           <a:xfrm>
-            <a:off x="1542287" y="5626939"/>
+            <a:off x="1386316" y="5626939"/>
             <a:ext cx="336202" cy="457200"/>
           </a:xfrm>
           <a:prstGeom prst="rect">
@@ -18015,8 +18015,8 @@
         </p:blipFill>
         <p:spPr>
           <a:xfrm>
-            <a:off x="1741330" y="5649799"/>
-            <a:ext cx="426720" cy="298704"/>
+            <a:off x="1585358" y="5759241"/>
+            <a:ext cx="260032" cy="182022"/>
           </a:xfrm>
           <a:prstGeom prst="rect">
             <a:avLst/>
@@ -18031,7 +18031,7 @@
         </p:nvSpPr>
         <p:spPr>
           <a:xfrm>
-            <a:off x="2168050" y="5626939"/>
+            <a:off x="1845391" y="5626939"/>
             <a:ext cx="5560168" cy="457200"/>
           </a:xfrm>
           <a:prstGeom prst="rect">
@@ -19337,7 +19337,7 @@
       </p:sp>
       <p:pic>
         <p:nvPicPr>
-          <p:cNvPr id="8" name="Picture 7" descr="86539a90126a0911.png"/>
+          <p:cNvPr id="8" name="Picture 7" descr="b889ac44668791a2.png"/>
           <p:cNvPicPr>
             <a:picLocks noChangeAspect="1"/>
           </p:cNvPicPr>
@@ -19351,8 +19351,8 @@
         </p:blipFill>
         <p:spPr>
           <a:xfrm>
-            <a:off x="3219450" y="2191512"/>
-            <a:ext cx="1987296" cy="304800"/>
+            <a:off x="3221260" y="2192845"/>
+            <a:ext cx="1983676" cy="304609"/>
           </a:xfrm>
           <a:prstGeom prst="rect">
             <a:avLst/>
@@ -19367,7 +19367,7 @@
         </p:nvSpPr>
         <p:spPr>
           <a:xfrm>
-            <a:off x="5206746" y="2080260"/>
+            <a:off x="5204936" y="2080260"/>
             <a:ext cx="3872483" cy="457200"/>
           </a:xfrm>
           <a:prstGeom prst="rect">

--- a/a7/build/out/u5/A7 5.08 Converting Mass, Area and Volume - Slides.pptx
+++ b/a7/build/out/u5/A7 5.08 Converting Mass, Area and Volume - Slides.pptx
@@ -5619,8 +5619,8 @@
         </p:blipFill>
         <p:spPr>
           <a:xfrm>
-            <a:off x="3873429" y="2912934"/>
-            <a:ext cx="906708" cy="335153"/>
+            <a:off x="3908187" y="2938255"/>
+            <a:ext cx="836961" cy="309372"/>
           </a:xfrm>
           <a:prstGeom prst="rect">
             <a:avLst/>
@@ -5635,7 +5635,7 @@
         </p:nvSpPr>
         <p:spPr>
           <a:xfrm>
-            <a:off x="4780138" y="2875390"/>
+            <a:off x="4745149" y="2875390"/>
             <a:ext cx="3757832" cy="457200"/>
           </a:xfrm>
           <a:prstGeom prst="rect">
@@ -5696,7 +5696,7 @@
         </p:blipFill>
         <p:spPr>
           <a:xfrm>
-            <a:off x="3873429" y="3531662"/>
+            <a:off x="3908187" y="3531662"/>
             <a:ext cx="1402080" cy="252984"/>
           </a:xfrm>
           <a:prstGeom prst="rect">
@@ -9709,8 +9709,8 @@
         </p:blipFill>
         <p:spPr>
           <a:xfrm>
-            <a:off x="3873429" y="3772470"/>
-            <a:ext cx="906708" cy="335153"/>
+            <a:off x="3908187" y="3797791"/>
+            <a:ext cx="836961" cy="309372"/>
           </a:xfrm>
           <a:prstGeom prst="rect">
             <a:avLst/>
@@ -9725,7 +9725,7 @@
         </p:nvSpPr>
         <p:spPr>
           <a:xfrm>
-            <a:off x="4780138" y="3734926"/>
+            <a:off x="4745149" y="3734926"/>
             <a:ext cx="3757832" cy="457200"/>
           </a:xfrm>
           <a:prstGeom prst="rect">
@@ -9786,7 +9786,7 @@
         </p:blipFill>
         <p:spPr>
           <a:xfrm>
-            <a:off x="3873429" y="4394246"/>
+            <a:off x="3908187" y="4394246"/>
             <a:ext cx="1353312" cy="249935"/>
           </a:xfrm>
           <a:prstGeom prst="rect">

--- a/a7/build/out/u5/A7 5.08 Converting Mass, Area and Volume - Slides.pptx
+++ b/a7/build/out/u5/A7 5.08 Converting Mass, Area and Volume - Slides.pptx
@@ -18358,7 +18358,7 @@
       </p:cxnSp>
       <p:pic>
         <p:nvPicPr>
-          <p:cNvPr id="10" name="Picture 9" descr="a3faf06fd849e2fa.png"/>
+          <p:cNvPr id="10" name="Picture 9" descr="02daf8da0d1e34b5.png"/>
           <p:cNvPicPr>
             <a:picLocks noChangeAspect="1"/>
           </p:cNvPicPr>
@@ -18372,8 +18372,8 @@
         </p:blipFill>
         <p:spPr>
           <a:xfrm>
-            <a:off x="1984247" y="2029968"/>
-            <a:ext cx="8193024" cy="374904"/>
+            <a:off x="1807464" y="2231136"/>
+            <a:ext cx="8546592" cy="374904"/>
           </a:xfrm>
           <a:prstGeom prst="rect">
             <a:avLst/>
@@ -18704,7 +18704,7 @@
       </p:pic>
       <p:pic>
         <p:nvPicPr>
-          <p:cNvPr id="11" name="Picture 10" descr="2bbb456a3f9066dd.png"/>
+          <p:cNvPr id="11" name="Picture 10" descr="974c14d3ea300a36.png"/>
           <p:cNvPicPr>
             <a:picLocks noChangeAspect="1"/>
           </p:cNvPicPr>
@@ -18718,8 +18718,8 @@
         </p:blipFill>
         <p:spPr>
           <a:xfrm>
-            <a:off x="2602992" y="4437881"/>
-            <a:ext cx="6955536" cy="341376"/>
+            <a:off x="2426208" y="4437881"/>
+            <a:ext cx="7309104" cy="341376"/>
           </a:xfrm>
           <a:prstGeom prst="rect">
             <a:avLst/>
@@ -19050,7 +19050,7 @@
       </p:cxnSp>
       <p:pic>
         <p:nvPicPr>
-          <p:cNvPr id="10" name="Picture 9" descr="168b725b0adf2146.png"/>
+          <p:cNvPr id="10" name="Picture 9" descr="af33f2f218af8f16.png"/>
           <p:cNvPicPr>
             <a:picLocks noChangeAspect="1"/>
           </p:cNvPicPr>
@@ -19064,8 +19064,8 @@
         </p:blipFill>
         <p:spPr>
           <a:xfrm>
-            <a:off x="2700528" y="2039493"/>
-            <a:ext cx="6760464" cy="289560"/>
+            <a:off x="2523744" y="2240661"/>
+            <a:ext cx="7114032" cy="289560"/>
           </a:xfrm>
           <a:prstGeom prst="rect">
             <a:avLst/>
@@ -19080,7 +19080,7 @@
         </p:nvSpPr>
         <p:spPr>
           <a:xfrm>
-            <a:off x="987552" y="2743200"/>
+            <a:off x="987552" y="3145536"/>
             <a:ext cx="10131551" cy="475488"/>
           </a:xfrm>
           <a:prstGeom prst="rect">

--- a/a7/build/out/u5/A7 5.08 Converting Mass, Area and Volume - Slides.pptx
+++ b/a7/build/out/u5/A7 5.08 Converting Mass, Area and Volume - Slides.pptx
@@ -16968,7 +16968,7 @@
                 </a:solidFill>
                 <a:latin typeface="Lexend"/>
               </a:rPr>
-              <a:t>Every skill listed is required, to a SmartScore of 67. Due at the start of the next class.</a:t>
+              <a:t>Every skill listed is required, to a SmartScore of 67. Due by the Unit 5 test.</a:t>
             </a:r>
           </a:p>
         </p:txBody>
